--- a/slides/week3.pptx
+++ b/slides/week3.pptx
@@ -12,7 +12,7 @@
     <p:sldId id="258" r:id="rId3"/>
     <p:sldId id="278" r:id="rId4"/>
     <p:sldId id="279" r:id="rId5"/>
-    <p:sldId id="281" r:id="rId6"/>
+    <p:sldId id="282" r:id="rId6"/>
     <p:sldId id="276" r:id="rId7"/>
     <p:sldId id="280" r:id="rId8"/>
   </p:sldIdLst>
@@ -203,7 +203,7 @@
           <a:p>
             <a:fld id="{D7A422DF-4847-4D6E-BB97-9B75D56F5D74}" type="datetimeFigureOut">
               <a:rPr lang="it-IT" smtClean="0"/>
-              <a:t>15/07/2026</a:t>
+              <a:t>16/07/2026</a:t>
             </a:fld>
             <a:endParaRPr lang="it-IT"/>
           </a:p>
@@ -833,7 +833,7 @@
           <a:p>
             <a:fld id="{4B734174-4AE7-4BE8-A29D-97641C0FB41A}" type="datetimeFigureOut">
               <a:rPr lang="it-IT" smtClean="0"/>
-              <a:t>15/07/2026</a:t>
+              <a:t>16/07/2026</a:t>
             </a:fld>
             <a:endParaRPr lang="it-IT"/>
           </a:p>
@@ -1031,7 +1031,7 @@
           <a:p>
             <a:fld id="{4B734174-4AE7-4BE8-A29D-97641C0FB41A}" type="datetimeFigureOut">
               <a:rPr lang="it-IT" smtClean="0"/>
-              <a:t>15/07/2026</a:t>
+              <a:t>16/07/2026</a:t>
             </a:fld>
             <a:endParaRPr lang="it-IT"/>
           </a:p>
@@ -1239,7 +1239,7 @@
           <a:p>
             <a:fld id="{4B734174-4AE7-4BE8-A29D-97641C0FB41A}" type="datetimeFigureOut">
               <a:rPr lang="it-IT" smtClean="0"/>
-              <a:t>15/07/2026</a:t>
+              <a:t>16/07/2026</a:t>
             </a:fld>
             <a:endParaRPr lang="it-IT"/>
           </a:p>
@@ -1437,7 +1437,7 @@
           <a:p>
             <a:fld id="{4B734174-4AE7-4BE8-A29D-97641C0FB41A}" type="datetimeFigureOut">
               <a:rPr lang="it-IT" smtClean="0"/>
-              <a:t>15/07/2026</a:t>
+              <a:t>16/07/2026</a:t>
             </a:fld>
             <a:endParaRPr lang="it-IT"/>
           </a:p>
@@ -1712,7 +1712,7 @@
           <a:p>
             <a:fld id="{4B734174-4AE7-4BE8-A29D-97641C0FB41A}" type="datetimeFigureOut">
               <a:rPr lang="it-IT" smtClean="0"/>
-              <a:t>15/07/2026</a:t>
+              <a:t>16/07/2026</a:t>
             </a:fld>
             <a:endParaRPr lang="it-IT"/>
           </a:p>
@@ -1977,7 +1977,7 @@
           <a:p>
             <a:fld id="{4B734174-4AE7-4BE8-A29D-97641C0FB41A}" type="datetimeFigureOut">
               <a:rPr lang="it-IT" smtClean="0"/>
-              <a:t>15/07/2026</a:t>
+              <a:t>16/07/2026</a:t>
             </a:fld>
             <a:endParaRPr lang="it-IT"/>
           </a:p>
@@ -2389,7 +2389,7 @@
           <a:p>
             <a:fld id="{4B734174-4AE7-4BE8-A29D-97641C0FB41A}" type="datetimeFigureOut">
               <a:rPr lang="it-IT" smtClean="0"/>
-              <a:t>15/07/2026</a:t>
+              <a:t>16/07/2026</a:t>
             </a:fld>
             <a:endParaRPr lang="it-IT"/>
           </a:p>
@@ -2530,7 +2530,7 @@
           <a:p>
             <a:fld id="{4B734174-4AE7-4BE8-A29D-97641C0FB41A}" type="datetimeFigureOut">
               <a:rPr lang="it-IT" smtClean="0"/>
-              <a:t>15/07/2026</a:t>
+              <a:t>16/07/2026</a:t>
             </a:fld>
             <a:endParaRPr lang="it-IT"/>
           </a:p>
@@ -2643,7 +2643,7 @@
           <a:p>
             <a:fld id="{4B734174-4AE7-4BE8-A29D-97641C0FB41A}" type="datetimeFigureOut">
               <a:rPr lang="it-IT" smtClean="0"/>
-              <a:t>15/07/2026</a:t>
+              <a:t>16/07/2026</a:t>
             </a:fld>
             <a:endParaRPr lang="it-IT"/>
           </a:p>
@@ -2954,7 +2954,7 @@
           <a:p>
             <a:fld id="{4B734174-4AE7-4BE8-A29D-97641C0FB41A}" type="datetimeFigureOut">
               <a:rPr lang="it-IT" smtClean="0"/>
-              <a:t>15/07/2026</a:t>
+              <a:t>16/07/2026</a:t>
             </a:fld>
             <a:endParaRPr lang="it-IT"/>
           </a:p>
@@ -3242,7 +3242,7 @@
           <a:p>
             <a:fld id="{4B734174-4AE7-4BE8-A29D-97641C0FB41A}" type="datetimeFigureOut">
               <a:rPr lang="it-IT" smtClean="0"/>
-              <a:t>15/07/2026</a:t>
+              <a:t>16/07/2026</a:t>
             </a:fld>
             <a:endParaRPr lang="it-IT"/>
           </a:p>
@@ -3483,7 +3483,7 @@
           <a:p>
             <a:fld id="{4B734174-4AE7-4BE8-A29D-97641C0FB41A}" type="datetimeFigureOut">
               <a:rPr lang="it-IT" smtClean="0"/>
-              <a:t>15/07/2026</a:t>
+              <a:t>16/07/2026</a:t>
             </a:fld>
             <a:endParaRPr lang="it-IT"/>
           </a:p>
@@ -4129,8 +4129,8 @@
           </a:p>
         </p:txBody>
       </p:sp>
-      <mc:AlternateContent xmlns:mc="http://schemas.openxmlformats.org/markup-compatibility/2006">
-        <mc:Choice xmlns:a14="http://schemas.microsoft.com/office/drawing/2010/main" Requires="a14">
+      <mc:AlternateContent xmlns:mc="http://schemas.openxmlformats.org/markup-compatibility/2006" xmlns:a14="http://schemas.microsoft.com/office/drawing/2010/main">
+        <mc:Choice Requires="a14">
           <p:sp>
             <p:nvSpPr>
               <p:cNvPr id="3" name="Segnaposto contenuto 2">
@@ -4260,7 +4260,7 @@
             </p:txBody>
           </p:sp>
         </mc:Choice>
-        <mc:Fallback>
+        <mc:Fallback xmlns="">
           <p:sp>
             <p:nvSpPr>
               <p:cNvPr id="3" name="Segnaposto contenuto 2">
@@ -4456,6 +4456,42 @@
           <a:chExt cx="0" cy="0"/>
         </a:xfrm>
       </p:grpSpPr>
+      <p:pic>
+        <p:nvPicPr>
+          <p:cNvPr id="8" name="Immagine 7">
+            <a:extLst>
+              <a:ext uri="{FF2B5EF4-FFF2-40B4-BE49-F238E27FC236}">
+                <a16:creationId xmlns:a16="http://schemas.microsoft.com/office/drawing/2014/main" id="{C8479E72-EF8C-7B07-BBB6-1817F9461A92}"/>
+              </a:ext>
+            </a:extLst>
+          </p:cNvPr>
+          <p:cNvPicPr>
+            <a:picLocks noChangeAspect="1"/>
+          </p:cNvPicPr>
+          <p:nvPr/>
+        </p:nvPicPr>
+        <p:blipFill>
+          <a:blip r:embed="rId2">
+            <a:extLst>
+              <a:ext uri="{28A0092B-C50C-407E-A947-70E740481C1C}">
+                <a14:useLocalDpi xmlns:a14="http://schemas.microsoft.com/office/drawing/2010/main" val="0"/>
+              </a:ext>
+            </a:extLst>
+          </a:blip>
+          <a:stretch>
+            <a:fillRect/>
+          </a:stretch>
+        </p:blipFill>
+        <p:spPr>
+          <a:xfrm>
+            <a:off x="0" y="1568309"/>
+            <a:ext cx="6263248" cy="4680000"/>
+          </a:xfrm>
+          <a:prstGeom prst="rect">
+            <a:avLst/>
+          </a:prstGeom>
+        </p:spPr>
+      </p:pic>
       <p:sp>
         <p:nvSpPr>
           <p:cNvPr id="2" name="Titolo 1">
@@ -4504,59 +4540,44 @@
           </a:p>
         </p:txBody>
       </p:sp>
-      <p:sp>
-        <p:nvSpPr>
-          <p:cNvPr id="3" name="Segnaposto contenuto 2">
-            <a:extLst>
-              <a:ext uri="{FF2B5EF4-FFF2-40B4-BE49-F238E27FC236}">
-                <a16:creationId xmlns:a16="http://schemas.microsoft.com/office/drawing/2014/main" id="{E7223258-7E47-E5CF-21AF-62299220444A}"/>
-              </a:ext>
-            </a:extLst>
-          </p:cNvPr>
-          <p:cNvSpPr>
-            <a:spLocks noGrp="1"/>
-          </p:cNvSpPr>
+      <p:pic>
+        <p:nvPicPr>
+          <p:cNvPr id="10" name="Segnaposto contenuto 9">
+            <a:extLst>
+              <a:ext uri="{FF2B5EF4-FFF2-40B4-BE49-F238E27FC236}">
+                <a16:creationId xmlns:a16="http://schemas.microsoft.com/office/drawing/2014/main" id="{593973D7-9D30-694C-3199-822A09125A37}"/>
+              </a:ext>
+            </a:extLst>
+          </p:cNvPr>
+          <p:cNvPicPr>
+            <a:picLocks noGrp="1" noChangeAspect="1"/>
+          </p:cNvPicPr>
           <p:nvPr>
             <p:ph idx="1"/>
           </p:nvPr>
-        </p:nvSpPr>
+        </p:nvPicPr>
+        <p:blipFill>
+          <a:blip r:embed="rId3">
+            <a:extLst>
+              <a:ext uri="{28A0092B-C50C-407E-A947-70E740481C1C}">
+                <a14:useLocalDpi xmlns:a14="http://schemas.microsoft.com/office/drawing/2010/main" val="0"/>
+              </a:ext>
+            </a:extLst>
+          </a:blip>
+          <a:stretch>
+            <a:fillRect/>
+          </a:stretch>
+        </p:blipFill>
         <p:spPr>
           <a:xfrm>
-            <a:off x="838200" y="1401288"/>
-            <a:ext cx="10515600" cy="4776227"/>
+            <a:off x="5883792" y="1568309"/>
+            <a:ext cx="6263249" cy="4680000"/>
           </a:xfrm>
+          <a:prstGeom prst="rect">
+            <a:avLst/>
+          </a:prstGeom>
         </p:spPr>
-        <p:txBody>
-          <a:bodyPr>
-            <a:normAutofit/>
-          </a:bodyPr>
-          <a:lstStyle/>
-          <a:p>
-            <a:pPr marL="0" indent="0" algn="ctr">
-              <a:buNone/>
-            </a:pPr>
-            <a:r>
-              <a:rPr lang="en-US" sz="2800" dirty="0"/>
-              <a:t>2D map of torsion variation across the crystal surface</a:t>
-            </a:r>
-          </a:p>
-          <a:p>
-            <a:pPr marL="0" indent="0" algn="ctr">
-              <a:buNone/>
-            </a:pPr>
-            <a:endParaRPr lang="en-US" dirty="0"/>
-          </a:p>
-          <a:p>
-            <a:pPr marL="0" indent="0" algn="ctr">
-              <a:buNone/>
-            </a:pPr>
-            <a:r>
-              <a:rPr lang="en-US" sz="2800" i="1" dirty="0"/>
-              <a:t>2d torsion map plot</a:t>
-            </a:r>
-          </a:p>
-        </p:txBody>
-      </p:sp>
+      </p:pic>
       <p:sp>
         <p:nvSpPr>
           <p:cNvPr id="4" name="Segnaposto data 3">
@@ -4787,367 +4808,1334 @@
               </a:bodyPr>
               <a:lstStyle/>
               <a:p>
+                <a:pPr marL="0" indent="0">
+                  <a:buNone/>
+                </a:pPr>
                 <a:r>
                   <a:rPr lang="en-US" sz="2800" dirty="0"/>
-                  <a:t>The 2d map is fitted through </a:t>
+                  <a:t>The 2d map is fitted through:</a:t>
                 </a:r>
                 <a:endParaRPr lang="it-IT" sz="2800" b="0" i="1" dirty="0">
                   <a:latin typeface="Cambria Math" panose="02040503050406030204" pitchFamily="18" charset="0"/>
                 </a:endParaRPr>
               </a:p>
               <a:p>
-                <a:pPr marL="0" indent="0">
-                  <a:buNone/>
+                <a:pPr marL="514350" indent="-514350">
+                  <a:buFont typeface="+mj-lt"/>
+                  <a:buAutoNum type="arabicPeriod"/>
                 </a:pPr>
                 <a14:m>
-                  <m:oMathPara xmlns:m="http://schemas.openxmlformats.org/officeDocument/2006/math">
-                    <m:oMathParaPr>
-                      <m:jc m:val="centerGroup"/>
-                    </m:oMathParaPr>
-                    <m:oMath xmlns:m="http://schemas.openxmlformats.org/officeDocument/2006/math">
-                      <m:sSub>
-                        <m:sSubPr>
-                          <m:ctrlPr>
-                            <a:rPr lang="it-IT" sz="2800" b="0" i="1" smtClean="0">
-                              <a:latin typeface="Cambria Math" panose="02040503050406030204" pitchFamily="18" charset="0"/>
-                            </a:rPr>
-                          </m:ctrlPr>
-                        </m:sSubPr>
-                        <m:e>
-                          <m:r>
-                            <a:rPr lang="it-IT" sz="2800" b="0" i="1" smtClean="0">
-                              <a:latin typeface="Cambria Math" panose="02040503050406030204" pitchFamily="18" charset="0"/>
-                            </a:rPr>
-                            <m:t>𝜃</m:t>
-                          </m:r>
-                        </m:e>
-                        <m:sub>
-                          <m:r>
-                            <a:rPr lang="it-IT" sz="2800" b="0" i="1" smtClean="0">
-                              <a:latin typeface="Cambria Math" panose="02040503050406030204" pitchFamily="18" charset="0"/>
-                            </a:rPr>
-                            <m:t>𝑐𝑜𝑟𝑟</m:t>
-                          </m:r>
-                        </m:sub>
-                      </m:sSub>
-                      <m:d>
-                        <m:dPr>
-                          <m:ctrlPr>
-                            <a:rPr lang="it-IT" sz="2800" b="0" i="1" smtClean="0">
-                              <a:latin typeface="Cambria Math" panose="02040503050406030204" pitchFamily="18" charset="0"/>
-                            </a:rPr>
-                          </m:ctrlPr>
-                        </m:dPr>
-                        <m:e>
-                          <m:r>
-                            <a:rPr lang="it-IT" sz="2800" b="0" i="1" smtClean="0">
-                              <a:latin typeface="Cambria Math" panose="02040503050406030204" pitchFamily="18" charset="0"/>
-                            </a:rPr>
-                            <m:t>𝑥</m:t>
-                          </m:r>
-                          <m:r>
-                            <a:rPr lang="it-IT" sz="2800" b="0" i="1" smtClean="0">
-                              <a:latin typeface="Cambria Math" panose="02040503050406030204" pitchFamily="18" charset="0"/>
-                            </a:rPr>
-                            <m:t>,</m:t>
-                          </m:r>
-                          <m:r>
-                            <a:rPr lang="it-IT" sz="2800" b="0" i="1" smtClean="0">
-                              <a:latin typeface="Cambria Math" panose="02040503050406030204" pitchFamily="18" charset="0"/>
-                            </a:rPr>
-                            <m:t>𝑦</m:t>
-                          </m:r>
-                        </m:e>
-                      </m:d>
-                      <m:r>
-                        <a:rPr lang="it-IT" sz="2800" b="0" i="1" smtClean="0">
-                          <a:latin typeface="Cambria Math" panose="02040503050406030204" pitchFamily="18" charset="0"/>
-                        </a:rPr>
-                        <m:t>=</m:t>
-                      </m:r>
-                      <m:sSub>
-                        <m:sSubPr>
-                          <m:ctrlPr>
-                            <a:rPr lang="it-IT" sz="2800" b="0" i="1" smtClean="0">
-                              <a:latin typeface="Cambria Math" panose="02040503050406030204" pitchFamily="18" charset="0"/>
-                            </a:rPr>
-                          </m:ctrlPr>
-                        </m:sSubPr>
-                        <m:e>
-                          <m:r>
-                            <a:rPr lang="it-IT" sz="2800" b="0" i="1" smtClean="0">
-                              <a:latin typeface="Cambria Math" panose="02040503050406030204" pitchFamily="18" charset="0"/>
-                            </a:rPr>
-                            <m:t>𝜃</m:t>
-                          </m:r>
-                        </m:e>
-                        <m:sub>
-                          <m:r>
-                            <a:rPr lang="it-IT" sz="2800" b="0" i="1" smtClean="0">
-                              <a:latin typeface="Cambria Math" panose="02040503050406030204" pitchFamily="18" charset="0"/>
-                            </a:rPr>
-                            <m:t>0</m:t>
-                          </m:r>
-                        </m:sub>
-                      </m:sSub>
-                      <m:r>
-                        <a:rPr lang="it-IT" sz="2800" b="0" i="1" smtClean="0">
-                          <a:latin typeface="Cambria Math" panose="02040503050406030204" pitchFamily="18" charset="0"/>
-                        </a:rPr>
-                        <m:t>+</m:t>
-                      </m:r>
-                      <m:sSub>
-                        <m:sSubPr>
-                          <m:ctrlPr>
-                            <a:rPr lang="it-IT" sz="2800" b="0" i="1" smtClean="0">
-                              <a:latin typeface="Cambria Math" panose="02040503050406030204" pitchFamily="18" charset="0"/>
-                            </a:rPr>
-                          </m:ctrlPr>
-                        </m:sSubPr>
-                        <m:e>
-                          <m:r>
-                            <a:rPr lang="it-IT" sz="2800" b="0" i="1" smtClean="0">
-                              <a:latin typeface="Cambria Math" panose="02040503050406030204" pitchFamily="18" charset="0"/>
-                            </a:rPr>
-                            <m:t>𝜏</m:t>
-                          </m:r>
-                        </m:e>
-                        <m:sub>
-                          <m:r>
-                            <a:rPr lang="it-IT" sz="2800" b="0" i="1" smtClean="0">
-                              <a:latin typeface="Cambria Math" panose="02040503050406030204" pitchFamily="18" charset="0"/>
-                            </a:rPr>
-                            <m:t>𝑥</m:t>
-                          </m:r>
-                        </m:sub>
-                      </m:sSub>
-                      <m:r>
-                        <a:rPr lang="it-IT" sz="2800" b="0" i="1" smtClean="0">
-                          <a:latin typeface="Cambria Math" panose="02040503050406030204" pitchFamily="18" charset="0"/>
-                        </a:rPr>
-                        <m:t>⋅</m:t>
-                      </m:r>
-                      <m:r>
-                        <a:rPr lang="it-IT" sz="2800" b="0" i="1" smtClean="0">
-                          <a:latin typeface="Cambria Math" panose="02040503050406030204" pitchFamily="18" charset="0"/>
-                        </a:rPr>
-                        <m:t>𝑥</m:t>
-                      </m:r>
-                      <m:r>
-                        <a:rPr lang="it-IT" sz="2800" b="0" i="1" smtClean="0">
-                          <a:latin typeface="Cambria Math" panose="02040503050406030204" pitchFamily="18" charset="0"/>
-                        </a:rPr>
-                        <m:t>+</m:t>
-                      </m:r>
-                      <m:sSub>
-                        <m:sSubPr>
-                          <m:ctrlPr>
-                            <a:rPr lang="it-IT" sz="2800" b="0" i="1" smtClean="0">
-                              <a:latin typeface="Cambria Math" panose="02040503050406030204" pitchFamily="18" charset="0"/>
-                            </a:rPr>
-                          </m:ctrlPr>
-                        </m:sSubPr>
-                        <m:e>
-                          <m:r>
-                            <a:rPr lang="it-IT" sz="2800" b="0" i="1" smtClean="0">
-                              <a:latin typeface="Cambria Math" panose="02040503050406030204" pitchFamily="18" charset="0"/>
-                            </a:rPr>
-                            <m:t>𝜏</m:t>
-                          </m:r>
-                        </m:e>
-                        <m:sub>
-                          <m:r>
-                            <a:rPr lang="it-IT" sz="2800" b="0" i="1" smtClean="0">
-                              <a:latin typeface="Cambria Math" panose="02040503050406030204" pitchFamily="18" charset="0"/>
-                            </a:rPr>
-                            <m:t>𝑦</m:t>
-                          </m:r>
-                        </m:sub>
-                      </m:sSub>
-                      <m:r>
-                        <a:rPr lang="it-IT" sz="2800" b="0" i="1" smtClean="0">
-                          <a:latin typeface="Cambria Math" panose="02040503050406030204" pitchFamily="18" charset="0"/>
-                        </a:rPr>
-                        <m:t>⋅</m:t>
-                      </m:r>
-                      <m:r>
-                        <a:rPr lang="it-IT" sz="2800" b="0" i="1" smtClean="0">
-                          <a:latin typeface="Cambria Math" panose="02040503050406030204" pitchFamily="18" charset="0"/>
-                        </a:rPr>
-                        <m:t>𝑦</m:t>
-                      </m:r>
-                      <m:r>
-                        <a:rPr lang="it-IT" sz="2800" b="0" i="1" smtClean="0">
-                          <a:latin typeface="Cambria Math" panose="02040503050406030204" pitchFamily="18" charset="0"/>
-                        </a:rPr>
-                        <m:t>+</m:t>
-                      </m:r>
-                      <m:sSub>
-                        <m:sSubPr>
-                          <m:ctrlPr>
-                            <a:rPr lang="it-IT" sz="2800" b="0" i="1" smtClean="0">
-                              <a:latin typeface="Cambria Math" panose="02040503050406030204" pitchFamily="18" charset="0"/>
-                            </a:rPr>
-                          </m:ctrlPr>
-                        </m:sSubPr>
-                        <m:e>
-                          <m:r>
-                            <a:rPr lang="it-IT" sz="2800" b="0" i="1" smtClean="0">
-                              <a:latin typeface="Cambria Math" panose="02040503050406030204" pitchFamily="18" charset="0"/>
-                            </a:rPr>
-                            <m:t>𝑝</m:t>
-                          </m:r>
-                        </m:e>
-                        <m:sub>
-                          <m:r>
-                            <a:rPr lang="it-IT" sz="2800" b="0" i="1" smtClean="0">
-                              <a:latin typeface="Cambria Math" panose="02040503050406030204" pitchFamily="18" charset="0"/>
-                            </a:rPr>
-                            <m:t>3</m:t>
-                          </m:r>
-                        </m:sub>
-                      </m:sSub>
-                      <m:sSup>
-                        <m:sSupPr>
-                          <m:ctrlPr>
-                            <a:rPr lang="it-IT" sz="2800" b="0" i="1" smtClean="0">
-                              <a:latin typeface="Cambria Math" panose="02040503050406030204" pitchFamily="18" charset="0"/>
-                            </a:rPr>
-                          </m:ctrlPr>
-                        </m:sSupPr>
-                        <m:e>
-                          <m:r>
-                            <a:rPr lang="it-IT" sz="2800" b="0" i="1" smtClean="0">
-                              <a:latin typeface="Cambria Math" panose="02040503050406030204" pitchFamily="18" charset="0"/>
-                            </a:rPr>
-                            <m:t>𝑥</m:t>
-                          </m:r>
-                        </m:e>
-                        <m:sup>
-                          <m:r>
-                            <a:rPr lang="it-IT" sz="2800" b="0" i="1" smtClean="0">
-                              <a:latin typeface="Cambria Math" panose="02040503050406030204" pitchFamily="18" charset="0"/>
-                            </a:rPr>
-                            <m:t>2</m:t>
-                          </m:r>
-                        </m:sup>
-                      </m:sSup>
-                      <m:r>
-                        <a:rPr lang="it-IT" sz="2800" b="0" i="1" smtClean="0">
-                          <a:latin typeface="Cambria Math" panose="02040503050406030204" pitchFamily="18" charset="0"/>
-                        </a:rPr>
-                        <m:t>+</m:t>
-                      </m:r>
-                      <m:sSub>
-                        <m:sSubPr>
-                          <m:ctrlPr>
-                            <a:rPr lang="it-IT" sz="2800" b="0" i="1" smtClean="0">
-                              <a:latin typeface="Cambria Math" panose="02040503050406030204" pitchFamily="18" charset="0"/>
-                            </a:rPr>
-                          </m:ctrlPr>
-                        </m:sSubPr>
-                        <m:e>
-                          <m:r>
-                            <a:rPr lang="it-IT" sz="2800" b="0" i="1" smtClean="0">
-                              <a:latin typeface="Cambria Math" panose="02040503050406030204" pitchFamily="18" charset="0"/>
-                            </a:rPr>
-                            <m:t>𝑝</m:t>
-                          </m:r>
-                        </m:e>
-                        <m:sub>
-                          <m:r>
-                            <a:rPr lang="it-IT" sz="2800" b="0" i="1" smtClean="0">
-                              <a:latin typeface="Cambria Math" panose="02040503050406030204" pitchFamily="18" charset="0"/>
-                            </a:rPr>
-                            <m:t>4</m:t>
-                          </m:r>
-                        </m:sub>
-                      </m:sSub>
-                      <m:sSup>
-                        <m:sSupPr>
-                          <m:ctrlPr>
-                            <a:rPr lang="it-IT" sz="2800" b="0" i="1" smtClean="0">
-                              <a:latin typeface="Cambria Math" panose="02040503050406030204" pitchFamily="18" charset="0"/>
-                            </a:rPr>
-                          </m:ctrlPr>
-                        </m:sSupPr>
-                        <m:e>
-                          <m:r>
-                            <a:rPr lang="it-IT" sz="2800" b="0" i="1" smtClean="0">
-                              <a:latin typeface="Cambria Math" panose="02040503050406030204" pitchFamily="18" charset="0"/>
-                            </a:rPr>
-                            <m:t>𝑦</m:t>
-                          </m:r>
-                        </m:e>
-                        <m:sup>
-                          <m:r>
-                            <a:rPr lang="it-IT" sz="2800" b="0" i="1" smtClean="0">
-                              <a:latin typeface="Cambria Math" panose="02040503050406030204" pitchFamily="18" charset="0"/>
-                            </a:rPr>
-                            <m:t>2</m:t>
-                          </m:r>
-                        </m:sup>
-                      </m:sSup>
-                      <m:r>
-                        <a:rPr lang="it-IT" sz="2800" b="0" i="1" smtClean="0">
-                          <a:latin typeface="Cambria Math" panose="02040503050406030204" pitchFamily="18" charset="0"/>
-                        </a:rPr>
-                        <m:t>+</m:t>
-                      </m:r>
-                      <m:sSub>
-                        <m:sSubPr>
-                          <m:ctrlPr>
-                            <a:rPr lang="it-IT" sz="2800" b="0" i="1" smtClean="0">
-                              <a:latin typeface="Cambria Math" panose="02040503050406030204" pitchFamily="18" charset="0"/>
-                            </a:rPr>
-                          </m:ctrlPr>
-                        </m:sSubPr>
-                        <m:e>
-                          <m:r>
-                            <a:rPr lang="it-IT" sz="2800" b="0" i="1" smtClean="0">
-                              <a:latin typeface="Cambria Math" panose="02040503050406030204" pitchFamily="18" charset="0"/>
-                            </a:rPr>
-                            <m:t>𝑝</m:t>
-                          </m:r>
-                        </m:e>
-                        <m:sub>
-                          <m:r>
-                            <a:rPr lang="it-IT" sz="2800" b="0" i="1" smtClean="0">
-                              <a:latin typeface="Cambria Math" panose="02040503050406030204" pitchFamily="18" charset="0"/>
-                            </a:rPr>
-                            <m:t>5</m:t>
-                          </m:r>
-                        </m:sub>
-                      </m:sSub>
-                      <m:r>
-                        <a:rPr lang="it-IT" sz="2800" b="0" i="1" smtClean="0">
-                          <a:latin typeface="Cambria Math" panose="02040503050406030204" pitchFamily="18" charset="0"/>
-                        </a:rPr>
-                        <m:t>𝑥𝑦</m:t>
-                      </m:r>
-                    </m:oMath>
-                  </m:oMathPara>
+                  <m:oMath xmlns:m="http://schemas.openxmlformats.org/officeDocument/2006/math">
+                    <m:sSub>
+                      <m:sSubPr>
+                        <m:ctrlPr>
+                          <a:rPr lang="it-IT" sz="2800" b="0" i="1" smtClean="0">
+                            <a:latin typeface="Cambria Math" panose="02040503050406030204" pitchFamily="18" charset="0"/>
+                          </a:rPr>
+                        </m:ctrlPr>
+                      </m:sSubPr>
+                      <m:e>
+                        <m:r>
+                          <a:rPr lang="it-IT" sz="2800" b="0" i="1" smtClean="0">
+                            <a:latin typeface="Cambria Math" panose="02040503050406030204" pitchFamily="18" charset="0"/>
+                          </a:rPr>
+                          <m:t>𝜃</m:t>
+                        </m:r>
+                      </m:e>
+                      <m:sub>
+                        <m:r>
+                          <a:rPr lang="it-IT" sz="2800" b="0" i="1" smtClean="0">
+                            <a:latin typeface="Cambria Math" panose="02040503050406030204" pitchFamily="18" charset="0"/>
+                          </a:rPr>
+                          <m:t>𝑐𝑜𝑟𝑟</m:t>
+                        </m:r>
+                      </m:sub>
+                    </m:sSub>
+                    <m:d>
+                      <m:dPr>
+                        <m:ctrlPr>
+                          <a:rPr lang="it-IT" sz="2800" b="0" i="1" smtClean="0">
+                            <a:latin typeface="Cambria Math" panose="02040503050406030204" pitchFamily="18" charset="0"/>
+                          </a:rPr>
+                        </m:ctrlPr>
+                      </m:dPr>
+                      <m:e>
+                        <m:r>
+                          <a:rPr lang="it-IT" sz="2800" b="0" i="1" smtClean="0">
+                            <a:latin typeface="Cambria Math" panose="02040503050406030204" pitchFamily="18" charset="0"/>
+                          </a:rPr>
+                          <m:t>𝑥</m:t>
+                        </m:r>
+                        <m:r>
+                          <a:rPr lang="it-IT" sz="2800" b="0" i="1" smtClean="0">
+                            <a:latin typeface="Cambria Math" panose="02040503050406030204" pitchFamily="18" charset="0"/>
+                          </a:rPr>
+                          <m:t>,</m:t>
+                        </m:r>
+                        <m:r>
+                          <a:rPr lang="it-IT" sz="2800" b="0" i="1" smtClean="0">
+                            <a:latin typeface="Cambria Math" panose="02040503050406030204" pitchFamily="18" charset="0"/>
+                          </a:rPr>
+                          <m:t>𝑦</m:t>
+                        </m:r>
+                      </m:e>
+                    </m:d>
+                    <m:r>
+                      <a:rPr lang="it-IT" sz="2800" b="0" i="1" smtClean="0">
+                        <a:latin typeface="Cambria Math" panose="02040503050406030204" pitchFamily="18" charset="0"/>
+                      </a:rPr>
+                      <m:t>=</m:t>
+                    </m:r>
+                    <m:sSub>
+                      <m:sSubPr>
+                        <m:ctrlPr>
+                          <a:rPr lang="it-IT" sz="2800" b="0" i="1" smtClean="0">
+                            <a:latin typeface="Cambria Math" panose="02040503050406030204" pitchFamily="18" charset="0"/>
+                          </a:rPr>
+                        </m:ctrlPr>
+                      </m:sSubPr>
+                      <m:e>
+                        <m:r>
+                          <a:rPr lang="it-IT" sz="2800" b="0" i="1" smtClean="0">
+                            <a:latin typeface="Cambria Math" panose="02040503050406030204" pitchFamily="18" charset="0"/>
+                          </a:rPr>
+                          <m:t>𝜃</m:t>
+                        </m:r>
+                      </m:e>
+                      <m:sub>
+                        <m:r>
+                          <a:rPr lang="it-IT" sz="2800" b="0" i="1" smtClean="0">
+                            <a:latin typeface="Cambria Math" panose="02040503050406030204" pitchFamily="18" charset="0"/>
+                          </a:rPr>
+                          <m:t>0</m:t>
+                        </m:r>
+                      </m:sub>
+                    </m:sSub>
+                    <m:r>
+                      <a:rPr lang="it-IT" sz="2800" b="0" i="1" smtClean="0">
+                        <a:latin typeface="Cambria Math" panose="02040503050406030204" pitchFamily="18" charset="0"/>
+                      </a:rPr>
+                      <m:t>+</m:t>
+                    </m:r>
+                    <m:sSub>
+                      <m:sSubPr>
+                        <m:ctrlPr>
+                          <a:rPr lang="it-IT" sz="2800" b="0" i="1" smtClean="0">
+                            <a:latin typeface="Cambria Math" panose="02040503050406030204" pitchFamily="18" charset="0"/>
+                          </a:rPr>
+                        </m:ctrlPr>
+                      </m:sSubPr>
+                      <m:e>
+                        <m:r>
+                          <a:rPr lang="it-IT" sz="2800" b="0" i="1" smtClean="0">
+                            <a:latin typeface="Cambria Math" panose="02040503050406030204" pitchFamily="18" charset="0"/>
+                          </a:rPr>
+                          <m:t>𝜏</m:t>
+                        </m:r>
+                      </m:e>
+                      <m:sub>
+                        <m:r>
+                          <a:rPr lang="it-IT" sz="2800" b="0" i="1" smtClean="0">
+                            <a:latin typeface="Cambria Math" panose="02040503050406030204" pitchFamily="18" charset="0"/>
+                          </a:rPr>
+                          <m:t>𝑥</m:t>
+                        </m:r>
+                      </m:sub>
+                    </m:sSub>
+                    <m:r>
+                      <a:rPr lang="it-IT" sz="2800" b="0" i="1" smtClean="0">
+                        <a:latin typeface="Cambria Math" panose="02040503050406030204" pitchFamily="18" charset="0"/>
+                      </a:rPr>
+                      <m:t>⋅</m:t>
+                    </m:r>
+                    <m:r>
+                      <a:rPr lang="it-IT" sz="2800" b="0" i="1" smtClean="0">
+                        <a:latin typeface="Cambria Math" panose="02040503050406030204" pitchFamily="18" charset="0"/>
+                      </a:rPr>
+                      <m:t>𝑥</m:t>
+                    </m:r>
+                    <m:r>
+                      <a:rPr lang="it-IT" sz="2800" b="0" i="1" smtClean="0">
+                        <a:latin typeface="Cambria Math" panose="02040503050406030204" pitchFamily="18" charset="0"/>
+                      </a:rPr>
+                      <m:t>+</m:t>
+                    </m:r>
+                    <m:sSub>
+                      <m:sSubPr>
+                        <m:ctrlPr>
+                          <a:rPr lang="it-IT" sz="2800" b="0" i="1" smtClean="0">
+                            <a:latin typeface="Cambria Math" panose="02040503050406030204" pitchFamily="18" charset="0"/>
+                          </a:rPr>
+                        </m:ctrlPr>
+                      </m:sSubPr>
+                      <m:e>
+                        <m:r>
+                          <a:rPr lang="it-IT" sz="2800" b="0" i="1" smtClean="0">
+                            <a:latin typeface="Cambria Math" panose="02040503050406030204" pitchFamily="18" charset="0"/>
+                          </a:rPr>
+                          <m:t>𝜏</m:t>
+                        </m:r>
+                      </m:e>
+                      <m:sub>
+                        <m:r>
+                          <a:rPr lang="it-IT" sz="2800" b="0" i="1" smtClean="0">
+                            <a:latin typeface="Cambria Math" panose="02040503050406030204" pitchFamily="18" charset="0"/>
+                          </a:rPr>
+                          <m:t>𝑦</m:t>
+                        </m:r>
+                      </m:sub>
+                    </m:sSub>
+                    <m:r>
+                      <a:rPr lang="it-IT" sz="2800" b="0" i="1" smtClean="0">
+                        <a:latin typeface="Cambria Math" panose="02040503050406030204" pitchFamily="18" charset="0"/>
+                      </a:rPr>
+                      <m:t>⋅</m:t>
+                    </m:r>
+                    <m:r>
+                      <a:rPr lang="it-IT" sz="2800" b="0" i="1" smtClean="0">
+                        <a:latin typeface="Cambria Math" panose="02040503050406030204" pitchFamily="18" charset="0"/>
+                      </a:rPr>
+                      <m:t>𝑦</m:t>
+                    </m:r>
+                    <m:r>
+                      <a:rPr lang="it-IT" sz="2800" b="0" i="1" smtClean="0">
+                        <a:latin typeface="Cambria Math" panose="02040503050406030204" pitchFamily="18" charset="0"/>
+                      </a:rPr>
+                      <m:t>+</m:t>
+                    </m:r>
+                    <m:sSub>
+                      <m:sSubPr>
+                        <m:ctrlPr>
+                          <a:rPr lang="it-IT" sz="2800" b="0" i="1" smtClean="0">
+                            <a:latin typeface="Cambria Math" panose="02040503050406030204" pitchFamily="18" charset="0"/>
+                          </a:rPr>
+                        </m:ctrlPr>
+                      </m:sSubPr>
+                      <m:e>
+                        <m:r>
+                          <a:rPr lang="it-IT" sz="2800" b="0" i="1" smtClean="0">
+                            <a:latin typeface="Cambria Math" panose="02040503050406030204" pitchFamily="18" charset="0"/>
+                          </a:rPr>
+                          <m:t>𝑝</m:t>
+                        </m:r>
+                      </m:e>
+                      <m:sub>
+                        <m:r>
+                          <a:rPr lang="it-IT" sz="2800" b="0" i="1" smtClean="0">
+                            <a:latin typeface="Cambria Math" panose="02040503050406030204" pitchFamily="18" charset="0"/>
+                          </a:rPr>
+                          <m:t>3</m:t>
+                        </m:r>
+                      </m:sub>
+                    </m:sSub>
+                    <m:sSup>
+                      <m:sSupPr>
+                        <m:ctrlPr>
+                          <a:rPr lang="it-IT" sz="2800" b="0" i="1" smtClean="0">
+                            <a:latin typeface="Cambria Math" panose="02040503050406030204" pitchFamily="18" charset="0"/>
+                          </a:rPr>
+                        </m:ctrlPr>
+                      </m:sSupPr>
+                      <m:e>
+                        <m:r>
+                          <a:rPr lang="it-IT" sz="2800" b="0" i="1" smtClean="0">
+                            <a:latin typeface="Cambria Math" panose="02040503050406030204" pitchFamily="18" charset="0"/>
+                          </a:rPr>
+                          <m:t>𝑥</m:t>
+                        </m:r>
+                      </m:e>
+                      <m:sup>
+                        <m:r>
+                          <a:rPr lang="it-IT" sz="2800" b="0" i="1" smtClean="0">
+                            <a:latin typeface="Cambria Math" panose="02040503050406030204" pitchFamily="18" charset="0"/>
+                          </a:rPr>
+                          <m:t>2</m:t>
+                        </m:r>
+                      </m:sup>
+                    </m:sSup>
+                    <m:r>
+                      <a:rPr lang="it-IT" sz="2800" b="0" i="1" smtClean="0">
+                        <a:latin typeface="Cambria Math" panose="02040503050406030204" pitchFamily="18" charset="0"/>
+                      </a:rPr>
+                      <m:t>+</m:t>
+                    </m:r>
+                    <m:sSub>
+                      <m:sSubPr>
+                        <m:ctrlPr>
+                          <a:rPr lang="it-IT" sz="2800" b="0" i="1" smtClean="0">
+                            <a:latin typeface="Cambria Math" panose="02040503050406030204" pitchFamily="18" charset="0"/>
+                          </a:rPr>
+                        </m:ctrlPr>
+                      </m:sSubPr>
+                      <m:e>
+                        <m:r>
+                          <a:rPr lang="it-IT" sz="2800" b="0" i="1" smtClean="0">
+                            <a:latin typeface="Cambria Math" panose="02040503050406030204" pitchFamily="18" charset="0"/>
+                          </a:rPr>
+                          <m:t>𝑝</m:t>
+                        </m:r>
+                      </m:e>
+                      <m:sub>
+                        <m:r>
+                          <a:rPr lang="it-IT" sz="2800" b="0" i="1" smtClean="0">
+                            <a:latin typeface="Cambria Math" panose="02040503050406030204" pitchFamily="18" charset="0"/>
+                          </a:rPr>
+                          <m:t>4</m:t>
+                        </m:r>
+                      </m:sub>
+                    </m:sSub>
+                    <m:sSup>
+                      <m:sSupPr>
+                        <m:ctrlPr>
+                          <a:rPr lang="it-IT" sz="2800" b="0" i="1" smtClean="0">
+                            <a:latin typeface="Cambria Math" panose="02040503050406030204" pitchFamily="18" charset="0"/>
+                          </a:rPr>
+                        </m:ctrlPr>
+                      </m:sSupPr>
+                      <m:e>
+                        <m:r>
+                          <a:rPr lang="it-IT" sz="2800" b="0" i="1" smtClean="0">
+                            <a:latin typeface="Cambria Math" panose="02040503050406030204" pitchFamily="18" charset="0"/>
+                          </a:rPr>
+                          <m:t>𝑦</m:t>
+                        </m:r>
+                      </m:e>
+                      <m:sup>
+                        <m:r>
+                          <a:rPr lang="it-IT" sz="2800" b="0" i="1" smtClean="0">
+                            <a:latin typeface="Cambria Math" panose="02040503050406030204" pitchFamily="18" charset="0"/>
+                          </a:rPr>
+                          <m:t>2</m:t>
+                        </m:r>
+                      </m:sup>
+                    </m:sSup>
+                    <m:r>
+                      <a:rPr lang="it-IT" sz="2800" b="0" i="1" smtClean="0">
+                        <a:latin typeface="Cambria Math" panose="02040503050406030204" pitchFamily="18" charset="0"/>
+                      </a:rPr>
+                      <m:t>+</m:t>
+                    </m:r>
+                    <m:sSub>
+                      <m:sSubPr>
+                        <m:ctrlPr>
+                          <a:rPr lang="it-IT" sz="2800" b="0" i="1" smtClean="0">
+                            <a:latin typeface="Cambria Math" panose="02040503050406030204" pitchFamily="18" charset="0"/>
+                          </a:rPr>
+                        </m:ctrlPr>
+                      </m:sSubPr>
+                      <m:e>
+                        <m:r>
+                          <a:rPr lang="it-IT" sz="2800" b="0" i="1" smtClean="0">
+                            <a:latin typeface="Cambria Math" panose="02040503050406030204" pitchFamily="18" charset="0"/>
+                          </a:rPr>
+                          <m:t>𝑝</m:t>
+                        </m:r>
+                      </m:e>
+                      <m:sub>
+                        <m:r>
+                          <a:rPr lang="it-IT" sz="2800" b="0" i="1" smtClean="0">
+                            <a:latin typeface="Cambria Math" panose="02040503050406030204" pitchFamily="18" charset="0"/>
+                          </a:rPr>
+                          <m:t>5</m:t>
+                        </m:r>
+                      </m:sub>
+                    </m:sSub>
+                    <m:r>
+                      <a:rPr lang="it-IT" sz="2800" b="0" i="1" smtClean="0">
+                        <a:latin typeface="Cambria Math" panose="02040503050406030204" pitchFamily="18" charset="0"/>
+                      </a:rPr>
+                      <m:t>𝑥𝑦</m:t>
+                    </m:r>
+                  </m:oMath>
                 </a14:m>
                 <a:endParaRPr lang="en-US" sz="2800" dirty="0"/>
               </a:p>
               <a:p>
+                <a:pPr marL="514350" indent="-514350">
+                  <a:buFont typeface="+mj-lt"/>
+                  <a:buAutoNum type="arabicPeriod"/>
+                </a:pPr>
+                <a14:m>
+                  <m:oMath xmlns:m="http://schemas.openxmlformats.org/officeDocument/2006/math">
+                    <m:sSub>
+                      <m:sSubPr>
+                        <m:ctrlPr>
+                          <a:rPr lang="it-IT" i="1">
+                            <a:latin typeface="Cambria Math" panose="02040503050406030204" pitchFamily="18" charset="0"/>
+                          </a:rPr>
+                        </m:ctrlPr>
+                      </m:sSubPr>
+                      <m:e>
+                        <m:r>
+                          <a:rPr lang="it-IT" i="1">
+                            <a:latin typeface="Cambria Math" panose="02040503050406030204" pitchFamily="18" charset="0"/>
+                          </a:rPr>
+                          <m:t>𝜃</m:t>
+                        </m:r>
+                      </m:e>
+                      <m:sub>
+                        <m:r>
+                          <a:rPr lang="it-IT" i="1">
+                            <a:latin typeface="Cambria Math" panose="02040503050406030204" pitchFamily="18" charset="0"/>
+                          </a:rPr>
+                          <m:t>𝑐𝑜𝑟𝑟</m:t>
+                        </m:r>
+                      </m:sub>
+                    </m:sSub>
+                    <m:d>
+                      <m:dPr>
+                        <m:ctrlPr>
+                          <a:rPr lang="it-IT" i="1">
+                            <a:latin typeface="Cambria Math" panose="02040503050406030204" pitchFamily="18" charset="0"/>
+                          </a:rPr>
+                        </m:ctrlPr>
+                      </m:dPr>
+                      <m:e>
+                        <m:r>
+                          <a:rPr lang="it-IT" i="1">
+                            <a:latin typeface="Cambria Math" panose="02040503050406030204" pitchFamily="18" charset="0"/>
+                          </a:rPr>
+                          <m:t>𝑥</m:t>
+                        </m:r>
+                        <m:r>
+                          <a:rPr lang="it-IT" i="1">
+                            <a:latin typeface="Cambria Math" panose="02040503050406030204" pitchFamily="18" charset="0"/>
+                          </a:rPr>
+                          <m:t>,</m:t>
+                        </m:r>
+                        <m:r>
+                          <a:rPr lang="it-IT" i="1">
+                            <a:latin typeface="Cambria Math" panose="02040503050406030204" pitchFamily="18" charset="0"/>
+                          </a:rPr>
+                          <m:t>𝑦</m:t>
+                        </m:r>
+                      </m:e>
+                    </m:d>
+                    <m:r>
+                      <a:rPr lang="it-IT" i="1">
+                        <a:latin typeface="Cambria Math" panose="02040503050406030204" pitchFamily="18" charset="0"/>
+                      </a:rPr>
+                      <m:t>=</m:t>
+                    </m:r>
+                    <m:sSub>
+                      <m:sSubPr>
+                        <m:ctrlPr>
+                          <a:rPr lang="it-IT" i="1">
+                            <a:latin typeface="Cambria Math" panose="02040503050406030204" pitchFamily="18" charset="0"/>
+                          </a:rPr>
+                        </m:ctrlPr>
+                      </m:sSubPr>
+                      <m:e>
+                        <m:r>
+                          <a:rPr lang="it-IT" i="1">
+                            <a:latin typeface="Cambria Math" panose="02040503050406030204" pitchFamily="18" charset="0"/>
+                          </a:rPr>
+                          <m:t>𝜃</m:t>
+                        </m:r>
+                      </m:e>
+                      <m:sub>
+                        <m:r>
+                          <a:rPr lang="it-IT" i="1">
+                            <a:latin typeface="Cambria Math" panose="02040503050406030204" pitchFamily="18" charset="0"/>
+                          </a:rPr>
+                          <m:t>0</m:t>
+                        </m:r>
+                      </m:sub>
+                    </m:sSub>
+                    <m:r>
+                      <a:rPr lang="it-IT" i="1">
+                        <a:latin typeface="Cambria Math" panose="02040503050406030204" pitchFamily="18" charset="0"/>
+                      </a:rPr>
+                      <m:t>+</m:t>
+                    </m:r>
+                    <m:sSub>
+                      <m:sSubPr>
+                        <m:ctrlPr>
+                          <a:rPr lang="it-IT" i="1">
+                            <a:latin typeface="Cambria Math" panose="02040503050406030204" pitchFamily="18" charset="0"/>
+                          </a:rPr>
+                        </m:ctrlPr>
+                      </m:sSubPr>
+                      <m:e>
+                        <m:r>
+                          <a:rPr lang="it-IT" i="1">
+                            <a:latin typeface="Cambria Math" panose="02040503050406030204" pitchFamily="18" charset="0"/>
+                          </a:rPr>
+                          <m:t>𝜏</m:t>
+                        </m:r>
+                      </m:e>
+                      <m:sub>
+                        <m:r>
+                          <a:rPr lang="it-IT" i="1">
+                            <a:latin typeface="Cambria Math" panose="02040503050406030204" pitchFamily="18" charset="0"/>
+                          </a:rPr>
+                          <m:t>𝑥</m:t>
+                        </m:r>
+                      </m:sub>
+                    </m:sSub>
+                    <m:r>
+                      <a:rPr lang="it-IT" i="1">
+                        <a:latin typeface="Cambria Math" panose="02040503050406030204" pitchFamily="18" charset="0"/>
+                      </a:rPr>
+                      <m:t>⋅</m:t>
+                    </m:r>
+                    <m:r>
+                      <a:rPr lang="it-IT" i="1">
+                        <a:latin typeface="Cambria Math" panose="02040503050406030204" pitchFamily="18" charset="0"/>
+                      </a:rPr>
+                      <m:t>𝑥</m:t>
+                    </m:r>
+                    <m:r>
+                      <a:rPr lang="it-IT" i="1">
+                        <a:latin typeface="Cambria Math" panose="02040503050406030204" pitchFamily="18" charset="0"/>
+                      </a:rPr>
+                      <m:t>+</m:t>
+                    </m:r>
+                    <m:sSub>
+                      <m:sSubPr>
+                        <m:ctrlPr>
+                          <a:rPr lang="it-IT" i="1">
+                            <a:latin typeface="Cambria Math" panose="02040503050406030204" pitchFamily="18" charset="0"/>
+                          </a:rPr>
+                        </m:ctrlPr>
+                      </m:sSubPr>
+                      <m:e>
+                        <m:r>
+                          <a:rPr lang="it-IT" i="1">
+                            <a:latin typeface="Cambria Math" panose="02040503050406030204" pitchFamily="18" charset="0"/>
+                          </a:rPr>
+                          <m:t>𝜏</m:t>
+                        </m:r>
+                      </m:e>
+                      <m:sub>
+                        <m:r>
+                          <a:rPr lang="it-IT" i="1">
+                            <a:latin typeface="Cambria Math" panose="02040503050406030204" pitchFamily="18" charset="0"/>
+                          </a:rPr>
+                          <m:t>𝑦</m:t>
+                        </m:r>
+                      </m:sub>
+                    </m:sSub>
+                    <m:r>
+                      <a:rPr lang="it-IT" i="1">
+                        <a:latin typeface="Cambria Math" panose="02040503050406030204" pitchFamily="18" charset="0"/>
+                      </a:rPr>
+                      <m:t>⋅</m:t>
+                    </m:r>
+                    <m:r>
+                      <a:rPr lang="it-IT" i="1">
+                        <a:latin typeface="Cambria Math" panose="02040503050406030204" pitchFamily="18" charset="0"/>
+                      </a:rPr>
+                      <m:t>𝑦</m:t>
+                    </m:r>
+                    <m:r>
+                      <a:rPr lang="it-IT" i="1">
+                        <a:latin typeface="Cambria Math" panose="02040503050406030204" pitchFamily="18" charset="0"/>
+                      </a:rPr>
+                      <m:t>+</m:t>
+                    </m:r>
+                    <m:sSub>
+                      <m:sSubPr>
+                        <m:ctrlPr>
+                          <a:rPr lang="it-IT" i="1">
+                            <a:latin typeface="Cambria Math" panose="02040503050406030204" pitchFamily="18" charset="0"/>
+                          </a:rPr>
+                        </m:ctrlPr>
+                      </m:sSubPr>
+                      <m:e>
+                        <m:r>
+                          <a:rPr lang="it-IT" i="1">
+                            <a:latin typeface="Cambria Math" panose="02040503050406030204" pitchFamily="18" charset="0"/>
+                          </a:rPr>
+                          <m:t>𝑝</m:t>
+                        </m:r>
+                      </m:e>
+                      <m:sub>
+                        <m:r>
+                          <a:rPr lang="it-IT" b="0" i="1" smtClean="0">
+                            <a:latin typeface="Cambria Math" panose="02040503050406030204" pitchFamily="18" charset="0"/>
+                          </a:rPr>
+                          <m:t>3</m:t>
+                        </m:r>
+                      </m:sub>
+                    </m:sSub>
+                    <m:sSup>
+                      <m:sSupPr>
+                        <m:ctrlPr>
+                          <a:rPr lang="it-IT" i="1">
+                            <a:latin typeface="Cambria Math" panose="02040503050406030204" pitchFamily="18" charset="0"/>
+                          </a:rPr>
+                        </m:ctrlPr>
+                      </m:sSupPr>
+                      <m:e>
+                        <m:r>
+                          <a:rPr lang="it-IT" i="1">
+                            <a:latin typeface="Cambria Math" panose="02040503050406030204" pitchFamily="18" charset="0"/>
+                          </a:rPr>
+                          <m:t>𝑦</m:t>
+                        </m:r>
+                      </m:e>
+                      <m:sup>
+                        <m:r>
+                          <a:rPr lang="it-IT" i="1">
+                            <a:latin typeface="Cambria Math" panose="02040503050406030204" pitchFamily="18" charset="0"/>
+                          </a:rPr>
+                          <m:t>2</m:t>
+                        </m:r>
+                      </m:sup>
+                    </m:sSup>
+                  </m:oMath>
+                </a14:m>
+                <a:endParaRPr lang="it-IT" dirty="0"/>
+              </a:p>
+              <a:p>
+                <a:pPr marL="514350" indent="-514350">
+                  <a:buFont typeface="+mj-lt"/>
+                  <a:buAutoNum type="arabicPeriod"/>
+                </a:pPr>
+                <a14:m>
+                  <m:oMath xmlns:m="http://schemas.openxmlformats.org/officeDocument/2006/math">
+                    <m:sSub>
+                      <m:sSubPr>
+                        <m:ctrlPr>
+                          <a:rPr lang="it-IT" i="1">
+                            <a:latin typeface="Cambria Math" panose="02040503050406030204" pitchFamily="18" charset="0"/>
+                          </a:rPr>
+                        </m:ctrlPr>
+                      </m:sSubPr>
+                      <m:e>
+                        <m:r>
+                          <a:rPr lang="it-IT" i="1">
+                            <a:latin typeface="Cambria Math" panose="02040503050406030204" pitchFamily="18" charset="0"/>
+                          </a:rPr>
+                          <m:t>𝜃</m:t>
+                        </m:r>
+                      </m:e>
+                      <m:sub>
+                        <m:r>
+                          <a:rPr lang="it-IT" i="1">
+                            <a:latin typeface="Cambria Math" panose="02040503050406030204" pitchFamily="18" charset="0"/>
+                          </a:rPr>
+                          <m:t>𝑐𝑜𝑟𝑟</m:t>
+                        </m:r>
+                      </m:sub>
+                    </m:sSub>
+                    <m:d>
+                      <m:dPr>
+                        <m:ctrlPr>
+                          <a:rPr lang="it-IT" i="1">
+                            <a:latin typeface="Cambria Math" panose="02040503050406030204" pitchFamily="18" charset="0"/>
+                          </a:rPr>
+                        </m:ctrlPr>
+                      </m:dPr>
+                      <m:e>
+                        <m:r>
+                          <a:rPr lang="it-IT" i="1">
+                            <a:latin typeface="Cambria Math" panose="02040503050406030204" pitchFamily="18" charset="0"/>
+                          </a:rPr>
+                          <m:t>𝑥</m:t>
+                        </m:r>
+                        <m:r>
+                          <a:rPr lang="it-IT" i="1">
+                            <a:latin typeface="Cambria Math" panose="02040503050406030204" pitchFamily="18" charset="0"/>
+                          </a:rPr>
+                          <m:t>,</m:t>
+                        </m:r>
+                        <m:r>
+                          <a:rPr lang="it-IT" i="1">
+                            <a:latin typeface="Cambria Math" panose="02040503050406030204" pitchFamily="18" charset="0"/>
+                          </a:rPr>
+                          <m:t>𝑦</m:t>
+                        </m:r>
+                      </m:e>
+                    </m:d>
+                    <m:r>
+                      <a:rPr lang="it-IT" i="1">
+                        <a:latin typeface="Cambria Math" panose="02040503050406030204" pitchFamily="18" charset="0"/>
+                      </a:rPr>
+                      <m:t>=</m:t>
+                    </m:r>
+                    <m:sSub>
+                      <m:sSubPr>
+                        <m:ctrlPr>
+                          <a:rPr lang="it-IT" i="1">
+                            <a:latin typeface="Cambria Math" panose="02040503050406030204" pitchFamily="18" charset="0"/>
+                          </a:rPr>
+                        </m:ctrlPr>
+                      </m:sSubPr>
+                      <m:e>
+                        <m:r>
+                          <a:rPr lang="it-IT" i="1">
+                            <a:latin typeface="Cambria Math" panose="02040503050406030204" pitchFamily="18" charset="0"/>
+                          </a:rPr>
+                          <m:t>𝜃</m:t>
+                        </m:r>
+                      </m:e>
+                      <m:sub>
+                        <m:r>
+                          <a:rPr lang="it-IT" i="1">
+                            <a:latin typeface="Cambria Math" panose="02040503050406030204" pitchFamily="18" charset="0"/>
+                          </a:rPr>
+                          <m:t>0</m:t>
+                        </m:r>
+                      </m:sub>
+                    </m:sSub>
+                    <m:r>
+                      <a:rPr lang="it-IT" i="1">
+                        <a:latin typeface="Cambria Math" panose="02040503050406030204" pitchFamily="18" charset="0"/>
+                      </a:rPr>
+                      <m:t>+</m:t>
+                    </m:r>
+                    <m:sSub>
+                      <m:sSubPr>
+                        <m:ctrlPr>
+                          <a:rPr lang="it-IT" i="1">
+                            <a:latin typeface="Cambria Math" panose="02040503050406030204" pitchFamily="18" charset="0"/>
+                          </a:rPr>
+                        </m:ctrlPr>
+                      </m:sSubPr>
+                      <m:e>
+                        <m:r>
+                          <a:rPr lang="it-IT" i="1">
+                            <a:latin typeface="Cambria Math" panose="02040503050406030204" pitchFamily="18" charset="0"/>
+                          </a:rPr>
+                          <m:t>𝜏</m:t>
+                        </m:r>
+                      </m:e>
+                      <m:sub>
+                        <m:r>
+                          <a:rPr lang="it-IT" i="1">
+                            <a:latin typeface="Cambria Math" panose="02040503050406030204" pitchFamily="18" charset="0"/>
+                          </a:rPr>
+                          <m:t>𝑦</m:t>
+                        </m:r>
+                      </m:sub>
+                    </m:sSub>
+                    <m:r>
+                      <a:rPr lang="it-IT" i="1">
+                        <a:latin typeface="Cambria Math" panose="02040503050406030204" pitchFamily="18" charset="0"/>
+                      </a:rPr>
+                      <m:t>⋅</m:t>
+                    </m:r>
+                    <m:r>
+                      <a:rPr lang="it-IT" i="1">
+                        <a:latin typeface="Cambria Math" panose="02040503050406030204" pitchFamily="18" charset="0"/>
+                      </a:rPr>
+                      <m:t>𝑦</m:t>
+                    </m:r>
+                    <m:r>
+                      <a:rPr lang="it-IT" i="1">
+                        <a:latin typeface="Cambria Math" panose="02040503050406030204" pitchFamily="18" charset="0"/>
+                      </a:rPr>
+                      <m:t>+</m:t>
+                    </m:r>
+                    <m:sSub>
+                      <m:sSubPr>
+                        <m:ctrlPr>
+                          <a:rPr lang="it-IT" i="1">
+                            <a:latin typeface="Cambria Math" panose="02040503050406030204" pitchFamily="18" charset="0"/>
+                          </a:rPr>
+                        </m:ctrlPr>
+                      </m:sSubPr>
+                      <m:e>
+                        <m:r>
+                          <a:rPr lang="it-IT" i="1">
+                            <a:latin typeface="Cambria Math" panose="02040503050406030204" pitchFamily="18" charset="0"/>
+                          </a:rPr>
+                          <m:t>𝑝</m:t>
+                        </m:r>
+                      </m:e>
+                      <m:sub>
+                        <m:r>
+                          <a:rPr lang="it-IT" b="0" i="1" smtClean="0">
+                            <a:latin typeface="Cambria Math" panose="02040503050406030204" pitchFamily="18" charset="0"/>
+                          </a:rPr>
+                          <m:t>2</m:t>
+                        </m:r>
+                      </m:sub>
+                    </m:sSub>
+                    <m:sSup>
+                      <m:sSupPr>
+                        <m:ctrlPr>
+                          <a:rPr lang="it-IT" i="1">
+                            <a:latin typeface="Cambria Math" panose="02040503050406030204" pitchFamily="18" charset="0"/>
+                          </a:rPr>
+                        </m:ctrlPr>
+                      </m:sSupPr>
+                      <m:e>
+                        <m:r>
+                          <a:rPr lang="it-IT" i="1">
+                            <a:latin typeface="Cambria Math" panose="02040503050406030204" pitchFamily="18" charset="0"/>
+                          </a:rPr>
+                          <m:t>𝑦</m:t>
+                        </m:r>
+                      </m:e>
+                      <m:sup>
+                        <m:r>
+                          <a:rPr lang="it-IT" i="1">
+                            <a:latin typeface="Cambria Math" panose="02040503050406030204" pitchFamily="18" charset="0"/>
+                          </a:rPr>
+                          <m:t>2</m:t>
+                        </m:r>
+                      </m:sup>
+                    </m:sSup>
+                  </m:oMath>
+                </a14:m>
+                <a:endParaRPr lang="en-US" dirty="0"/>
+              </a:p>
+              <a:p>
+                <a:pPr marL="0" indent="0">
+                  <a:buNone/>
+                </a:pPr>
+                <a:endParaRPr lang="en-US" dirty="0"/>
+              </a:p>
+              <a:p>
+                <a:pPr marL="514350" indent="-514350">
+                  <a:buFont typeface="+mj-lt"/>
+                  <a:buAutoNum type="arabicPeriod"/>
+                </a:pPr>
+                <a:endParaRPr lang="en-US" sz="2800" dirty="0"/>
+              </a:p>
+            </p:txBody>
+          </p:sp>
+        </mc:Choice>
+        <mc:Fallback>
+          <p:sp>
+            <p:nvSpPr>
+              <p:cNvPr id="3" name="Segnaposto contenuto 2">
+                <a:extLst>
+                  <a:ext uri="{FF2B5EF4-FFF2-40B4-BE49-F238E27FC236}">
+                    <a16:creationId xmlns:a16="http://schemas.microsoft.com/office/drawing/2014/main" id="{7B5C2D23-C0AC-680A-9985-7B673F13F032}"/>
+                  </a:ext>
+                </a:extLst>
+              </p:cNvPr>
+              <p:cNvSpPr>
+                <a:spLocks noGrp="1" noRot="1" noChangeAspect="1" noMove="1" noResize="1" noEditPoints="1" noAdjustHandles="1" noChangeArrowheads="1" noChangeShapeType="1" noTextEdit="1"/>
+              </p:cNvSpPr>
+              <p:nvPr>
+                <p:ph idx="1"/>
+              </p:nvPr>
+            </p:nvSpPr>
+            <p:spPr>
+              <a:xfrm>
+                <a:off x="838200" y="1401288"/>
+                <a:ext cx="10515600" cy="4776227"/>
+              </a:xfrm>
+              <a:blipFill>
+                <a:blip r:embed="rId2"/>
+                <a:stretch>
+                  <a:fillRect l="-1217" t="-2299"/>
+                </a:stretch>
+              </a:blipFill>
+            </p:spPr>
+            <p:txBody>
+              <a:bodyPr/>
+              <a:lstStyle/>
+              <a:p>
+                <a:r>
+                  <a:rPr lang="it-IT">
+                    <a:noFill/>
+                  </a:rPr>
+                  <a:t> </a:t>
+                </a:r>
+              </a:p>
+            </p:txBody>
+          </p:sp>
+        </mc:Fallback>
+      </mc:AlternateContent>
+      <p:sp>
+        <p:nvSpPr>
+          <p:cNvPr id="4" name="Segnaposto data 3">
+            <a:extLst>
+              <a:ext uri="{FF2B5EF4-FFF2-40B4-BE49-F238E27FC236}">
+                <a16:creationId xmlns:a16="http://schemas.microsoft.com/office/drawing/2014/main" id="{AC31EE0F-E66C-8187-4B47-29A6C15CF811}"/>
+              </a:ext>
+            </a:extLst>
+          </p:cNvPr>
+          <p:cNvSpPr>
+            <a:spLocks noGrp="1"/>
+          </p:cNvSpPr>
+          <p:nvPr>
+            <p:ph type="dt" sz="half" idx="10"/>
+          </p:nvPr>
+        </p:nvSpPr>
+        <p:spPr>
+          <a:xfrm>
+            <a:off x="838200" y="6356349"/>
+            <a:ext cx="2743200" cy="432000"/>
+          </a:xfrm>
+        </p:spPr>
+        <p:txBody>
+          <a:bodyPr/>
+          <a:lstStyle/>
+          <a:p>
+            <a:r>
+              <a:rPr lang="it-IT" sz="1500" b="1" dirty="0">
+                <a:solidFill>
+                  <a:srgbClr val="002060"/>
+                </a:solidFill>
+              </a:rPr>
+              <a:t>July 2026</a:t>
+            </a:r>
+          </a:p>
+        </p:txBody>
+      </p:sp>
+      <p:sp>
+        <p:nvSpPr>
+          <p:cNvPr id="5" name="Segnaposto piè di pagina 4">
+            <a:extLst>
+              <a:ext uri="{FF2B5EF4-FFF2-40B4-BE49-F238E27FC236}">
+                <a16:creationId xmlns:a16="http://schemas.microsoft.com/office/drawing/2014/main" id="{712E6716-1637-677C-6156-4F7A04ED0724}"/>
+              </a:ext>
+            </a:extLst>
+          </p:cNvPr>
+          <p:cNvSpPr>
+            <a:spLocks noGrp="1"/>
+          </p:cNvSpPr>
+          <p:nvPr>
+            <p:ph type="ftr" sz="quarter" idx="11"/>
+          </p:nvPr>
+        </p:nvSpPr>
+        <p:spPr>
+          <a:xfrm>
+            <a:off x="0" y="6356349"/>
+            <a:ext cx="12192000" cy="432000"/>
+          </a:xfrm>
+        </p:spPr>
+        <p:txBody>
+          <a:bodyPr/>
+          <a:lstStyle/>
+          <a:p>
+            <a:r>
+              <a:rPr lang="it-IT" sz="1500" b="1" dirty="0">
+                <a:solidFill>
+                  <a:srgbClr val="002060"/>
+                </a:solidFill>
+              </a:rPr>
+              <a:t>Anna Sofia Moro</a:t>
+            </a:r>
+          </a:p>
+        </p:txBody>
+      </p:sp>
+      <p:sp>
+        <p:nvSpPr>
+          <p:cNvPr id="6" name="Segnaposto numero diapositiva 5">
+            <a:extLst>
+              <a:ext uri="{FF2B5EF4-FFF2-40B4-BE49-F238E27FC236}">
+                <a16:creationId xmlns:a16="http://schemas.microsoft.com/office/drawing/2014/main" id="{2B63049B-43B9-E82A-F634-D683E5DB4AB9}"/>
+              </a:ext>
+            </a:extLst>
+          </p:cNvPr>
+          <p:cNvSpPr>
+            <a:spLocks noGrp="1"/>
+          </p:cNvSpPr>
+          <p:nvPr>
+            <p:ph type="sldNum" sz="quarter" idx="12"/>
+          </p:nvPr>
+        </p:nvSpPr>
+        <p:spPr>
+          <a:xfrm>
+            <a:off x="8610600" y="6356349"/>
+            <a:ext cx="2743200" cy="432000"/>
+          </a:xfrm>
+        </p:spPr>
+        <p:txBody>
+          <a:bodyPr/>
+          <a:lstStyle/>
+          <a:p>
+            <a:fld id="{0A318BD9-CA14-4A83-ACF0-03D5918EB402}" type="slidenum">
+              <a:rPr lang="it-IT" sz="1500" b="1" smtClean="0">
+                <a:solidFill>
+                  <a:srgbClr val="002060"/>
+                </a:solidFill>
+              </a:rPr>
+              <a:t>4</a:t>
+            </a:fld>
+            <a:endParaRPr lang="it-IT" sz="1500" b="1" dirty="0">
+              <a:solidFill>
+                <a:srgbClr val="002060"/>
+              </a:solidFill>
+            </a:endParaRPr>
+          </a:p>
+        </p:txBody>
+      </p:sp>
+      <p:pic>
+        <p:nvPicPr>
+          <p:cNvPr id="10" name="Immagine 9">
+            <a:extLst>
+              <a:ext uri="{FF2B5EF4-FFF2-40B4-BE49-F238E27FC236}">
+                <a16:creationId xmlns:a16="http://schemas.microsoft.com/office/drawing/2014/main" id="{017AB9AA-3F99-A362-9BD4-9C519CC04F35}"/>
+              </a:ext>
+            </a:extLst>
+          </p:cNvPr>
+          <p:cNvPicPr>
+            <a:picLocks noChangeAspect="1"/>
+          </p:cNvPicPr>
+          <p:nvPr/>
+        </p:nvPicPr>
+        <p:blipFill>
+          <a:blip r:embed="rId3">
+            <a:extLst>
+              <a:ext uri="{28A0092B-C50C-407E-A947-70E740481C1C}">
+                <a14:useLocalDpi xmlns:a14="http://schemas.microsoft.com/office/drawing/2010/main" val="0"/>
+              </a:ext>
+            </a:extLst>
+          </a:blip>
+          <a:stretch>
+            <a:fillRect/>
+          </a:stretch>
+        </p:blipFill>
+        <p:spPr>
+          <a:xfrm>
+            <a:off x="503437" y="3538662"/>
+            <a:ext cx="3960000" cy="2958976"/>
+          </a:xfrm>
+          <a:prstGeom prst="rect">
+            <a:avLst/>
+          </a:prstGeom>
+        </p:spPr>
+      </p:pic>
+      <p:pic>
+        <p:nvPicPr>
+          <p:cNvPr id="12" name="Immagine 11">
+            <a:extLst>
+              <a:ext uri="{FF2B5EF4-FFF2-40B4-BE49-F238E27FC236}">
+                <a16:creationId xmlns:a16="http://schemas.microsoft.com/office/drawing/2014/main" id="{AEE7A0B8-744D-AD8E-ADDF-62186AE2AEC2}"/>
+              </a:ext>
+            </a:extLst>
+          </p:cNvPr>
+          <p:cNvPicPr>
+            <a:picLocks noChangeAspect="1"/>
+          </p:cNvPicPr>
+          <p:nvPr/>
+        </p:nvPicPr>
+        <p:blipFill>
+          <a:blip r:embed="rId4">
+            <a:extLst>
+              <a:ext uri="{28A0092B-C50C-407E-A947-70E740481C1C}">
+                <a14:useLocalDpi xmlns:a14="http://schemas.microsoft.com/office/drawing/2010/main" val="0"/>
+              </a:ext>
+            </a:extLst>
+          </a:blip>
+          <a:stretch>
+            <a:fillRect/>
+          </a:stretch>
+        </p:blipFill>
+        <p:spPr>
+          <a:xfrm>
+            <a:off x="4115100" y="3534220"/>
+            <a:ext cx="3960000" cy="2958976"/>
+          </a:xfrm>
+          <a:prstGeom prst="rect">
+            <a:avLst/>
+          </a:prstGeom>
+        </p:spPr>
+      </p:pic>
+      <p:pic>
+        <p:nvPicPr>
+          <p:cNvPr id="8" name="Immagine 7">
+            <a:extLst>
+              <a:ext uri="{FF2B5EF4-FFF2-40B4-BE49-F238E27FC236}">
+                <a16:creationId xmlns:a16="http://schemas.microsoft.com/office/drawing/2014/main" id="{E9A5E4D0-ADDD-A284-C2A4-1C3745AF173B}"/>
+              </a:ext>
+            </a:extLst>
+          </p:cNvPr>
+          <p:cNvPicPr>
+            <a:picLocks noChangeAspect="1"/>
+          </p:cNvPicPr>
+          <p:nvPr/>
+        </p:nvPicPr>
+        <p:blipFill>
+          <a:blip r:embed="rId5">
+            <a:extLst>
+              <a:ext uri="{28A0092B-C50C-407E-A947-70E740481C1C}">
+                <a14:useLocalDpi xmlns:a14="http://schemas.microsoft.com/office/drawing/2010/main" val="0"/>
+              </a:ext>
+            </a:extLst>
+          </a:blip>
+          <a:stretch>
+            <a:fillRect/>
+          </a:stretch>
+        </p:blipFill>
+        <p:spPr>
+          <a:xfrm>
+            <a:off x="7734450" y="3534220"/>
+            <a:ext cx="3960000" cy="2958976"/>
+          </a:xfrm>
+          <a:prstGeom prst="rect">
+            <a:avLst/>
+          </a:prstGeom>
+        </p:spPr>
+      </p:pic>
+      <p:sp>
+        <p:nvSpPr>
+          <p:cNvPr id="13" name="CasellaDiTesto 12">
+            <a:extLst>
+              <a:ext uri="{FF2B5EF4-FFF2-40B4-BE49-F238E27FC236}">
+                <a16:creationId xmlns:a16="http://schemas.microsoft.com/office/drawing/2014/main" id="{5C8455F5-2068-D03A-9DDA-7B2223D71704}"/>
+              </a:ext>
+            </a:extLst>
+          </p:cNvPr>
+          <p:cNvSpPr txBox="1">
+            <a:spLocks noChangeAspect="1"/>
+          </p:cNvSpPr>
+          <p:nvPr/>
+        </p:nvSpPr>
+        <p:spPr>
+          <a:xfrm>
+            <a:off x="3504450" y="3698786"/>
+            <a:ext cx="540000" cy="540000"/>
+          </a:xfrm>
+          <a:prstGeom prst="ellipse">
+            <a:avLst/>
+          </a:prstGeom>
+          <a:solidFill>
+            <a:srgbClr val="FFC000"/>
+          </a:solidFill>
+        </p:spPr>
+        <p:txBody>
+          <a:bodyPr wrap="square" rtlCol="0">
+            <a:spAutoFit/>
+          </a:bodyPr>
+          <a:lstStyle/>
+          <a:p>
+            <a:pPr algn="ctr"/>
+            <a:r>
+              <a:rPr lang="it-IT" b="1" dirty="0">
+                <a:solidFill>
+                  <a:schemeClr val="bg1"/>
+                </a:solidFill>
+              </a:rPr>
+              <a:t>1</a:t>
+            </a:r>
+          </a:p>
+        </p:txBody>
+      </p:sp>
+      <p:sp>
+        <p:nvSpPr>
+          <p:cNvPr id="15" name="CasellaDiTesto 14">
+            <a:extLst>
+              <a:ext uri="{FF2B5EF4-FFF2-40B4-BE49-F238E27FC236}">
+                <a16:creationId xmlns:a16="http://schemas.microsoft.com/office/drawing/2014/main" id="{4593FF22-014A-2E56-EDBA-8791C520CBC9}"/>
+              </a:ext>
+            </a:extLst>
+          </p:cNvPr>
+          <p:cNvSpPr txBox="1">
+            <a:spLocks noChangeAspect="1"/>
+          </p:cNvSpPr>
+          <p:nvPr/>
+        </p:nvSpPr>
+        <p:spPr>
+          <a:xfrm>
+            <a:off x="7236900" y="3698786"/>
+            <a:ext cx="540000" cy="540000"/>
+          </a:xfrm>
+          <a:prstGeom prst="ellipse">
+            <a:avLst/>
+          </a:prstGeom>
+          <a:solidFill>
+            <a:srgbClr val="FFC000"/>
+          </a:solidFill>
+        </p:spPr>
+        <p:txBody>
+          <a:bodyPr wrap="square" rtlCol="0">
+            <a:spAutoFit/>
+          </a:bodyPr>
+          <a:lstStyle/>
+          <a:p>
+            <a:pPr algn="ctr"/>
+            <a:r>
+              <a:rPr lang="it-IT" b="1" dirty="0">
+                <a:solidFill>
+                  <a:schemeClr val="bg1"/>
+                </a:solidFill>
+              </a:rPr>
+              <a:t>2</a:t>
+            </a:r>
+          </a:p>
+        </p:txBody>
+      </p:sp>
+      <p:sp>
+        <p:nvSpPr>
+          <p:cNvPr id="17" name="CasellaDiTesto 16">
+            <a:extLst>
+              <a:ext uri="{FF2B5EF4-FFF2-40B4-BE49-F238E27FC236}">
+                <a16:creationId xmlns:a16="http://schemas.microsoft.com/office/drawing/2014/main" id="{4B4DAFEE-C0D3-EDD8-7AED-A3AF8C739833}"/>
+              </a:ext>
+            </a:extLst>
+          </p:cNvPr>
+          <p:cNvSpPr txBox="1">
+            <a:spLocks noChangeAspect="1"/>
+          </p:cNvSpPr>
+          <p:nvPr/>
+        </p:nvSpPr>
+        <p:spPr>
+          <a:xfrm>
+            <a:off x="10962900" y="3698786"/>
+            <a:ext cx="540000" cy="540000"/>
+          </a:xfrm>
+          <a:prstGeom prst="ellipse">
+            <a:avLst/>
+          </a:prstGeom>
+          <a:solidFill>
+            <a:srgbClr val="FFC000"/>
+          </a:solidFill>
+        </p:spPr>
+        <p:txBody>
+          <a:bodyPr wrap="square" rtlCol="0">
+            <a:spAutoFit/>
+          </a:bodyPr>
+          <a:lstStyle/>
+          <a:p>
+            <a:pPr algn="ctr"/>
+            <a:r>
+              <a:rPr lang="it-IT" b="1" dirty="0">
+                <a:solidFill>
+                  <a:schemeClr val="bg1"/>
+                </a:solidFill>
+              </a:rPr>
+              <a:t>3</a:t>
+            </a:r>
+          </a:p>
+        </p:txBody>
+      </p:sp>
+    </p:spTree>
+    <p:extLst>
+      <p:ext uri="{BB962C8B-B14F-4D97-AF65-F5344CB8AC3E}">
+        <p14:creationId xmlns:p14="http://schemas.microsoft.com/office/powerpoint/2010/main" val="1433736234"/>
+      </p:ext>
+    </p:extLst>
+  </p:cSld>
+  <p:clrMapOvr>
+    <a:masterClrMapping/>
+  </p:clrMapOvr>
+</p:sld>
+</file>
+
+<file path=ppt/slides/slide5.xml><?xml version="1.0" encoding="utf-8"?>
+<p:sld xmlns:a="http://schemas.openxmlformats.org/drawingml/2006/main" xmlns:r="http://schemas.openxmlformats.org/officeDocument/2006/relationships" xmlns:p="http://schemas.openxmlformats.org/presentationml/2006/main">
+  <p:cSld>
+    <p:spTree>
+      <p:nvGrpSpPr>
+        <p:cNvPr id="1" name="">
+          <a:extLst>
+            <a:ext uri="{FF2B5EF4-FFF2-40B4-BE49-F238E27FC236}">
+              <a16:creationId xmlns:a16="http://schemas.microsoft.com/office/drawing/2014/main" id="{BD684BC6-F619-3D20-E561-CBF538445FB1}"/>
+            </a:ext>
+          </a:extLst>
+        </p:cNvPr>
+        <p:cNvGrpSpPr/>
+        <p:nvPr/>
+      </p:nvGrpSpPr>
+      <p:grpSpPr>
+        <a:xfrm>
+          <a:off x="0" y="0"/>
+          <a:ext cx="0" cy="0"/>
+          <a:chOff x="0" y="0"/>
+          <a:chExt cx="0" cy="0"/>
+        </a:xfrm>
+      </p:grpSpPr>
+      <p:sp>
+        <p:nvSpPr>
+          <p:cNvPr id="2" name="Titolo 1">
+            <a:extLst>
+              <a:ext uri="{FF2B5EF4-FFF2-40B4-BE49-F238E27FC236}">
+                <a16:creationId xmlns:a16="http://schemas.microsoft.com/office/drawing/2014/main" id="{D564777B-C649-39D4-6641-30DE28AA1437}"/>
+              </a:ext>
+            </a:extLst>
+          </p:cNvPr>
+          <p:cNvSpPr>
+            <a:spLocks noGrp="1"/>
+          </p:cNvSpPr>
+          <p:nvPr>
+            <p:ph type="title"/>
+          </p:nvPr>
+        </p:nvSpPr>
+        <p:spPr>
+          <a:xfrm>
+            <a:off x="38100" y="69651"/>
+            <a:ext cx="12114000" cy="1153094"/>
+          </a:xfrm>
+          <a:prstGeom prst="roundRect">
+            <a:avLst>
+              <a:gd name="adj" fmla="val 36459"/>
+            </a:avLst>
+          </a:prstGeom>
+          <a:solidFill>
+            <a:srgbClr val="002060"/>
+          </a:solidFill>
+        </p:spPr>
+        <p:txBody>
+          <a:bodyPr>
+            <a:normAutofit/>
+          </a:bodyPr>
+          <a:lstStyle/>
+          <a:p>
+            <a:pPr algn="ctr"/>
+            <a:r>
+              <a:rPr lang="it-IT" b="1" dirty="0">
+                <a:solidFill>
+                  <a:schemeClr val="bg1"/>
+                </a:solidFill>
+              </a:rPr>
+              <a:t>TORSION CORRECTION</a:t>
+            </a:r>
+          </a:p>
+        </p:txBody>
+      </p:sp>
+      <mc:AlternateContent xmlns:mc="http://schemas.openxmlformats.org/markup-compatibility/2006">
+        <mc:Choice xmlns:a14="http://schemas.microsoft.com/office/drawing/2010/main" Requires="a14">
+          <p:sp>
+            <p:nvSpPr>
+              <p:cNvPr id="3" name="Segnaposto contenuto 2">
+                <a:extLst>
+                  <a:ext uri="{FF2B5EF4-FFF2-40B4-BE49-F238E27FC236}">
+                    <a16:creationId xmlns:a16="http://schemas.microsoft.com/office/drawing/2014/main" id="{EFA5B10C-4815-DBEA-D799-9052F3AF197E}"/>
+                  </a:ext>
+                </a:extLst>
+              </p:cNvPr>
+              <p:cNvSpPr>
+                <a:spLocks noGrp="1"/>
+              </p:cNvSpPr>
+              <p:nvPr>
+                <p:ph idx="1"/>
+              </p:nvPr>
+            </p:nvSpPr>
+            <p:spPr>
+              <a:xfrm>
+                <a:off x="838200" y="1401288"/>
+                <a:ext cx="10515600" cy="4776227"/>
+              </a:xfrm>
+            </p:spPr>
+            <p:txBody>
+              <a:bodyPr>
+                <a:normAutofit/>
+              </a:bodyPr>
+              <a:lstStyle/>
+              <a:p>
+                <a:pPr marL="0" indent="0">
+                  <a:buNone/>
+                </a:pPr>
                 <a:endParaRPr lang="en-US" sz="2800" dirty="0"/>
               </a:p>
               <a:p>
+                <a:pPr marL="0" indent="0">
+                  <a:buNone/>
+                </a:pPr>
                 <a:r>
                   <a:rPr lang="en-US" sz="2800" dirty="0"/>
                   <a:t>Now we should correct the effect of torsion using the parameter </a:t>
                 </a:r>
                 <a14:m>
                   <m:oMath xmlns:m="http://schemas.openxmlformats.org/officeDocument/2006/math">
-                    <m:sSub>
-                      <m:sSubPr>
+                    <m:sSubSup>
+                      <m:sSubSupPr>
                         <m:ctrlPr>
                           <a:rPr lang="it-IT" sz="2800" b="0" i="1" smtClean="0">
                             <a:latin typeface="Cambria Math" panose="02040503050406030204" pitchFamily="18" charset="0"/>
                           </a:rPr>
                         </m:ctrlPr>
-                      </m:sSubPr>
+                      </m:sSubSupPr>
                       <m:e>
                         <m:r>
                           <a:rPr lang="it-IT" sz="2800" b="0" i="1" smtClean="0">
@@ -5164,7 +6152,45 @@
                           <m:t>0</m:t>
                         </m:r>
                       </m:sub>
-                    </m:sSub>
+                      <m:sup>
+                        <m:r>
+                          <a:rPr lang="it-IT" sz="2800" b="0" i="1" smtClean="0">
+                            <a:latin typeface="Cambria Math" panose="02040503050406030204" pitchFamily="18" charset="0"/>
+                          </a:rPr>
+                          <m:t>𝑓𝑖𝑡</m:t>
+                        </m:r>
+                      </m:sup>
+                    </m:sSubSup>
+                    <m:r>
+                      <a:rPr lang="it-IT" sz="2800" b="0" i="1" smtClean="0">
+                        <a:latin typeface="Cambria Math" panose="02040503050406030204" pitchFamily="18" charset="0"/>
+                      </a:rPr>
+                      <m:t>(</m:t>
+                    </m:r>
+                    <m:r>
+                      <a:rPr lang="it-IT" sz="2800" b="0" i="1" smtClean="0">
+                        <a:latin typeface="Cambria Math" panose="02040503050406030204" pitchFamily="18" charset="0"/>
+                      </a:rPr>
+                      <m:t>𝑥</m:t>
+                    </m:r>
+                    <m:r>
+                      <a:rPr lang="it-IT" sz="2800" b="0" i="1" smtClean="0">
+                        <a:latin typeface="Cambria Math" panose="02040503050406030204" pitchFamily="18" charset="0"/>
+                      </a:rPr>
+                      <m:t>,</m:t>
+                    </m:r>
+                    <m:r>
+                      <a:rPr lang="it-IT" sz="2800" b="0" i="1" smtClean="0">
+                        <a:latin typeface="Cambria Math" panose="02040503050406030204" pitchFamily="18" charset="0"/>
+                      </a:rPr>
+                      <m:t>𝑦</m:t>
+                    </m:r>
+                    <m:r>
+                      <a:rPr lang="it-IT" sz="2800" b="0" i="1" smtClean="0">
+                        <a:latin typeface="Cambria Math" panose="02040503050406030204" pitchFamily="18" charset="0"/>
+                      </a:rPr>
+                      <m:t>)</m:t>
+                    </m:r>
                   </m:oMath>
                 </a14:m>
                 <a:r>
@@ -5453,6 +6479,11 @@
                             </m:sSub>
                             <m:r>
                               <a:rPr lang="it-IT" sz="2800" b="0" i="1" smtClean="0">
+                                <a:solidFill>
+                                  <a:schemeClr val="bg1">
+                                    <a:lumMod val="65000"/>
+                                  </a:schemeClr>
+                                </a:solidFill>
                                 <a:latin typeface="Cambria Math" panose="02040503050406030204" pitchFamily="18" charset="0"/>
                               </a:rPr>
                               <m:t>+</m:t>
@@ -5461,6 +6492,11 @@
                               <m:sSubPr>
                                 <m:ctrlPr>
                                   <a:rPr lang="it-IT" sz="2800" b="0" i="1" smtClean="0">
+                                    <a:solidFill>
+                                      <a:schemeClr val="bg1">
+                                        <a:lumMod val="65000"/>
+                                      </a:schemeClr>
+                                    </a:solidFill>
                                     <a:latin typeface="Cambria Math" panose="02040503050406030204" pitchFamily="18" charset="0"/>
                                   </a:rPr>
                                 </m:ctrlPr>
@@ -5468,6 +6504,11 @@
                               <m:e>
                                 <m:r>
                                   <a:rPr lang="it-IT" sz="2800" b="0" i="1" smtClean="0">
+                                    <a:solidFill>
+                                      <a:schemeClr val="bg1">
+                                        <a:lumMod val="65000"/>
+                                      </a:schemeClr>
+                                    </a:solidFill>
                                     <a:latin typeface="Cambria Math" panose="02040503050406030204" pitchFamily="18" charset="0"/>
                                   </a:rPr>
                                   <m:t>𝜏</m:t>
@@ -5476,6 +6517,11 @@
                               <m:sub>
                                 <m:r>
                                   <a:rPr lang="it-IT" sz="2800" b="0" i="1" smtClean="0">
+                                    <a:solidFill>
+                                      <a:schemeClr val="bg1">
+                                        <a:lumMod val="65000"/>
+                                      </a:schemeClr>
+                                    </a:solidFill>
                                     <a:latin typeface="Cambria Math" panose="02040503050406030204" pitchFamily="18" charset="0"/>
                                   </a:rPr>
                                   <m:t>𝑥</m:t>
@@ -5484,6 +6530,11 @@
                             </m:sSub>
                             <m:r>
                               <a:rPr lang="it-IT" sz="2800" b="0" i="1" smtClean="0">
+                                <a:solidFill>
+                                  <a:schemeClr val="bg1">
+                                    <a:lumMod val="65000"/>
+                                  </a:schemeClr>
+                                </a:solidFill>
                                 <a:latin typeface="Cambria Math" panose="02040503050406030204" pitchFamily="18" charset="0"/>
                               </a:rPr>
                               <m:t>⋅</m:t>
@@ -5492,6 +6543,11 @@
                               <m:sSubPr>
                                 <m:ctrlPr>
                                   <a:rPr lang="it-IT" sz="2800" b="0" i="1" smtClean="0">
+                                    <a:solidFill>
+                                      <a:schemeClr val="bg1">
+                                        <a:lumMod val="65000"/>
+                                      </a:schemeClr>
+                                    </a:solidFill>
                                     <a:latin typeface="Cambria Math" panose="02040503050406030204" pitchFamily="18" charset="0"/>
                                   </a:rPr>
                                 </m:ctrlPr>
@@ -5499,6 +6555,11 @@
                               <m:e>
                                 <m:r>
                                   <a:rPr lang="it-IT" sz="2800" b="0" i="1" smtClean="0">
+                                    <a:solidFill>
+                                      <a:schemeClr val="bg1">
+                                        <a:lumMod val="65000"/>
+                                      </a:schemeClr>
+                                    </a:solidFill>
                                     <a:latin typeface="Cambria Math" panose="02040503050406030204" pitchFamily="18" charset="0"/>
                                   </a:rPr>
                                   <m:t>𝑑</m:t>
@@ -5507,6 +6568,11 @@
                               <m:sub>
                                 <m:r>
                                   <a:rPr lang="it-IT" sz="2800" b="0" i="1" smtClean="0">
+                                    <a:solidFill>
+                                      <a:schemeClr val="bg1">
+                                        <a:lumMod val="65000"/>
+                                      </a:schemeClr>
+                                    </a:solidFill>
                                     <a:latin typeface="Cambria Math" panose="02040503050406030204" pitchFamily="18" charset="0"/>
                                   </a:rPr>
                                   <m:t>𝑥</m:t>
@@ -5584,24 +6650,33 @@
                 <a:pPr marL="0" indent="0" algn="ctr">
                   <a:buNone/>
                 </a:pPr>
+                <a:endParaRPr lang="en-US" dirty="0"/>
+              </a:p>
+              <a:p>
+                <a:pPr marL="0" indent="0">
+                  <a:buNone/>
+                </a:pPr>
                 <a:r>
-                  <a:rPr lang="en-US" dirty="0"/>
-                  <a:t>(where we can neglect the torsion along the </a:t>
+                  <a:rPr lang="en-US" sz="2800" dirty="0">
+                    <a:solidFill>
+                      <a:srgbClr val="FFC000"/>
+                    </a:solidFill>
+                  </a:rPr>
+                  <a:t>How </a:t>
                 </a:r>
-                <a14:m>
-                  <m:oMath xmlns:m="http://schemas.openxmlformats.org/officeDocument/2006/math">
-                    <m:r>
-                      <a:rPr lang="it-IT" b="0" i="1" smtClean="0">
-                        <a:latin typeface="Cambria Math" panose="02040503050406030204" pitchFamily="18" charset="0"/>
-                      </a:rPr>
-                      <m:t>𝑥</m:t>
-                    </m:r>
-                  </m:oMath>
-                </a14:m>
                 <a:r>
-                  <a:rPr lang="en-US" sz="2800" dirty="0"/>
-                  <a:t> direction)</a:t>
+                  <a:rPr lang="en-US" dirty="0">
+                    <a:solidFill>
+                      <a:srgbClr val="FFC000"/>
+                    </a:solidFill>
+                  </a:rPr>
+                  <a:t>am I behaving if the fit is not linear but parabolic?</a:t>
                 </a:r>
+                <a:endParaRPr lang="en-US" sz="2800" dirty="0">
+                  <a:solidFill>
+                    <a:srgbClr val="FFC000"/>
+                  </a:solidFill>
+                </a:endParaRPr>
               </a:p>
             </p:txBody>
           </p:sp>
@@ -5612,7 +6687,7 @@
               <p:cNvPr id="3" name="Segnaposto contenuto 2">
                 <a:extLst>
                   <a:ext uri="{FF2B5EF4-FFF2-40B4-BE49-F238E27FC236}">
-                    <a16:creationId xmlns:a16="http://schemas.microsoft.com/office/drawing/2014/main" id="{7B5C2D23-C0AC-680A-9985-7B673F13F032}"/>
+                    <a16:creationId xmlns:a16="http://schemas.microsoft.com/office/drawing/2014/main" id="{EFA5B10C-4815-DBEA-D799-9052F3AF197E}"/>
                   </a:ext>
                 </a:extLst>
               </p:cNvPr>
@@ -5631,7 +6706,7 @@
               <a:blipFill>
                 <a:blip r:embed="rId2"/>
                 <a:stretch>
-                  <a:fillRect l="-1043" t="-2299"/>
+                  <a:fillRect l="-1217"/>
                 </a:stretch>
               </a:blipFill>
             </p:spPr>
@@ -5655,7 +6730,7 @@
           <p:cNvPr id="4" name="Segnaposto data 3">
             <a:extLst>
               <a:ext uri="{FF2B5EF4-FFF2-40B4-BE49-F238E27FC236}">
-                <a16:creationId xmlns:a16="http://schemas.microsoft.com/office/drawing/2014/main" id="{AC31EE0F-E66C-8187-4B47-29A6C15CF811}"/>
+                <a16:creationId xmlns:a16="http://schemas.microsoft.com/office/drawing/2014/main" id="{38BA674C-6706-D004-56D6-D583186BEB4D}"/>
               </a:ext>
             </a:extLst>
           </p:cNvPr>
@@ -5692,7 +6767,7 @@
           <p:cNvPr id="5" name="Segnaposto piè di pagina 4">
             <a:extLst>
               <a:ext uri="{FF2B5EF4-FFF2-40B4-BE49-F238E27FC236}">
-                <a16:creationId xmlns:a16="http://schemas.microsoft.com/office/drawing/2014/main" id="{712E6716-1637-677C-6156-4F7A04ED0724}"/>
+                <a16:creationId xmlns:a16="http://schemas.microsoft.com/office/drawing/2014/main" id="{B5BFD406-E3DF-14FC-E56A-CB95E3DBB433}"/>
               </a:ext>
             </a:extLst>
           </p:cNvPr>
@@ -5729,1106 +6804,7 @@
           <p:cNvPr id="6" name="Segnaposto numero diapositiva 5">
             <a:extLst>
               <a:ext uri="{FF2B5EF4-FFF2-40B4-BE49-F238E27FC236}">
-                <a16:creationId xmlns:a16="http://schemas.microsoft.com/office/drawing/2014/main" id="{2B63049B-43B9-E82A-F634-D683E5DB4AB9}"/>
-              </a:ext>
-            </a:extLst>
-          </p:cNvPr>
-          <p:cNvSpPr>
-            <a:spLocks noGrp="1"/>
-          </p:cNvSpPr>
-          <p:nvPr>
-            <p:ph type="sldNum" sz="quarter" idx="12"/>
-          </p:nvPr>
-        </p:nvSpPr>
-        <p:spPr>
-          <a:xfrm>
-            <a:off x="8610600" y="6356349"/>
-            <a:ext cx="2743200" cy="432000"/>
-          </a:xfrm>
-        </p:spPr>
-        <p:txBody>
-          <a:bodyPr/>
-          <a:lstStyle/>
-          <a:p>
-            <a:fld id="{0A318BD9-CA14-4A83-ACF0-03D5918EB402}" type="slidenum">
-              <a:rPr lang="it-IT" sz="1500" b="1" smtClean="0">
-                <a:solidFill>
-                  <a:srgbClr val="002060"/>
-                </a:solidFill>
-              </a:rPr>
-              <a:t>4</a:t>
-            </a:fld>
-            <a:endParaRPr lang="it-IT" sz="1500" b="1" dirty="0">
-              <a:solidFill>
-                <a:srgbClr val="002060"/>
-              </a:solidFill>
-            </a:endParaRPr>
-          </a:p>
-        </p:txBody>
-      </p:sp>
-    </p:spTree>
-    <p:extLst>
-      <p:ext uri="{BB962C8B-B14F-4D97-AF65-F5344CB8AC3E}">
-        <p14:creationId xmlns:p14="http://schemas.microsoft.com/office/powerpoint/2010/main" val="1433736234"/>
-      </p:ext>
-    </p:extLst>
-  </p:cSld>
-  <p:clrMapOvr>
-    <a:masterClrMapping/>
-  </p:clrMapOvr>
-</p:sld>
-</file>
-
-<file path=ppt/slides/slide5.xml><?xml version="1.0" encoding="utf-8"?>
-<p:sld xmlns:a="http://schemas.openxmlformats.org/drawingml/2006/main" xmlns:r="http://schemas.openxmlformats.org/officeDocument/2006/relationships" xmlns:p="http://schemas.openxmlformats.org/presentationml/2006/main">
-  <p:cSld>
-    <p:spTree>
-      <p:nvGrpSpPr>
-        <p:cNvPr id="1" name="">
-          <a:extLst>
-            <a:ext uri="{FF2B5EF4-FFF2-40B4-BE49-F238E27FC236}">
-              <a16:creationId xmlns:a16="http://schemas.microsoft.com/office/drawing/2014/main" id="{F18104A5-D823-4AFD-3773-B580499FE3BB}"/>
-            </a:ext>
-          </a:extLst>
-        </p:cNvPr>
-        <p:cNvGrpSpPr/>
-        <p:nvPr/>
-      </p:nvGrpSpPr>
-      <p:grpSpPr>
-        <a:xfrm>
-          <a:off x="0" y="0"/>
-          <a:ext cx="0" cy="0"/>
-          <a:chOff x="0" y="0"/>
-          <a:chExt cx="0" cy="0"/>
-        </a:xfrm>
-      </p:grpSpPr>
-      <p:sp>
-        <p:nvSpPr>
-          <p:cNvPr id="2" name="Titolo 1">
-            <a:extLst>
-              <a:ext uri="{FF2B5EF4-FFF2-40B4-BE49-F238E27FC236}">
-                <a16:creationId xmlns:a16="http://schemas.microsoft.com/office/drawing/2014/main" id="{583CEF48-81D2-5FCA-ECC7-96A2E849AE17}"/>
-              </a:ext>
-            </a:extLst>
-          </p:cNvPr>
-          <p:cNvSpPr>
-            <a:spLocks noGrp="1"/>
-          </p:cNvSpPr>
-          <p:nvPr>
-            <p:ph type="title"/>
-          </p:nvPr>
-        </p:nvSpPr>
-        <p:spPr>
-          <a:xfrm>
-            <a:off x="38100" y="69651"/>
-            <a:ext cx="12114000" cy="1153094"/>
-          </a:xfrm>
-          <a:prstGeom prst="roundRect">
-            <a:avLst>
-              <a:gd name="adj" fmla="val 36459"/>
-            </a:avLst>
-          </a:prstGeom>
-          <a:solidFill>
-            <a:srgbClr val="002060"/>
-          </a:solidFill>
-        </p:spPr>
-        <p:txBody>
-          <a:bodyPr>
-            <a:normAutofit/>
-          </a:bodyPr>
-          <a:lstStyle/>
-          <a:p>
-            <a:pPr algn="ctr"/>
-            <a:r>
-              <a:rPr lang="it-IT" b="1" dirty="0">
-                <a:solidFill>
-                  <a:schemeClr val="bg1"/>
-                </a:solidFill>
-              </a:rPr>
-              <a:t>TORSION CORRECTION</a:t>
-            </a:r>
-          </a:p>
-        </p:txBody>
-      </p:sp>
-      <mc:AlternateContent xmlns:mc="http://schemas.openxmlformats.org/markup-compatibility/2006">
-        <mc:Choice xmlns:a14="http://schemas.microsoft.com/office/drawing/2010/main" Requires="a14">
-          <p:sp>
-            <p:nvSpPr>
-              <p:cNvPr id="3" name="Segnaposto contenuto 2">
-                <a:extLst>
-                  <a:ext uri="{FF2B5EF4-FFF2-40B4-BE49-F238E27FC236}">
-                    <a16:creationId xmlns:a16="http://schemas.microsoft.com/office/drawing/2014/main" id="{5C2B32F9-9F92-B599-AEEC-7BA9C68435AE}"/>
-                  </a:ext>
-                </a:extLst>
-              </p:cNvPr>
-              <p:cNvSpPr>
-                <a:spLocks noGrp="1"/>
-              </p:cNvSpPr>
-              <p:nvPr>
-                <p:ph idx="1"/>
-              </p:nvPr>
-            </p:nvSpPr>
-            <p:spPr>
-              <a:xfrm>
-                <a:off x="838200" y="1401288"/>
-                <a:ext cx="10515600" cy="4776227"/>
-              </a:xfrm>
-            </p:spPr>
-            <p:txBody>
-              <a:bodyPr>
-                <a:normAutofit/>
-              </a:bodyPr>
-              <a:lstStyle/>
-              <a:p>
-                <a:r>
-                  <a:rPr lang="en-US" sz="2800" dirty="0"/>
-                  <a:t>The 2d map is fitted through </a:t>
-                </a:r>
-                <a:endParaRPr lang="it-IT" sz="2800" b="0" i="1" dirty="0">
-                  <a:latin typeface="Cambria Math" panose="02040503050406030204" pitchFamily="18" charset="0"/>
-                </a:endParaRPr>
-              </a:p>
-              <a:p>
-                <a:pPr marL="0" indent="0">
-                  <a:buNone/>
-                </a:pPr>
-                <a14:m>
-                  <m:oMathPara xmlns:m="http://schemas.openxmlformats.org/officeDocument/2006/math">
-                    <m:oMathParaPr>
-                      <m:jc m:val="centerGroup"/>
-                    </m:oMathParaPr>
-                    <m:oMath xmlns:m="http://schemas.openxmlformats.org/officeDocument/2006/math">
-                      <m:sSub>
-                        <m:sSubPr>
-                          <m:ctrlPr>
-                            <a:rPr lang="it-IT" sz="2800" b="0" i="1" smtClean="0">
-                              <a:latin typeface="Cambria Math" panose="02040503050406030204" pitchFamily="18" charset="0"/>
-                            </a:rPr>
-                          </m:ctrlPr>
-                        </m:sSubPr>
-                        <m:e>
-                          <m:r>
-                            <a:rPr lang="it-IT" sz="2800" b="0" i="1" smtClean="0">
-                              <a:latin typeface="Cambria Math" panose="02040503050406030204" pitchFamily="18" charset="0"/>
-                            </a:rPr>
-                            <m:t>𝜃</m:t>
-                          </m:r>
-                        </m:e>
-                        <m:sub>
-                          <m:r>
-                            <a:rPr lang="it-IT" sz="2800" b="0" i="1" smtClean="0">
-                              <a:latin typeface="Cambria Math" panose="02040503050406030204" pitchFamily="18" charset="0"/>
-                            </a:rPr>
-                            <m:t>𝑐𝑜𝑟𝑟</m:t>
-                          </m:r>
-                        </m:sub>
-                      </m:sSub>
-                      <m:d>
-                        <m:dPr>
-                          <m:ctrlPr>
-                            <a:rPr lang="it-IT" sz="2800" b="0" i="1" smtClean="0">
-                              <a:latin typeface="Cambria Math" panose="02040503050406030204" pitchFamily="18" charset="0"/>
-                            </a:rPr>
-                          </m:ctrlPr>
-                        </m:dPr>
-                        <m:e>
-                          <m:r>
-                            <a:rPr lang="it-IT" sz="2800" b="0" i="1" smtClean="0">
-                              <a:latin typeface="Cambria Math" panose="02040503050406030204" pitchFamily="18" charset="0"/>
-                            </a:rPr>
-                            <m:t>𝑥</m:t>
-                          </m:r>
-                          <m:r>
-                            <a:rPr lang="it-IT" sz="2800" b="0" i="1" smtClean="0">
-                              <a:latin typeface="Cambria Math" panose="02040503050406030204" pitchFamily="18" charset="0"/>
-                            </a:rPr>
-                            <m:t>,</m:t>
-                          </m:r>
-                          <m:r>
-                            <a:rPr lang="it-IT" sz="2800" b="0" i="1" smtClean="0">
-                              <a:latin typeface="Cambria Math" panose="02040503050406030204" pitchFamily="18" charset="0"/>
-                            </a:rPr>
-                            <m:t>𝑦</m:t>
-                          </m:r>
-                        </m:e>
-                      </m:d>
-                      <m:r>
-                        <a:rPr lang="it-IT" sz="2800" b="0" i="1" smtClean="0">
-                          <a:latin typeface="Cambria Math" panose="02040503050406030204" pitchFamily="18" charset="0"/>
-                        </a:rPr>
-                        <m:t>=</m:t>
-                      </m:r>
-                      <m:sSub>
-                        <m:sSubPr>
-                          <m:ctrlPr>
-                            <a:rPr lang="it-IT" sz="2800" b="0" i="1" smtClean="0">
-                              <a:latin typeface="Cambria Math" panose="02040503050406030204" pitchFamily="18" charset="0"/>
-                            </a:rPr>
-                          </m:ctrlPr>
-                        </m:sSubPr>
-                        <m:e>
-                          <m:r>
-                            <a:rPr lang="it-IT" sz="2800" b="0" i="1" smtClean="0">
-                              <a:latin typeface="Cambria Math" panose="02040503050406030204" pitchFamily="18" charset="0"/>
-                            </a:rPr>
-                            <m:t>𝜃</m:t>
-                          </m:r>
-                        </m:e>
-                        <m:sub>
-                          <m:r>
-                            <a:rPr lang="it-IT" sz="2800" b="0" i="1" smtClean="0">
-                              <a:latin typeface="Cambria Math" panose="02040503050406030204" pitchFamily="18" charset="0"/>
-                            </a:rPr>
-                            <m:t>0</m:t>
-                          </m:r>
-                        </m:sub>
-                      </m:sSub>
-                      <m:r>
-                        <a:rPr lang="it-IT" sz="2800" b="0" i="1" smtClean="0">
-                          <a:latin typeface="Cambria Math" panose="02040503050406030204" pitchFamily="18" charset="0"/>
-                        </a:rPr>
-                        <m:t>+</m:t>
-                      </m:r>
-                      <m:sSub>
-                        <m:sSubPr>
-                          <m:ctrlPr>
-                            <a:rPr lang="it-IT" sz="2800" b="0" i="1" smtClean="0">
-                              <a:latin typeface="Cambria Math" panose="02040503050406030204" pitchFamily="18" charset="0"/>
-                            </a:rPr>
-                          </m:ctrlPr>
-                        </m:sSubPr>
-                        <m:e>
-                          <m:r>
-                            <a:rPr lang="it-IT" sz="2800" b="0" i="1" smtClean="0">
-                              <a:latin typeface="Cambria Math" panose="02040503050406030204" pitchFamily="18" charset="0"/>
-                            </a:rPr>
-                            <m:t>𝜏</m:t>
-                          </m:r>
-                        </m:e>
-                        <m:sub>
-                          <m:r>
-                            <a:rPr lang="it-IT" sz="2800" b="0" i="1" smtClean="0">
-                              <a:latin typeface="Cambria Math" panose="02040503050406030204" pitchFamily="18" charset="0"/>
-                            </a:rPr>
-                            <m:t>𝑥</m:t>
-                          </m:r>
-                        </m:sub>
-                      </m:sSub>
-                      <m:r>
-                        <a:rPr lang="it-IT" sz="2800" b="0" i="1" smtClean="0">
-                          <a:latin typeface="Cambria Math" panose="02040503050406030204" pitchFamily="18" charset="0"/>
-                        </a:rPr>
-                        <m:t>⋅</m:t>
-                      </m:r>
-                      <m:r>
-                        <a:rPr lang="it-IT" sz="2800" b="0" i="1" smtClean="0">
-                          <a:latin typeface="Cambria Math" panose="02040503050406030204" pitchFamily="18" charset="0"/>
-                        </a:rPr>
-                        <m:t>𝑥</m:t>
-                      </m:r>
-                      <m:r>
-                        <a:rPr lang="it-IT" sz="2800" b="0" i="1" smtClean="0">
-                          <a:latin typeface="Cambria Math" panose="02040503050406030204" pitchFamily="18" charset="0"/>
-                        </a:rPr>
-                        <m:t>+</m:t>
-                      </m:r>
-                      <m:sSub>
-                        <m:sSubPr>
-                          <m:ctrlPr>
-                            <a:rPr lang="it-IT" sz="2800" b="0" i="1" smtClean="0">
-                              <a:latin typeface="Cambria Math" panose="02040503050406030204" pitchFamily="18" charset="0"/>
-                            </a:rPr>
-                          </m:ctrlPr>
-                        </m:sSubPr>
-                        <m:e>
-                          <m:r>
-                            <a:rPr lang="it-IT" sz="2800" b="0" i="1" smtClean="0">
-                              <a:latin typeface="Cambria Math" panose="02040503050406030204" pitchFamily="18" charset="0"/>
-                            </a:rPr>
-                            <m:t>𝜏</m:t>
-                          </m:r>
-                        </m:e>
-                        <m:sub>
-                          <m:r>
-                            <a:rPr lang="it-IT" sz="2800" b="0" i="1" smtClean="0">
-                              <a:latin typeface="Cambria Math" panose="02040503050406030204" pitchFamily="18" charset="0"/>
-                            </a:rPr>
-                            <m:t>𝑦</m:t>
-                          </m:r>
-                        </m:sub>
-                      </m:sSub>
-                      <m:r>
-                        <a:rPr lang="it-IT" sz="2800" b="0" i="1" smtClean="0">
-                          <a:latin typeface="Cambria Math" panose="02040503050406030204" pitchFamily="18" charset="0"/>
-                        </a:rPr>
-                        <m:t>⋅</m:t>
-                      </m:r>
-                      <m:r>
-                        <a:rPr lang="it-IT" sz="2800" b="0" i="1" smtClean="0">
-                          <a:latin typeface="Cambria Math" panose="02040503050406030204" pitchFamily="18" charset="0"/>
-                        </a:rPr>
-                        <m:t>𝑦</m:t>
-                      </m:r>
-                      <m:r>
-                        <a:rPr lang="it-IT" sz="2800" b="0" i="1" smtClean="0">
-                          <a:latin typeface="Cambria Math" panose="02040503050406030204" pitchFamily="18" charset="0"/>
-                        </a:rPr>
-                        <m:t>+(</m:t>
-                      </m:r>
-                      <m:sSub>
-                        <m:sSubPr>
-                          <m:ctrlPr>
-                            <a:rPr lang="it-IT" sz="2800" b="0" i="1" smtClean="0">
-                              <a:latin typeface="Cambria Math" panose="02040503050406030204" pitchFamily="18" charset="0"/>
-                            </a:rPr>
-                          </m:ctrlPr>
-                        </m:sSubPr>
-                        <m:e>
-                          <m:r>
-                            <a:rPr lang="it-IT" sz="2800" b="0" i="1" smtClean="0">
-                              <a:latin typeface="Cambria Math" panose="02040503050406030204" pitchFamily="18" charset="0"/>
-                            </a:rPr>
-                            <m:t>𝑝</m:t>
-                          </m:r>
-                        </m:e>
-                        <m:sub>
-                          <m:r>
-                            <a:rPr lang="it-IT" sz="2800" b="0" i="1" smtClean="0">
-                              <a:latin typeface="Cambria Math" panose="02040503050406030204" pitchFamily="18" charset="0"/>
-                            </a:rPr>
-                            <m:t>3</m:t>
-                          </m:r>
-                        </m:sub>
-                      </m:sSub>
-                      <m:sSup>
-                        <m:sSupPr>
-                          <m:ctrlPr>
-                            <a:rPr lang="it-IT" sz="2800" b="0" i="1" smtClean="0">
-                              <a:latin typeface="Cambria Math" panose="02040503050406030204" pitchFamily="18" charset="0"/>
-                            </a:rPr>
-                          </m:ctrlPr>
-                        </m:sSupPr>
-                        <m:e>
-                          <m:r>
-                            <a:rPr lang="it-IT" sz="2800" b="0" i="1" smtClean="0">
-                              <a:latin typeface="Cambria Math" panose="02040503050406030204" pitchFamily="18" charset="0"/>
-                            </a:rPr>
-                            <m:t>𝑥</m:t>
-                          </m:r>
-                        </m:e>
-                        <m:sup>
-                          <m:r>
-                            <a:rPr lang="it-IT" sz="2800" b="0" i="1" smtClean="0">
-                              <a:latin typeface="Cambria Math" panose="02040503050406030204" pitchFamily="18" charset="0"/>
-                            </a:rPr>
-                            <m:t>2</m:t>
-                          </m:r>
-                        </m:sup>
-                      </m:sSup>
-                      <m:r>
-                        <a:rPr lang="it-IT" sz="2800" b="0" i="1" smtClean="0">
-                          <a:latin typeface="Cambria Math" panose="02040503050406030204" pitchFamily="18" charset="0"/>
-                        </a:rPr>
-                        <m:t>+</m:t>
-                      </m:r>
-                      <m:sSub>
-                        <m:sSubPr>
-                          <m:ctrlPr>
-                            <a:rPr lang="it-IT" sz="2800" b="0" i="1" smtClean="0">
-                              <a:latin typeface="Cambria Math" panose="02040503050406030204" pitchFamily="18" charset="0"/>
-                            </a:rPr>
-                          </m:ctrlPr>
-                        </m:sSubPr>
-                        <m:e>
-                          <m:r>
-                            <a:rPr lang="it-IT" sz="2800" b="0" i="1" smtClean="0">
-                              <a:latin typeface="Cambria Math" panose="02040503050406030204" pitchFamily="18" charset="0"/>
-                            </a:rPr>
-                            <m:t>𝑝</m:t>
-                          </m:r>
-                        </m:e>
-                        <m:sub>
-                          <m:r>
-                            <a:rPr lang="it-IT" sz="2800" b="0" i="1" smtClean="0">
-                              <a:latin typeface="Cambria Math" panose="02040503050406030204" pitchFamily="18" charset="0"/>
-                            </a:rPr>
-                            <m:t>4</m:t>
-                          </m:r>
-                        </m:sub>
-                      </m:sSub>
-                      <m:sSup>
-                        <m:sSupPr>
-                          <m:ctrlPr>
-                            <a:rPr lang="it-IT" sz="2800" b="0" i="1" smtClean="0">
-                              <a:latin typeface="Cambria Math" panose="02040503050406030204" pitchFamily="18" charset="0"/>
-                            </a:rPr>
-                          </m:ctrlPr>
-                        </m:sSupPr>
-                        <m:e>
-                          <m:r>
-                            <a:rPr lang="it-IT" sz="2800" b="0" i="1" smtClean="0">
-                              <a:latin typeface="Cambria Math" panose="02040503050406030204" pitchFamily="18" charset="0"/>
-                            </a:rPr>
-                            <m:t>𝑦</m:t>
-                          </m:r>
-                        </m:e>
-                        <m:sup>
-                          <m:r>
-                            <a:rPr lang="it-IT" sz="2800" b="0" i="1" smtClean="0">
-                              <a:latin typeface="Cambria Math" panose="02040503050406030204" pitchFamily="18" charset="0"/>
-                            </a:rPr>
-                            <m:t>2</m:t>
-                          </m:r>
-                        </m:sup>
-                      </m:sSup>
-                      <m:r>
-                        <a:rPr lang="it-IT" sz="2800" b="0" i="1" smtClean="0">
-                          <a:latin typeface="Cambria Math" panose="02040503050406030204" pitchFamily="18" charset="0"/>
-                        </a:rPr>
-                        <m:t>+</m:t>
-                      </m:r>
-                      <m:sSub>
-                        <m:sSubPr>
-                          <m:ctrlPr>
-                            <a:rPr lang="it-IT" sz="2800" b="0" i="1" smtClean="0">
-                              <a:latin typeface="Cambria Math" panose="02040503050406030204" pitchFamily="18" charset="0"/>
-                            </a:rPr>
-                          </m:ctrlPr>
-                        </m:sSubPr>
-                        <m:e>
-                          <m:r>
-                            <a:rPr lang="it-IT" sz="2800" b="0" i="1" smtClean="0">
-                              <a:latin typeface="Cambria Math" panose="02040503050406030204" pitchFamily="18" charset="0"/>
-                            </a:rPr>
-                            <m:t>𝑝</m:t>
-                          </m:r>
-                        </m:e>
-                        <m:sub>
-                          <m:r>
-                            <a:rPr lang="it-IT" sz="2800" b="0" i="1" smtClean="0">
-                              <a:latin typeface="Cambria Math" panose="02040503050406030204" pitchFamily="18" charset="0"/>
-                            </a:rPr>
-                            <m:t>5</m:t>
-                          </m:r>
-                        </m:sub>
-                      </m:sSub>
-                      <m:r>
-                        <a:rPr lang="it-IT" sz="2800" b="0" i="1" smtClean="0">
-                          <a:latin typeface="Cambria Math" panose="02040503050406030204" pitchFamily="18" charset="0"/>
-                        </a:rPr>
-                        <m:t>𝑥𝑦</m:t>
-                      </m:r>
-                      <m:r>
-                        <a:rPr lang="it-IT" sz="2800" b="0" i="1" smtClean="0">
-                          <a:latin typeface="Cambria Math" panose="02040503050406030204" pitchFamily="18" charset="0"/>
-                        </a:rPr>
-                        <m:t>)</m:t>
-                      </m:r>
-                    </m:oMath>
-                  </m:oMathPara>
-                </a14:m>
-                <a:endParaRPr lang="en-US" sz="2800" dirty="0"/>
-              </a:p>
-              <a:p>
-                <a:endParaRPr lang="en-US" sz="2800" dirty="0"/>
-              </a:p>
-              <a:p>
-                <a:r>
-                  <a:rPr lang="en-US" sz="2800" dirty="0"/>
-                  <a:t>Now we should correct the effect of torsion using the parameter </a:t>
-                </a:r>
-                <a14:m>
-                  <m:oMath xmlns:m="http://schemas.openxmlformats.org/officeDocument/2006/math">
-                    <m:sSub>
-                      <m:sSubPr>
-                        <m:ctrlPr>
-                          <a:rPr lang="it-IT" sz="2800" b="0" i="1" smtClean="0">
-                            <a:latin typeface="Cambria Math" panose="02040503050406030204" pitchFamily="18" charset="0"/>
-                          </a:rPr>
-                        </m:ctrlPr>
-                      </m:sSubPr>
-                      <m:e>
-                        <m:r>
-                          <a:rPr lang="it-IT" sz="2800" b="0" i="1" smtClean="0">
-                            <a:latin typeface="Cambria Math" panose="02040503050406030204" pitchFamily="18" charset="0"/>
-                          </a:rPr>
-                          <m:t>𝜃</m:t>
-                        </m:r>
-                      </m:e>
-                      <m:sub>
-                        <m:r>
-                          <a:rPr lang="it-IT" sz="2800" b="0" i="1" smtClean="0">
-                            <a:latin typeface="Cambria Math" panose="02040503050406030204" pitchFamily="18" charset="0"/>
-                          </a:rPr>
-                          <m:t>0</m:t>
-                        </m:r>
-                      </m:sub>
-                    </m:sSub>
-                  </m:oMath>
-                </a14:m>
-                <a:r>
-                  <a:rPr lang="en-US" sz="2800" dirty="0"/>
-                  <a:t> found for each bin:</a:t>
-                </a:r>
-              </a:p>
-              <a:p>
-                <a:pPr marL="0" indent="0" algn="ctr">
-                  <a:buNone/>
-                </a:pPr>
-                <a:r>
-                  <a:rPr lang="en-US" sz="2800" dirty="0"/>
-                  <a:t>instead of the Lindhard cut </a:t>
-                </a:r>
-                <a14:m>
-                  <m:oMath xmlns:m="http://schemas.openxmlformats.org/officeDocument/2006/math">
-                    <m:sSub>
-                      <m:sSubPr>
-                        <m:ctrlPr>
-                          <a:rPr lang="it-IT" sz="2800" b="0" i="1" smtClean="0">
-                            <a:latin typeface="Cambria Math" panose="02040503050406030204" pitchFamily="18" charset="0"/>
-                          </a:rPr>
-                        </m:ctrlPr>
-                      </m:sSubPr>
-                      <m:e>
-                        <m:r>
-                          <a:rPr lang="it-IT" sz="2800" b="0" i="1" smtClean="0">
-                            <a:latin typeface="Cambria Math" panose="02040503050406030204" pitchFamily="18" charset="0"/>
-                          </a:rPr>
-                          <m:t>|</m:t>
-                        </m:r>
-                        <m:r>
-                          <a:rPr lang="it-IT" sz="2800" b="0" i="1" smtClean="0">
-                            <a:latin typeface="Cambria Math" panose="02040503050406030204" pitchFamily="18" charset="0"/>
-                          </a:rPr>
-                          <m:t>𝜃</m:t>
-                        </m:r>
-                      </m:e>
-                      <m:sub>
-                        <m:r>
-                          <a:rPr lang="it-IT" sz="2800" b="0" i="1" smtClean="0">
-                            <a:latin typeface="Cambria Math" panose="02040503050406030204" pitchFamily="18" charset="0"/>
-                          </a:rPr>
-                          <m:t>𝑖𝑛</m:t>
-                        </m:r>
-                        <m:r>
-                          <a:rPr lang="it-IT" sz="2800" b="0" i="1" smtClean="0">
-                            <a:latin typeface="Cambria Math" panose="02040503050406030204" pitchFamily="18" charset="0"/>
-                          </a:rPr>
-                          <m:t>,</m:t>
-                        </m:r>
-                        <m:r>
-                          <a:rPr lang="it-IT" sz="2800" b="0" i="1" smtClean="0">
-                            <a:latin typeface="Cambria Math" panose="02040503050406030204" pitchFamily="18" charset="0"/>
-                          </a:rPr>
-                          <m:t>𝑥</m:t>
-                        </m:r>
-                      </m:sub>
-                    </m:sSub>
-                    <m:r>
-                      <a:rPr lang="it-IT" sz="2800" b="0" i="1" smtClean="0">
-                        <a:latin typeface="Cambria Math" panose="02040503050406030204" pitchFamily="18" charset="0"/>
-                      </a:rPr>
-                      <m:t>|≤</m:t>
-                    </m:r>
-                    <m:f>
-                      <m:fPr>
-                        <m:ctrlPr>
-                          <a:rPr lang="it-IT" sz="2800" b="0" i="1" smtClean="0">
-                            <a:latin typeface="Cambria Math" panose="02040503050406030204" pitchFamily="18" charset="0"/>
-                          </a:rPr>
-                        </m:ctrlPr>
-                      </m:fPr>
-                      <m:num>
-                        <m:r>
-                          <a:rPr lang="it-IT" sz="2800" b="0" i="1" smtClean="0">
-                            <a:latin typeface="Cambria Math" panose="02040503050406030204" pitchFamily="18" charset="0"/>
-                          </a:rPr>
-                          <m:t>1</m:t>
-                        </m:r>
-                      </m:num>
-                      <m:den>
-                        <m:r>
-                          <a:rPr lang="it-IT" sz="2800" b="0" i="1" smtClean="0">
-                            <a:latin typeface="Cambria Math" panose="02040503050406030204" pitchFamily="18" charset="0"/>
-                          </a:rPr>
-                          <m:t>2</m:t>
-                        </m:r>
-                      </m:den>
-                    </m:f>
-                    <m:sSub>
-                      <m:sSubPr>
-                        <m:ctrlPr>
-                          <a:rPr lang="it-IT" sz="2800" b="0" i="1" smtClean="0">
-                            <a:latin typeface="Cambria Math" panose="02040503050406030204" pitchFamily="18" charset="0"/>
-                          </a:rPr>
-                        </m:ctrlPr>
-                      </m:sSubPr>
-                      <m:e>
-                        <m:r>
-                          <a:rPr lang="it-IT" sz="2800" b="0" i="1" smtClean="0">
-                            <a:latin typeface="Cambria Math" panose="02040503050406030204" pitchFamily="18" charset="0"/>
-                          </a:rPr>
-                          <m:t>𝜃</m:t>
-                        </m:r>
-                      </m:e>
-                      <m:sub>
-                        <m:r>
-                          <a:rPr lang="it-IT" sz="2800" b="0" i="1" smtClean="0">
-                            <a:latin typeface="Cambria Math" panose="02040503050406030204" pitchFamily="18" charset="0"/>
-                          </a:rPr>
-                          <m:t>𝐿</m:t>
-                        </m:r>
-                      </m:sub>
-                    </m:sSub>
-                  </m:oMath>
-                </a14:m>
-                <a:r>
-                  <a:rPr lang="en-US" sz="2800" dirty="0"/>
-                  <a:t> we will use</a:t>
-                </a:r>
-                <a:endParaRPr lang="it-IT" sz="2800" b="0" i="1" dirty="0">
-                  <a:latin typeface="Cambria Math" panose="02040503050406030204" pitchFamily="18" charset="0"/>
-                </a:endParaRPr>
-              </a:p>
-              <a:p>
-                <a:pPr marL="0" indent="0" algn="ctr">
-                  <a:buNone/>
-                </a:pPr>
-                <a14:m>
-                  <m:oMath xmlns:m="http://schemas.openxmlformats.org/officeDocument/2006/math">
-                    <m:d>
-                      <m:dPr>
-                        <m:begChr m:val="|"/>
-                        <m:endChr m:val="|"/>
-                        <m:ctrlPr>
-                          <a:rPr lang="it-IT" sz="2800" b="0" i="1" smtClean="0">
-                            <a:latin typeface="Cambria Math" panose="02040503050406030204" pitchFamily="18" charset="0"/>
-                          </a:rPr>
-                        </m:ctrlPr>
-                      </m:dPr>
-                      <m:e>
-                        <m:sSubSup>
-                          <m:sSubSupPr>
-                            <m:ctrlPr>
-                              <a:rPr lang="it-IT" sz="2800" b="0" i="1" smtClean="0">
-                                <a:latin typeface="Cambria Math" panose="02040503050406030204" pitchFamily="18" charset="0"/>
-                              </a:rPr>
-                            </m:ctrlPr>
-                          </m:sSubSupPr>
-                          <m:e>
-                            <m:r>
-                              <a:rPr lang="it-IT" sz="2800" b="0" i="1" smtClean="0">
-                                <a:latin typeface="Cambria Math" panose="02040503050406030204" pitchFamily="18" charset="0"/>
-                              </a:rPr>
-                              <m:t>𝜃</m:t>
-                            </m:r>
-                          </m:e>
-                          <m:sub>
-                            <m:r>
-                              <a:rPr lang="it-IT" sz="2800" b="0" i="1" smtClean="0">
-                                <a:latin typeface="Cambria Math" panose="02040503050406030204" pitchFamily="18" charset="0"/>
-                              </a:rPr>
-                              <m:t>𝑥</m:t>
-                            </m:r>
-                          </m:sub>
-                          <m:sup>
-                            <m:r>
-                              <a:rPr lang="it-IT" sz="2800" b="0" i="1" smtClean="0">
-                                <a:latin typeface="Cambria Math" panose="02040503050406030204" pitchFamily="18" charset="0"/>
-                              </a:rPr>
-                              <m:t>𝑖𝑛</m:t>
-                            </m:r>
-                          </m:sup>
-                        </m:sSubSup>
-                        <m:r>
-                          <a:rPr lang="it-IT" sz="2800" b="0" i="1" smtClean="0">
-                            <a:latin typeface="Cambria Math" panose="02040503050406030204" pitchFamily="18" charset="0"/>
-                          </a:rPr>
-                          <m:t>−</m:t>
-                        </m:r>
-                        <m:d>
-                          <m:dPr>
-                            <m:ctrlPr>
-                              <a:rPr lang="it-IT" sz="2800" b="0" i="1" smtClean="0">
-                                <a:latin typeface="Cambria Math" panose="02040503050406030204" pitchFamily="18" charset="0"/>
-                              </a:rPr>
-                            </m:ctrlPr>
-                          </m:dPr>
-                          <m:e>
-                            <m:sSubSup>
-                              <m:sSubSupPr>
-                                <m:ctrlPr>
-                                  <a:rPr lang="it-IT" sz="2800" b="0" i="1" smtClean="0">
-                                    <a:latin typeface="Cambria Math" panose="02040503050406030204" pitchFamily="18" charset="0"/>
-                                  </a:rPr>
-                                </m:ctrlPr>
-                              </m:sSubSupPr>
-                              <m:e>
-                                <m:r>
-                                  <a:rPr lang="it-IT" sz="2800" b="0" i="1" smtClean="0">
-                                    <a:latin typeface="Cambria Math" panose="02040503050406030204" pitchFamily="18" charset="0"/>
-                                  </a:rPr>
-                                  <m:t>𝜃</m:t>
-                                </m:r>
-                              </m:e>
-                              <m:sub>
-                                <m:r>
-                                  <a:rPr lang="it-IT" sz="2800" b="0" i="1" smtClean="0">
-                                    <a:latin typeface="Cambria Math" panose="02040503050406030204" pitchFamily="18" charset="0"/>
-                                  </a:rPr>
-                                  <m:t>𝑥</m:t>
-                                </m:r>
-                              </m:sub>
-                              <m:sup>
-                                <m:r>
-                                  <a:rPr lang="it-IT" sz="2800" b="0" i="1" smtClean="0">
-                                    <a:latin typeface="Cambria Math" panose="02040503050406030204" pitchFamily="18" charset="0"/>
-                                  </a:rPr>
-                                  <m:t>𝑜𝑓𝑓</m:t>
-                                </m:r>
-                              </m:sup>
-                            </m:sSubSup>
-                            <m:r>
-                              <a:rPr lang="it-IT" sz="2800" b="0" i="1" smtClean="0">
-                                <a:latin typeface="Cambria Math" panose="02040503050406030204" pitchFamily="18" charset="0"/>
-                              </a:rPr>
-                              <m:t>+</m:t>
-                            </m:r>
-                            <m:sSub>
-                              <m:sSubPr>
-                                <m:ctrlPr>
-                                  <a:rPr lang="it-IT" sz="2800" b="0" i="1" smtClean="0">
-                                    <a:latin typeface="Cambria Math" panose="02040503050406030204" pitchFamily="18" charset="0"/>
-                                  </a:rPr>
-                                </m:ctrlPr>
-                              </m:sSubPr>
-                              <m:e>
-                                <m:r>
-                                  <a:rPr lang="it-IT" sz="2800" b="0" i="1" smtClean="0">
-                                    <a:latin typeface="Cambria Math" panose="02040503050406030204" pitchFamily="18" charset="0"/>
-                                  </a:rPr>
-                                  <m:t>𝜏</m:t>
-                                </m:r>
-                              </m:e>
-                              <m:sub>
-                                <m:r>
-                                  <a:rPr lang="it-IT" sz="2800" b="0" i="1" smtClean="0">
-                                    <a:latin typeface="Cambria Math" panose="02040503050406030204" pitchFamily="18" charset="0"/>
-                                  </a:rPr>
-                                  <m:t>𝑦</m:t>
-                                </m:r>
-                              </m:sub>
-                            </m:sSub>
-                            <m:r>
-                              <a:rPr lang="it-IT" sz="2800" b="0" i="1" smtClean="0">
-                                <a:latin typeface="Cambria Math" panose="02040503050406030204" pitchFamily="18" charset="0"/>
-                              </a:rPr>
-                              <m:t>⋅</m:t>
-                            </m:r>
-                            <m:sSub>
-                              <m:sSubPr>
-                                <m:ctrlPr>
-                                  <a:rPr lang="it-IT" sz="2800" b="0" i="1" smtClean="0">
-                                    <a:latin typeface="Cambria Math" panose="02040503050406030204" pitchFamily="18" charset="0"/>
-                                  </a:rPr>
-                                </m:ctrlPr>
-                              </m:sSubPr>
-                              <m:e>
-                                <m:r>
-                                  <a:rPr lang="it-IT" sz="2800" b="0" i="1" smtClean="0">
-                                    <a:latin typeface="Cambria Math" panose="02040503050406030204" pitchFamily="18" charset="0"/>
-                                  </a:rPr>
-                                  <m:t>𝑑</m:t>
-                                </m:r>
-                              </m:e>
-                              <m:sub>
-                                <m:r>
-                                  <a:rPr lang="it-IT" sz="2800" b="0" i="1" smtClean="0">
-                                    <a:latin typeface="Cambria Math" panose="02040503050406030204" pitchFamily="18" charset="0"/>
-                                  </a:rPr>
-                                  <m:t>𝑦</m:t>
-                                </m:r>
-                              </m:sub>
-                            </m:sSub>
-                            <m:r>
-                              <a:rPr lang="it-IT" sz="2800" b="0" i="1" smtClean="0">
-                                <a:latin typeface="Cambria Math" panose="02040503050406030204" pitchFamily="18" charset="0"/>
-                              </a:rPr>
-                              <m:t>+</m:t>
-                            </m:r>
-                            <m:sSub>
-                              <m:sSubPr>
-                                <m:ctrlPr>
-                                  <a:rPr lang="it-IT" sz="2800" b="0" i="1" smtClean="0">
-                                    <a:latin typeface="Cambria Math" panose="02040503050406030204" pitchFamily="18" charset="0"/>
-                                  </a:rPr>
-                                </m:ctrlPr>
-                              </m:sSubPr>
-                              <m:e>
-                                <m:r>
-                                  <a:rPr lang="it-IT" sz="2800" b="0" i="1" smtClean="0">
-                                    <a:latin typeface="Cambria Math" panose="02040503050406030204" pitchFamily="18" charset="0"/>
-                                  </a:rPr>
-                                  <m:t>𝜏</m:t>
-                                </m:r>
-                              </m:e>
-                              <m:sub>
-                                <m:r>
-                                  <a:rPr lang="it-IT" sz="2800" b="0" i="1" smtClean="0">
-                                    <a:latin typeface="Cambria Math" panose="02040503050406030204" pitchFamily="18" charset="0"/>
-                                  </a:rPr>
-                                  <m:t>𝑥</m:t>
-                                </m:r>
-                              </m:sub>
-                            </m:sSub>
-                            <m:r>
-                              <a:rPr lang="it-IT" sz="2800" b="0" i="1" smtClean="0">
-                                <a:latin typeface="Cambria Math" panose="02040503050406030204" pitchFamily="18" charset="0"/>
-                              </a:rPr>
-                              <m:t>⋅</m:t>
-                            </m:r>
-                            <m:sSub>
-                              <m:sSubPr>
-                                <m:ctrlPr>
-                                  <a:rPr lang="it-IT" sz="2800" b="0" i="1" smtClean="0">
-                                    <a:latin typeface="Cambria Math" panose="02040503050406030204" pitchFamily="18" charset="0"/>
-                                  </a:rPr>
-                                </m:ctrlPr>
-                              </m:sSubPr>
-                              <m:e>
-                                <m:r>
-                                  <a:rPr lang="it-IT" sz="2800" b="0" i="1" smtClean="0">
-                                    <a:latin typeface="Cambria Math" panose="02040503050406030204" pitchFamily="18" charset="0"/>
-                                  </a:rPr>
-                                  <m:t>𝑑</m:t>
-                                </m:r>
-                              </m:e>
-                              <m:sub>
-                                <m:r>
-                                  <a:rPr lang="it-IT" sz="2800" b="0" i="1" smtClean="0">
-                                    <a:latin typeface="Cambria Math" panose="02040503050406030204" pitchFamily="18" charset="0"/>
-                                  </a:rPr>
-                                  <m:t>𝑥</m:t>
-                                </m:r>
-                              </m:sub>
-                            </m:sSub>
-                          </m:e>
-                        </m:d>
-                      </m:e>
-                    </m:d>
-                    <m:r>
-                      <a:rPr lang="it-IT" sz="2800" b="0" i="1" smtClean="0">
-                        <a:latin typeface="Cambria Math" panose="02040503050406030204" pitchFamily="18" charset="0"/>
-                      </a:rPr>
-                      <m:t>≤</m:t>
-                    </m:r>
-                    <m:f>
-                      <m:fPr>
-                        <m:ctrlPr>
-                          <a:rPr lang="it-IT" sz="2800" b="0" i="1" smtClean="0">
-                            <a:latin typeface="Cambria Math" panose="02040503050406030204" pitchFamily="18" charset="0"/>
-                          </a:rPr>
-                        </m:ctrlPr>
-                      </m:fPr>
-                      <m:num>
-                        <m:r>
-                          <a:rPr lang="it-IT" sz="2800" b="0" i="1" smtClean="0">
-                            <a:latin typeface="Cambria Math" panose="02040503050406030204" pitchFamily="18" charset="0"/>
-                          </a:rPr>
-                          <m:t>1</m:t>
-                        </m:r>
-                      </m:num>
-                      <m:den>
-                        <m:r>
-                          <a:rPr lang="it-IT" sz="2800" b="0" i="1" smtClean="0">
-                            <a:latin typeface="Cambria Math" panose="02040503050406030204" pitchFamily="18" charset="0"/>
-                          </a:rPr>
-                          <m:t>2</m:t>
-                        </m:r>
-                      </m:den>
-                    </m:f>
-                    <m:sSub>
-                      <m:sSubPr>
-                        <m:ctrlPr>
-                          <a:rPr lang="it-IT" sz="2800" b="0" i="1" smtClean="0">
-                            <a:latin typeface="Cambria Math" panose="02040503050406030204" pitchFamily="18" charset="0"/>
-                          </a:rPr>
-                        </m:ctrlPr>
-                      </m:sSubPr>
-                      <m:e>
-                        <m:r>
-                          <a:rPr lang="it-IT" sz="2800" b="0" i="1" smtClean="0">
-                            <a:latin typeface="Cambria Math" panose="02040503050406030204" pitchFamily="18" charset="0"/>
-                          </a:rPr>
-                          <m:t>𝜃</m:t>
-                        </m:r>
-                      </m:e>
-                      <m:sub>
-                        <m:r>
-                          <a:rPr lang="it-IT" sz="2800" b="0" i="1" smtClean="0">
-                            <a:latin typeface="Cambria Math" panose="02040503050406030204" pitchFamily="18" charset="0"/>
-                          </a:rPr>
-                          <m:t>𝐿</m:t>
-                        </m:r>
-                      </m:sub>
-                    </m:sSub>
-                  </m:oMath>
-                </a14:m>
-                <a:r>
-                  <a:rPr lang="en-US" sz="2800" dirty="0"/>
-                  <a:t> </a:t>
-                </a:r>
-              </a:p>
-              <a:p>
-                <a:pPr marL="0" indent="0" algn="ctr">
-                  <a:buNone/>
-                </a:pPr>
-                <a:r>
-                  <a:rPr lang="en-US" dirty="0"/>
-                  <a:t>(where we can neglect the torsion along the </a:t>
-                </a:r>
-                <a14:m>
-                  <m:oMath xmlns:m="http://schemas.openxmlformats.org/officeDocument/2006/math">
-                    <m:r>
-                      <a:rPr lang="it-IT" b="0" i="1" smtClean="0">
-                        <a:latin typeface="Cambria Math" panose="02040503050406030204" pitchFamily="18" charset="0"/>
-                      </a:rPr>
-                      <m:t>𝑥</m:t>
-                    </m:r>
-                  </m:oMath>
-                </a14:m>
-                <a:r>
-                  <a:rPr lang="en-US" sz="2800" dirty="0"/>
-                  <a:t> direction)</a:t>
-                </a:r>
-              </a:p>
-            </p:txBody>
-          </p:sp>
-        </mc:Choice>
-        <mc:Fallback>
-          <p:sp>
-            <p:nvSpPr>
-              <p:cNvPr id="3" name="Segnaposto contenuto 2">
-                <a:extLst>
-                  <a:ext uri="{FF2B5EF4-FFF2-40B4-BE49-F238E27FC236}">
-                    <a16:creationId xmlns:a16="http://schemas.microsoft.com/office/drawing/2014/main" id="{5C2B32F9-9F92-B599-AEEC-7BA9C68435AE}"/>
-                  </a:ext>
-                </a:extLst>
-              </p:cNvPr>
-              <p:cNvSpPr>
-                <a:spLocks noGrp="1" noRot="1" noChangeAspect="1" noMove="1" noResize="1" noEditPoints="1" noAdjustHandles="1" noChangeArrowheads="1" noChangeShapeType="1" noTextEdit="1"/>
-              </p:cNvSpPr>
-              <p:nvPr>
-                <p:ph idx="1"/>
-              </p:nvPr>
-            </p:nvSpPr>
-            <p:spPr>
-              <a:xfrm>
-                <a:off x="838200" y="1401288"/>
-                <a:ext cx="10515600" cy="4776227"/>
-              </a:xfrm>
-              <a:blipFill>
-                <a:blip r:embed="rId2"/>
-                <a:stretch>
-                  <a:fillRect l="-1043" t="-2299"/>
-                </a:stretch>
-              </a:blipFill>
-            </p:spPr>
-            <p:txBody>
-              <a:bodyPr/>
-              <a:lstStyle/>
-              <a:p>
-                <a:r>
-                  <a:rPr lang="it-IT">
-                    <a:noFill/>
-                  </a:rPr>
-                  <a:t> </a:t>
-                </a:r>
-              </a:p>
-            </p:txBody>
-          </p:sp>
-        </mc:Fallback>
-      </mc:AlternateContent>
-      <p:sp>
-        <p:nvSpPr>
-          <p:cNvPr id="4" name="Segnaposto data 3">
-            <a:extLst>
-              <a:ext uri="{FF2B5EF4-FFF2-40B4-BE49-F238E27FC236}">
-                <a16:creationId xmlns:a16="http://schemas.microsoft.com/office/drawing/2014/main" id="{0E28507E-CC96-AB86-90AB-2AE984CE5C99}"/>
-              </a:ext>
-            </a:extLst>
-          </p:cNvPr>
-          <p:cNvSpPr>
-            <a:spLocks noGrp="1"/>
-          </p:cNvSpPr>
-          <p:nvPr>
-            <p:ph type="dt" sz="half" idx="10"/>
-          </p:nvPr>
-        </p:nvSpPr>
-        <p:spPr>
-          <a:xfrm>
-            <a:off x="838200" y="6356349"/>
-            <a:ext cx="2743200" cy="432000"/>
-          </a:xfrm>
-        </p:spPr>
-        <p:txBody>
-          <a:bodyPr/>
-          <a:lstStyle/>
-          <a:p>
-            <a:r>
-              <a:rPr lang="it-IT" sz="1500" b="1" dirty="0">
-                <a:solidFill>
-                  <a:srgbClr val="002060"/>
-                </a:solidFill>
-              </a:rPr>
-              <a:t>July 2026</a:t>
-            </a:r>
-          </a:p>
-        </p:txBody>
-      </p:sp>
-      <p:sp>
-        <p:nvSpPr>
-          <p:cNvPr id="5" name="Segnaposto piè di pagina 4">
-            <a:extLst>
-              <a:ext uri="{FF2B5EF4-FFF2-40B4-BE49-F238E27FC236}">
-                <a16:creationId xmlns:a16="http://schemas.microsoft.com/office/drawing/2014/main" id="{FB9D37D8-8F71-6DC7-FB67-7A7BB6AA6372}"/>
-              </a:ext>
-            </a:extLst>
-          </p:cNvPr>
-          <p:cNvSpPr>
-            <a:spLocks noGrp="1"/>
-          </p:cNvSpPr>
-          <p:nvPr>
-            <p:ph type="ftr" sz="quarter" idx="11"/>
-          </p:nvPr>
-        </p:nvSpPr>
-        <p:spPr>
-          <a:xfrm>
-            <a:off x="0" y="6356349"/>
-            <a:ext cx="12192000" cy="432000"/>
-          </a:xfrm>
-        </p:spPr>
-        <p:txBody>
-          <a:bodyPr/>
-          <a:lstStyle/>
-          <a:p>
-            <a:r>
-              <a:rPr lang="it-IT" sz="1500" b="1" dirty="0">
-                <a:solidFill>
-                  <a:srgbClr val="002060"/>
-                </a:solidFill>
-              </a:rPr>
-              <a:t>Anna Sofia Moro</a:t>
-            </a:r>
-          </a:p>
-        </p:txBody>
-      </p:sp>
-      <p:sp>
-        <p:nvSpPr>
-          <p:cNvPr id="6" name="Segnaposto numero diapositiva 5">
-            <a:extLst>
-              <a:ext uri="{FF2B5EF4-FFF2-40B4-BE49-F238E27FC236}">
-                <a16:creationId xmlns:a16="http://schemas.microsoft.com/office/drawing/2014/main" id="{91A46736-6465-2043-D9E8-AB521804FCCE}"/>
+                <a16:creationId xmlns:a16="http://schemas.microsoft.com/office/drawing/2014/main" id="{1FF23DC4-C8C1-3A3D-8308-E545C76B853A}"/>
               </a:ext>
             </a:extLst>
           </p:cNvPr>
@@ -6868,7 +6844,7 @@
     </p:spTree>
     <p:extLst>
       <p:ext uri="{BB962C8B-B14F-4D97-AF65-F5344CB8AC3E}">
-        <p14:creationId xmlns:p14="http://schemas.microsoft.com/office/powerpoint/2010/main" val="1820323341"/>
+        <p14:creationId xmlns:p14="http://schemas.microsoft.com/office/powerpoint/2010/main" val="2228727669"/>
       </p:ext>
     </p:extLst>
   </p:cSld>
@@ -6977,6 +6953,69 @@
           </a:bodyPr>
           <a:lstStyle/>
           <a:p>
+            <a:r>
+              <a:rPr lang="it-IT" sz="2500" dirty="0" err="1"/>
+              <a:t>If</a:t>
+            </a:r>
+            <a:r>
+              <a:rPr lang="it-IT" sz="2500" dirty="0"/>
+              <a:t> I </a:t>
+            </a:r>
+            <a:r>
+              <a:rPr lang="it-IT" sz="2500" dirty="0" err="1"/>
+              <a:t>keep</a:t>
+            </a:r>
+            <a:r>
+              <a:rPr lang="it-IT" sz="2500" dirty="0"/>
+              <a:t> the second-</a:t>
+            </a:r>
+            <a:r>
+              <a:rPr lang="it-IT" sz="2500" dirty="0" err="1"/>
+              <a:t>order</a:t>
+            </a:r>
+            <a:r>
+              <a:rPr lang="it-IT" sz="2500" dirty="0"/>
+              <a:t> </a:t>
+            </a:r>
+            <a:r>
+              <a:rPr lang="it-IT" sz="2500" dirty="0" err="1"/>
+              <a:t>corrections</a:t>
+            </a:r>
+            <a:r>
+              <a:rPr lang="it-IT" sz="2500" dirty="0"/>
+              <a:t>:</a:t>
+            </a:r>
+            <a:endParaRPr lang="it-IT" sz="2400" dirty="0"/>
+          </a:p>
+          <a:p>
+            <a:endParaRPr lang="it-IT" sz="2000" dirty="0"/>
+          </a:p>
+          <a:p>
+            <a:endParaRPr lang="it-IT" sz="2000" dirty="0"/>
+          </a:p>
+          <a:p>
+            <a:endParaRPr lang="it-IT" sz="2000" dirty="0"/>
+          </a:p>
+          <a:p>
+            <a:endParaRPr lang="it-IT" sz="2000" dirty="0"/>
+          </a:p>
+          <a:p>
+            <a:endParaRPr lang="it-IT" sz="2000" dirty="0"/>
+          </a:p>
+          <a:p>
+            <a:endParaRPr lang="it-IT" sz="2500" dirty="0"/>
+          </a:p>
+          <a:p>
+            <a:r>
+              <a:rPr lang="it-IT" sz="2500" dirty="0" err="1"/>
+              <a:t>If</a:t>
+            </a:r>
+            <a:r>
+              <a:rPr lang="it-IT" sz="2500" dirty="0"/>
+              <a:t> I do not:</a:t>
+            </a:r>
+          </a:p>
+          <a:p>
             <a:endParaRPr lang="it-IT" sz="2500" dirty="0"/>
           </a:p>
         </p:txBody>
@@ -7094,6 +7133,246 @@
                 <a:srgbClr val="002060"/>
               </a:solidFill>
             </a:endParaRPr>
+          </a:p>
+        </p:txBody>
+      </p:sp>
+      <p:pic>
+        <p:nvPicPr>
+          <p:cNvPr id="8" name="Immagine 7">
+            <a:extLst>
+              <a:ext uri="{FF2B5EF4-FFF2-40B4-BE49-F238E27FC236}">
+                <a16:creationId xmlns:a16="http://schemas.microsoft.com/office/drawing/2014/main" id="{E039DBF4-755C-A609-11E8-605A1238D5E2}"/>
+              </a:ext>
+            </a:extLst>
+          </p:cNvPr>
+          <p:cNvPicPr>
+            <a:picLocks noChangeAspect="1"/>
+          </p:cNvPicPr>
+          <p:nvPr/>
+        </p:nvPicPr>
+        <p:blipFill>
+          <a:blip r:embed="rId3">
+            <a:extLst>
+              <a:ext uri="{28A0092B-C50C-407E-A947-70E740481C1C}">
+                <a14:useLocalDpi xmlns:a14="http://schemas.microsoft.com/office/drawing/2010/main" val="0"/>
+              </a:ext>
+            </a:extLst>
+          </a:blip>
+          <a:stretch>
+            <a:fillRect/>
+          </a:stretch>
+        </p:blipFill>
+        <p:spPr>
+          <a:xfrm>
+            <a:off x="282653" y="1756093"/>
+            <a:ext cx="3600000" cy="2575940"/>
+          </a:xfrm>
+          <a:prstGeom prst="rect">
+            <a:avLst/>
+          </a:prstGeom>
+        </p:spPr>
+      </p:pic>
+      <p:pic>
+        <p:nvPicPr>
+          <p:cNvPr id="10" name="Immagine 9">
+            <a:extLst>
+              <a:ext uri="{FF2B5EF4-FFF2-40B4-BE49-F238E27FC236}">
+                <a16:creationId xmlns:a16="http://schemas.microsoft.com/office/drawing/2014/main" id="{44C95204-F1CD-D63C-C469-51744C8144D8}"/>
+              </a:ext>
+            </a:extLst>
+          </p:cNvPr>
+          <p:cNvPicPr>
+            <a:picLocks noChangeAspect="1"/>
+          </p:cNvPicPr>
+          <p:nvPr/>
+        </p:nvPicPr>
+        <p:blipFill>
+          <a:blip r:embed="rId4">
+            <a:extLst>
+              <a:ext uri="{28A0092B-C50C-407E-A947-70E740481C1C}">
+                <a14:useLocalDpi xmlns:a14="http://schemas.microsoft.com/office/drawing/2010/main" val="0"/>
+              </a:ext>
+            </a:extLst>
+          </a:blip>
+          <a:stretch>
+            <a:fillRect/>
+          </a:stretch>
+        </p:blipFill>
+        <p:spPr>
+          <a:xfrm>
+            <a:off x="4359653" y="1756093"/>
+            <a:ext cx="3600000" cy="2575940"/>
+          </a:xfrm>
+          <a:prstGeom prst="rect">
+            <a:avLst/>
+          </a:prstGeom>
+        </p:spPr>
+      </p:pic>
+      <p:pic>
+        <p:nvPicPr>
+          <p:cNvPr id="12" name="Immagine 11">
+            <a:extLst>
+              <a:ext uri="{FF2B5EF4-FFF2-40B4-BE49-F238E27FC236}">
+                <a16:creationId xmlns:a16="http://schemas.microsoft.com/office/drawing/2014/main" id="{6E182947-0044-AA46-C176-18A656083C93}"/>
+              </a:ext>
+            </a:extLst>
+          </p:cNvPr>
+          <p:cNvPicPr>
+            <a:picLocks noChangeAspect="1"/>
+          </p:cNvPicPr>
+          <p:nvPr/>
+        </p:nvPicPr>
+        <p:blipFill>
+          <a:blip r:embed="rId5">
+            <a:extLst>
+              <a:ext uri="{28A0092B-C50C-407E-A947-70E740481C1C}">
+                <a14:useLocalDpi xmlns:a14="http://schemas.microsoft.com/office/drawing/2010/main" val="0"/>
+              </a:ext>
+            </a:extLst>
+          </a:blip>
+          <a:stretch>
+            <a:fillRect/>
+          </a:stretch>
+        </p:blipFill>
+        <p:spPr>
+          <a:xfrm>
+            <a:off x="8436653" y="1756093"/>
+            <a:ext cx="3600000" cy="2575940"/>
+          </a:xfrm>
+          <a:prstGeom prst="rect">
+            <a:avLst/>
+          </a:prstGeom>
+        </p:spPr>
+      </p:pic>
+      <p:sp>
+        <p:nvSpPr>
+          <p:cNvPr id="14" name="CasellaDiTesto 13">
+            <a:extLst>
+              <a:ext uri="{FF2B5EF4-FFF2-40B4-BE49-F238E27FC236}">
+                <a16:creationId xmlns:a16="http://schemas.microsoft.com/office/drawing/2014/main" id="{02C7F6AD-2DC8-F3CC-05D2-B92254D0CCB0}"/>
+              </a:ext>
+            </a:extLst>
+          </p:cNvPr>
+          <p:cNvSpPr txBox="1">
+            <a:spLocks noChangeAspect="1"/>
+          </p:cNvSpPr>
+          <p:nvPr/>
+        </p:nvSpPr>
+        <p:spPr>
+          <a:xfrm>
+            <a:off x="2928532" y="2542313"/>
+            <a:ext cx="540000" cy="540000"/>
+          </a:xfrm>
+          <a:prstGeom prst="ellipse">
+            <a:avLst/>
+          </a:prstGeom>
+          <a:solidFill>
+            <a:srgbClr val="FFC000"/>
+          </a:solidFill>
+        </p:spPr>
+        <p:txBody>
+          <a:bodyPr wrap="square" rtlCol="0">
+            <a:spAutoFit/>
+          </a:bodyPr>
+          <a:lstStyle/>
+          <a:p>
+            <a:pPr algn="ctr"/>
+            <a:r>
+              <a:rPr lang="it-IT" b="1" dirty="0">
+                <a:solidFill>
+                  <a:schemeClr val="bg1"/>
+                </a:solidFill>
+              </a:rPr>
+              <a:t>1</a:t>
+            </a:r>
+          </a:p>
+        </p:txBody>
+      </p:sp>
+      <p:sp>
+        <p:nvSpPr>
+          <p:cNvPr id="16" name="CasellaDiTesto 15">
+            <a:extLst>
+              <a:ext uri="{FF2B5EF4-FFF2-40B4-BE49-F238E27FC236}">
+                <a16:creationId xmlns:a16="http://schemas.microsoft.com/office/drawing/2014/main" id="{19EEE5F4-1237-8DB5-4970-4380998802FD}"/>
+              </a:ext>
+            </a:extLst>
+          </p:cNvPr>
+          <p:cNvSpPr txBox="1">
+            <a:spLocks noChangeAspect="1"/>
+          </p:cNvSpPr>
+          <p:nvPr/>
+        </p:nvSpPr>
+        <p:spPr>
+          <a:xfrm>
+            <a:off x="7005532" y="2542313"/>
+            <a:ext cx="540000" cy="540000"/>
+          </a:xfrm>
+          <a:prstGeom prst="ellipse">
+            <a:avLst/>
+          </a:prstGeom>
+          <a:solidFill>
+            <a:srgbClr val="FFC000"/>
+          </a:solidFill>
+        </p:spPr>
+        <p:txBody>
+          <a:bodyPr wrap="square" rtlCol="0">
+            <a:spAutoFit/>
+          </a:bodyPr>
+          <a:lstStyle/>
+          <a:p>
+            <a:pPr algn="ctr"/>
+            <a:r>
+              <a:rPr lang="it-IT" b="1" dirty="0">
+                <a:solidFill>
+                  <a:schemeClr val="bg1"/>
+                </a:solidFill>
+              </a:rPr>
+              <a:t>2</a:t>
+            </a:r>
+          </a:p>
+        </p:txBody>
+      </p:sp>
+      <p:sp>
+        <p:nvSpPr>
+          <p:cNvPr id="18" name="CasellaDiTesto 17">
+            <a:extLst>
+              <a:ext uri="{FF2B5EF4-FFF2-40B4-BE49-F238E27FC236}">
+                <a16:creationId xmlns:a16="http://schemas.microsoft.com/office/drawing/2014/main" id="{7CCC6664-CC29-FE03-25C2-1D9A3CF069DD}"/>
+              </a:ext>
+            </a:extLst>
+          </p:cNvPr>
+          <p:cNvSpPr txBox="1">
+            <a:spLocks noChangeAspect="1"/>
+          </p:cNvSpPr>
+          <p:nvPr/>
+        </p:nvSpPr>
+        <p:spPr>
+          <a:xfrm>
+            <a:off x="11083800" y="2542313"/>
+            <a:ext cx="540000" cy="540000"/>
+          </a:xfrm>
+          <a:prstGeom prst="ellipse">
+            <a:avLst/>
+          </a:prstGeom>
+          <a:solidFill>
+            <a:srgbClr val="FFC000"/>
+          </a:solidFill>
+        </p:spPr>
+        <p:txBody>
+          <a:bodyPr wrap="square" rtlCol="0">
+            <a:spAutoFit/>
+          </a:bodyPr>
+          <a:lstStyle/>
+          <a:p>
+            <a:pPr algn="ctr"/>
+            <a:r>
+              <a:rPr lang="it-IT" b="1" dirty="0">
+                <a:solidFill>
+                  <a:schemeClr val="bg1"/>
+                </a:solidFill>
+              </a:rPr>
+              <a:t>3</a:t>
+            </a:r>
           </a:p>
         </p:txBody>
       </p:sp>

--- a/slides/week3.pptx
+++ b/slides/week3.pptx
@@ -5,7 +5,7 @@
     <p:sldMasterId id="2147483648" r:id="rId1"/>
   </p:sldMasterIdLst>
   <p:notesMasterIdLst>
-    <p:notesMasterId r:id="rId9"/>
+    <p:notesMasterId r:id="rId10"/>
   </p:notesMasterIdLst>
   <p:sldIdLst>
     <p:sldId id="256" r:id="rId2"/>
@@ -14,7 +14,8 @@
     <p:sldId id="279" r:id="rId5"/>
     <p:sldId id="282" r:id="rId6"/>
     <p:sldId id="276" r:id="rId7"/>
-    <p:sldId id="280" r:id="rId8"/>
+    <p:sldId id="284" r:id="rId8"/>
+    <p:sldId id="280" r:id="rId9"/>
   </p:sldIdLst>
   <p:sldSz cx="12192000" cy="6858000"/>
   <p:notesSz cx="6858000" cy="9144000"/>
@@ -586,6 +587,114 @@
         <p:cNvPr id="1" name="">
           <a:extLst>
             <a:ext uri="{FF2B5EF4-FFF2-40B4-BE49-F238E27FC236}">
+              <a16:creationId xmlns:a16="http://schemas.microsoft.com/office/drawing/2014/main" id="{E51224B2-0198-2A83-8D46-3B22DDB10825}"/>
+            </a:ext>
+          </a:extLst>
+        </p:cNvPr>
+        <p:cNvGrpSpPr/>
+        <p:nvPr/>
+      </p:nvGrpSpPr>
+      <p:grpSpPr>
+        <a:xfrm>
+          <a:off x="0" y="0"/>
+          <a:ext cx="0" cy="0"/>
+          <a:chOff x="0" y="0"/>
+          <a:chExt cx="0" cy="0"/>
+        </a:xfrm>
+      </p:grpSpPr>
+      <p:sp>
+        <p:nvSpPr>
+          <p:cNvPr id="2" name="Segnaposto immagine diapositiva 1">
+            <a:extLst>
+              <a:ext uri="{FF2B5EF4-FFF2-40B4-BE49-F238E27FC236}">
+                <a16:creationId xmlns:a16="http://schemas.microsoft.com/office/drawing/2014/main" id="{9CAE86F6-7ECD-7286-4EB5-33A398AAFCB2}"/>
+              </a:ext>
+            </a:extLst>
+          </p:cNvPr>
+          <p:cNvSpPr>
+            <a:spLocks noGrp="1" noRot="1" noChangeAspect="1"/>
+          </p:cNvSpPr>
+          <p:nvPr>
+            <p:ph type="sldImg"/>
+          </p:nvPr>
+        </p:nvSpPr>
+        <p:spPr/>
+      </p:sp>
+      <p:sp>
+        <p:nvSpPr>
+          <p:cNvPr id="3" name="Segnaposto note 2">
+            <a:extLst>
+              <a:ext uri="{FF2B5EF4-FFF2-40B4-BE49-F238E27FC236}">
+                <a16:creationId xmlns:a16="http://schemas.microsoft.com/office/drawing/2014/main" id="{E51B3197-904C-219F-3B11-0F50FEF5E467}"/>
+              </a:ext>
+            </a:extLst>
+          </p:cNvPr>
+          <p:cNvSpPr>
+            <a:spLocks noGrp="1"/>
+          </p:cNvSpPr>
+          <p:nvPr>
+            <p:ph type="body" idx="1"/>
+          </p:nvPr>
+        </p:nvSpPr>
+        <p:spPr/>
+        <p:txBody>
+          <a:bodyPr/>
+          <a:lstStyle/>
+          <a:p>
+            <a:endParaRPr lang="it-IT" dirty="0"/>
+          </a:p>
+        </p:txBody>
+      </p:sp>
+      <p:sp>
+        <p:nvSpPr>
+          <p:cNvPr id="4" name="Segnaposto numero diapositiva 3">
+            <a:extLst>
+              <a:ext uri="{FF2B5EF4-FFF2-40B4-BE49-F238E27FC236}">
+                <a16:creationId xmlns:a16="http://schemas.microsoft.com/office/drawing/2014/main" id="{EA398D06-BD5E-3F31-FF24-25D8FB1A0DBC}"/>
+              </a:ext>
+            </a:extLst>
+          </p:cNvPr>
+          <p:cNvSpPr>
+            <a:spLocks noGrp="1"/>
+          </p:cNvSpPr>
+          <p:nvPr>
+            <p:ph type="sldNum" sz="quarter" idx="5"/>
+          </p:nvPr>
+        </p:nvSpPr>
+        <p:spPr/>
+        <p:txBody>
+          <a:bodyPr/>
+          <a:lstStyle/>
+          <a:p>
+            <a:fld id="{C205392F-55BF-4B8E-AF01-45F81C88C286}" type="slidenum">
+              <a:rPr lang="it-IT" smtClean="0"/>
+              <a:t>7</a:t>
+            </a:fld>
+            <a:endParaRPr lang="it-IT"/>
+          </a:p>
+        </p:txBody>
+      </p:sp>
+    </p:spTree>
+    <p:extLst>
+      <p:ext uri="{BB962C8B-B14F-4D97-AF65-F5344CB8AC3E}">
+        <p14:creationId xmlns:p14="http://schemas.microsoft.com/office/powerpoint/2010/main" val="1477564635"/>
+      </p:ext>
+    </p:extLst>
+  </p:cSld>
+  <p:clrMapOvr>
+    <a:masterClrMapping/>
+  </p:clrMapOvr>
+</p:notes>
+</file>
+
+<file path=ppt/notesSlides/notesSlide3.xml><?xml version="1.0" encoding="utf-8"?>
+<p:notes xmlns:a="http://schemas.openxmlformats.org/drawingml/2006/main" xmlns:r="http://schemas.openxmlformats.org/officeDocument/2006/relationships" xmlns:p="http://schemas.openxmlformats.org/presentationml/2006/main">
+  <p:cSld>
+    <p:spTree>
+      <p:nvGrpSpPr>
+        <p:cNvPr id="1" name="">
+          <a:extLst>
+            <a:ext uri="{FF2B5EF4-FFF2-40B4-BE49-F238E27FC236}">
               <a16:creationId xmlns:a16="http://schemas.microsoft.com/office/drawing/2014/main" id="{344D8B1B-DDC8-31BE-2F18-22F64C423B4D}"/>
             </a:ext>
           </a:extLst>
@@ -667,7 +776,7 @@
           <a:p>
             <a:fld id="{C205392F-55BF-4B8E-AF01-45F81C88C286}" type="slidenum">
               <a:rPr lang="it-IT" smtClean="0"/>
-              <a:t>7</a:t>
+              <a:t>8</a:t>
             </a:fld>
             <a:endParaRPr lang="it-IT"/>
           </a:p>
@@ -6920,7 +7029,7 @@
                   <a:schemeClr val="bg1"/>
                 </a:solidFill>
               </a:rPr>
-              <a:t>…</a:t>
+              <a:t>EFFICIENCY COMPUTATION</a:t>
             </a:r>
           </a:p>
         </p:txBody>
@@ -6954,69 +7063,61 @@
           <a:lstStyle/>
           <a:p>
             <a:r>
-              <a:rPr lang="it-IT" sz="2500" dirty="0" err="1"/>
+              <a:rPr lang="it-IT" dirty="0" err="1"/>
               <a:t>If</a:t>
             </a:r>
             <a:r>
-              <a:rPr lang="it-IT" sz="2500" dirty="0"/>
+              <a:rPr lang="it-IT" dirty="0"/>
               <a:t> I </a:t>
             </a:r>
             <a:r>
-              <a:rPr lang="it-IT" sz="2500" dirty="0" err="1"/>
+              <a:rPr lang="it-IT" dirty="0" err="1"/>
               <a:t>keep</a:t>
             </a:r>
             <a:r>
-              <a:rPr lang="it-IT" sz="2500" dirty="0"/>
+              <a:rPr lang="it-IT" dirty="0"/>
               <a:t> the second-</a:t>
             </a:r>
             <a:r>
-              <a:rPr lang="it-IT" sz="2500" dirty="0" err="1"/>
+              <a:rPr lang="it-IT" dirty="0" err="1"/>
               <a:t>order</a:t>
             </a:r>
             <a:r>
-              <a:rPr lang="it-IT" sz="2500" dirty="0"/>
+              <a:rPr lang="it-IT" dirty="0"/>
               <a:t> </a:t>
             </a:r>
             <a:r>
-              <a:rPr lang="it-IT" sz="2500" dirty="0" err="1"/>
+              <a:rPr lang="it-IT" dirty="0" err="1"/>
               <a:t>corrections</a:t>
             </a:r>
             <a:r>
-              <a:rPr lang="it-IT" sz="2500" dirty="0"/>
+              <a:rPr lang="it-IT" dirty="0"/>
               <a:t>:</a:t>
             </a:r>
-            <a:endParaRPr lang="it-IT" sz="2400" dirty="0"/>
-          </a:p>
-          <a:p>
-            <a:endParaRPr lang="it-IT" sz="2000" dirty="0"/>
-          </a:p>
-          <a:p>
-            <a:endParaRPr lang="it-IT" sz="2000" dirty="0"/>
-          </a:p>
-          <a:p>
-            <a:endParaRPr lang="it-IT" sz="2000" dirty="0"/>
-          </a:p>
-          <a:p>
-            <a:endParaRPr lang="it-IT" sz="2000" dirty="0"/>
-          </a:p>
-          <a:p>
-            <a:endParaRPr lang="it-IT" sz="2000" dirty="0"/>
-          </a:p>
-          <a:p>
-            <a:endParaRPr lang="it-IT" sz="2500" dirty="0"/>
-          </a:p>
-          <a:p>
-            <a:r>
-              <a:rPr lang="it-IT" sz="2500" dirty="0" err="1"/>
-              <a:t>If</a:t>
-            </a:r>
-            <a:r>
-              <a:rPr lang="it-IT" sz="2500" dirty="0"/>
-              <a:t> I do not:</a:t>
-            </a:r>
-          </a:p>
-          <a:p>
-            <a:endParaRPr lang="it-IT" sz="2500" dirty="0"/>
+          </a:p>
+          <a:p>
+            <a:endParaRPr lang="it-IT" dirty="0"/>
+          </a:p>
+          <a:p>
+            <a:endParaRPr lang="it-IT" dirty="0"/>
+          </a:p>
+          <a:p>
+            <a:endParaRPr lang="it-IT" dirty="0"/>
+          </a:p>
+          <a:p>
+            <a:endParaRPr lang="it-IT" dirty="0"/>
+          </a:p>
+          <a:p>
+            <a:endParaRPr lang="it-IT" dirty="0"/>
+          </a:p>
+          <a:p>
+            <a:endParaRPr lang="it-IT" dirty="0"/>
+          </a:p>
+          <a:p>
+            <a:pPr marL="0" indent="0">
+              <a:buNone/>
+            </a:pPr>
+            <a:endParaRPr lang="it-IT" dirty="0"/>
           </a:p>
         </p:txBody>
       </p:sp>
@@ -7164,7 +7265,7 @@
         </p:blipFill>
         <p:spPr>
           <a:xfrm>
-            <a:off x="282653" y="1756093"/>
+            <a:off x="282653" y="1979385"/>
             <a:ext cx="3600000" cy="2575940"/>
           </a:xfrm>
           <a:prstGeom prst="rect">
@@ -7200,7 +7301,7 @@
         </p:blipFill>
         <p:spPr>
           <a:xfrm>
-            <a:off x="4359653" y="1756093"/>
+            <a:off x="4359653" y="1979385"/>
             <a:ext cx="3600000" cy="2575940"/>
           </a:xfrm>
           <a:prstGeom prst="rect">
@@ -7236,7 +7337,7 @@
         </p:blipFill>
         <p:spPr>
           <a:xfrm>
-            <a:off x="8436653" y="1756093"/>
+            <a:off x="8436653" y="1979385"/>
             <a:ext cx="3600000" cy="2575940"/>
           </a:xfrm>
           <a:prstGeom prst="rect">
@@ -7260,7 +7361,7 @@
         </p:nvSpPr>
         <p:spPr>
           <a:xfrm>
-            <a:off x="2928532" y="2542313"/>
+            <a:off x="2928532" y="2733706"/>
             <a:ext cx="540000" cy="540000"/>
           </a:xfrm>
           <a:prstGeom prst="ellipse">
@@ -7304,7 +7405,7 @@
         </p:nvSpPr>
         <p:spPr>
           <a:xfrm>
-            <a:off x="7005532" y="2542313"/>
+            <a:off x="7005532" y="2733706"/>
             <a:ext cx="540000" cy="540000"/>
           </a:xfrm>
           <a:prstGeom prst="ellipse">
@@ -7348,7 +7449,7 @@
         </p:nvSpPr>
         <p:spPr>
           <a:xfrm>
-            <a:off x="11083800" y="2542313"/>
+            <a:off x="11083800" y="2733706"/>
             <a:ext cx="540000" cy="540000"/>
           </a:xfrm>
           <a:prstGeom prst="ellipse">
@@ -7376,6 +7477,700 @@
           </a:p>
         </p:txBody>
       </p:sp>
+      <mc:AlternateContent xmlns:mc="http://schemas.openxmlformats.org/markup-compatibility/2006">
+        <mc:Choice xmlns:a14="http://schemas.microsoft.com/office/drawing/2010/main" Requires="a14">
+          <p:sp>
+            <p:nvSpPr>
+              <p:cNvPr id="21" name="CasellaDiTesto 20">
+                <a:extLst>
+                  <a:ext uri="{FF2B5EF4-FFF2-40B4-BE49-F238E27FC236}">
+                    <a16:creationId xmlns:a16="http://schemas.microsoft.com/office/drawing/2014/main" id="{DD154CF2-3719-8AC5-5982-400145D4689D}"/>
+                  </a:ext>
+                </a:extLst>
+              </p:cNvPr>
+              <p:cNvSpPr txBox="1"/>
+              <p:nvPr/>
+            </p:nvSpPr>
+            <p:spPr>
+              <a:xfrm>
+                <a:off x="396647" y="4555325"/>
+                <a:ext cx="3184753" cy="987079"/>
+              </a:xfrm>
+              <a:prstGeom prst="roundRect">
+                <a:avLst/>
+              </a:prstGeom>
+              <a:ln>
+                <a:solidFill>
+                  <a:srgbClr val="FFC000"/>
+                </a:solidFill>
+              </a:ln>
+            </p:spPr>
+            <p:style>
+              <a:lnRef idx="2">
+                <a:schemeClr val="accent2"/>
+              </a:lnRef>
+              <a:fillRef idx="1">
+                <a:schemeClr val="lt1"/>
+              </a:fillRef>
+              <a:effectRef idx="0">
+                <a:schemeClr val="accent2"/>
+              </a:effectRef>
+              <a:fontRef idx="minor">
+                <a:schemeClr val="dk1"/>
+              </a:fontRef>
+            </p:style>
+            <p:txBody>
+              <a:bodyPr wrap="square" rtlCol="0">
+                <a:spAutoFit/>
+              </a:bodyPr>
+              <a:lstStyle/>
+              <a:p>
+                <a14:m>
+                  <m:oMathPara xmlns:m="http://schemas.openxmlformats.org/officeDocument/2006/math">
+                    <m:oMathParaPr>
+                      <m:jc m:val="centerGroup"/>
+                    </m:oMathParaPr>
+                    <m:oMath xmlns:m="http://schemas.openxmlformats.org/officeDocument/2006/math">
+                      <m:sSub>
+                        <m:sSubPr>
+                          <m:ctrlPr>
+                            <a:rPr lang="it-IT" sz="2500" b="0" i="1" smtClean="0">
+                              <a:latin typeface="Cambria Math" panose="02040503050406030204" pitchFamily="18" charset="0"/>
+                            </a:rPr>
+                          </m:ctrlPr>
+                        </m:sSubPr>
+                        <m:e>
+                          <m:r>
+                            <a:rPr lang="it-IT" sz="2500" b="0" i="1" smtClean="0">
+                              <a:latin typeface="Cambria Math" panose="02040503050406030204" pitchFamily="18" charset="0"/>
+                            </a:rPr>
+                            <m:t>𝜏</m:t>
+                          </m:r>
+                        </m:e>
+                        <m:sub>
+                          <m:r>
+                            <a:rPr lang="it-IT" sz="2500" b="0" i="1" smtClean="0">
+                              <a:latin typeface="Cambria Math" panose="02040503050406030204" pitchFamily="18" charset="0"/>
+                            </a:rPr>
+                            <m:t>𝑦</m:t>
+                          </m:r>
+                        </m:sub>
+                      </m:sSub>
+                      <m:r>
+                        <a:rPr lang="it-IT" sz="2500" b="0" i="1" smtClean="0">
+                          <a:latin typeface="Cambria Math" panose="02040503050406030204" pitchFamily="18" charset="0"/>
+                        </a:rPr>
+                        <m:t>=4. 11 </m:t>
+                      </m:r>
+                      <m:r>
+                        <a:rPr lang="it-IT" sz="2500" b="0" i="1" smtClean="0">
+                          <a:latin typeface="Cambria Math" panose="02040503050406030204" pitchFamily="18" charset="0"/>
+                        </a:rPr>
+                        <m:t>𝜇</m:t>
+                      </m:r>
+                      <m:r>
+                        <m:rPr>
+                          <m:sty m:val="p"/>
+                        </m:rPr>
+                        <a:rPr lang="it-IT" sz="2500" b="0" i="0" smtClean="0">
+                          <a:latin typeface="Cambria Math" panose="02040503050406030204" pitchFamily="18" charset="0"/>
+                        </a:rPr>
+                        <m:t>rad</m:t>
+                      </m:r>
+                      <m:r>
+                        <a:rPr lang="it-IT" sz="2500" b="0" i="0" smtClean="0">
+                          <a:latin typeface="Cambria Math" panose="02040503050406030204" pitchFamily="18" charset="0"/>
+                        </a:rPr>
+                        <m:t>/</m:t>
+                      </m:r>
+                      <m:r>
+                        <m:rPr>
+                          <m:sty m:val="p"/>
+                        </m:rPr>
+                        <a:rPr lang="it-IT" sz="2500" b="0" i="0" smtClean="0">
+                          <a:latin typeface="Cambria Math" panose="02040503050406030204" pitchFamily="18" charset="0"/>
+                        </a:rPr>
+                        <m:t>mm</m:t>
+                      </m:r>
+                    </m:oMath>
+                  </m:oMathPara>
+                </a14:m>
+                <a:endParaRPr lang="it-IT" sz="2500" dirty="0"/>
+              </a:p>
+              <a:p>
+                <a14:m>
+                  <m:oMathPara xmlns:m="http://schemas.openxmlformats.org/officeDocument/2006/math">
+                    <m:oMathParaPr>
+                      <m:jc m:val="centerGroup"/>
+                    </m:oMathParaPr>
+                    <m:oMath xmlns:m="http://schemas.openxmlformats.org/officeDocument/2006/math">
+                      <m:sSub>
+                        <m:sSubPr>
+                          <m:ctrlPr>
+                            <a:rPr lang="it-IT" sz="2500" b="0" i="1" smtClean="0">
+                              <a:latin typeface="Cambria Math" panose="02040503050406030204" pitchFamily="18" charset="0"/>
+                            </a:rPr>
+                          </m:ctrlPr>
+                        </m:sSubPr>
+                        <m:e>
+                          <m:r>
+                            <a:rPr lang="it-IT" sz="2500" b="0" i="1" smtClean="0">
+                              <a:latin typeface="Cambria Math" panose="02040503050406030204" pitchFamily="18" charset="0"/>
+                            </a:rPr>
+                            <m:t>𝜖</m:t>
+                          </m:r>
+                        </m:e>
+                        <m:sub>
+                          <m:r>
+                            <a:rPr lang="it-IT" sz="2500" b="0" i="1" smtClean="0">
+                              <a:latin typeface="Cambria Math" panose="02040503050406030204" pitchFamily="18" charset="0"/>
+                            </a:rPr>
+                            <m:t>𝑐h</m:t>
+                          </m:r>
+                        </m:sub>
+                      </m:sSub>
+                      <m:r>
+                        <a:rPr lang="it-IT" sz="2500" b="0" i="1" smtClean="0">
+                          <a:latin typeface="Cambria Math" panose="02040503050406030204" pitchFamily="18" charset="0"/>
+                        </a:rPr>
+                        <m:t>=18.9%</m:t>
+                      </m:r>
+                    </m:oMath>
+                  </m:oMathPara>
+                </a14:m>
+                <a:endParaRPr lang="it-IT" sz="2500" dirty="0"/>
+              </a:p>
+            </p:txBody>
+          </p:sp>
+        </mc:Choice>
+        <mc:Fallback>
+          <p:sp>
+            <p:nvSpPr>
+              <p:cNvPr id="21" name="CasellaDiTesto 20">
+                <a:extLst>
+                  <a:ext uri="{FF2B5EF4-FFF2-40B4-BE49-F238E27FC236}">
+                    <a16:creationId xmlns:a16="http://schemas.microsoft.com/office/drawing/2014/main" id="{DD154CF2-3719-8AC5-5982-400145D4689D}"/>
+                  </a:ext>
+                </a:extLst>
+              </p:cNvPr>
+              <p:cNvSpPr txBox="1">
+                <a:spLocks noRot="1" noChangeAspect="1" noMove="1" noResize="1" noEditPoints="1" noAdjustHandles="1" noChangeArrowheads="1" noChangeShapeType="1" noTextEdit="1"/>
+              </p:cNvSpPr>
+              <p:nvPr/>
+            </p:nvSpPr>
+            <p:spPr>
+              <a:xfrm>
+                <a:off x="396647" y="4555325"/>
+                <a:ext cx="3184753" cy="987079"/>
+              </a:xfrm>
+              <a:prstGeom prst="roundRect">
+                <a:avLst/>
+              </a:prstGeom>
+              <a:blipFill>
+                <a:blip r:embed="rId6"/>
+                <a:stretch>
+                  <a:fillRect/>
+                </a:stretch>
+              </a:blipFill>
+              <a:ln>
+                <a:solidFill>
+                  <a:srgbClr val="FFC000"/>
+                </a:solidFill>
+              </a:ln>
+            </p:spPr>
+            <p:txBody>
+              <a:bodyPr/>
+              <a:lstStyle/>
+              <a:p>
+                <a:r>
+                  <a:rPr lang="it-IT">
+                    <a:noFill/>
+                  </a:rPr>
+                  <a:t> </a:t>
+                </a:r>
+              </a:p>
+            </p:txBody>
+          </p:sp>
+        </mc:Fallback>
+      </mc:AlternateContent>
+      <mc:AlternateContent xmlns:mc="http://schemas.openxmlformats.org/markup-compatibility/2006">
+        <mc:Choice xmlns:a14="http://schemas.microsoft.com/office/drawing/2010/main" Requires="a14">
+          <p:sp>
+            <p:nvSpPr>
+              <p:cNvPr id="23" name="CasellaDiTesto 22">
+                <a:extLst>
+                  <a:ext uri="{FF2B5EF4-FFF2-40B4-BE49-F238E27FC236}">
+                    <a16:creationId xmlns:a16="http://schemas.microsoft.com/office/drawing/2014/main" id="{904F42E7-04C9-C4DB-086A-1AB99052C2E4}"/>
+                  </a:ext>
+                </a:extLst>
+              </p:cNvPr>
+              <p:cNvSpPr txBox="1"/>
+              <p:nvPr/>
+            </p:nvSpPr>
+            <p:spPr>
+              <a:xfrm>
+                <a:off x="4491365" y="4555324"/>
+                <a:ext cx="3184753" cy="987079"/>
+              </a:xfrm>
+              <a:prstGeom prst="roundRect">
+                <a:avLst/>
+              </a:prstGeom>
+              <a:ln>
+                <a:solidFill>
+                  <a:srgbClr val="FFC000"/>
+                </a:solidFill>
+              </a:ln>
+            </p:spPr>
+            <p:style>
+              <a:lnRef idx="2">
+                <a:schemeClr val="accent2"/>
+              </a:lnRef>
+              <a:fillRef idx="1">
+                <a:schemeClr val="lt1"/>
+              </a:fillRef>
+              <a:effectRef idx="0">
+                <a:schemeClr val="accent2"/>
+              </a:effectRef>
+              <a:fontRef idx="minor">
+                <a:schemeClr val="dk1"/>
+              </a:fontRef>
+            </p:style>
+            <p:txBody>
+              <a:bodyPr wrap="square" rtlCol="0">
+                <a:spAutoFit/>
+              </a:bodyPr>
+              <a:lstStyle/>
+              <a:p>
+                <a:pPr/>
+                <a14:m>
+                  <m:oMathPara xmlns:m="http://schemas.openxmlformats.org/officeDocument/2006/math">
+                    <m:oMathParaPr>
+                      <m:jc m:val="centerGroup"/>
+                    </m:oMathParaPr>
+                    <m:oMath xmlns:m="http://schemas.openxmlformats.org/officeDocument/2006/math">
+                      <m:sSub>
+                        <m:sSubPr>
+                          <m:ctrlPr>
+                            <a:rPr lang="it-IT" sz="2500" b="0" i="1" smtClean="0">
+                              <a:latin typeface="Cambria Math" panose="02040503050406030204" pitchFamily="18" charset="0"/>
+                            </a:rPr>
+                          </m:ctrlPr>
+                        </m:sSubPr>
+                        <m:e>
+                          <m:r>
+                            <a:rPr lang="it-IT" sz="2500" b="0" i="1" smtClean="0">
+                              <a:latin typeface="Cambria Math" panose="02040503050406030204" pitchFamily="18" charset="0"/>
+                            </a:rPr>
+                            <m:t>𝜏</m:t>
+                          </m:r>
+                        </m:e>
+                        <m:sub>
+                          <m:r>
+                            <a:rPr lang="it-IT" sz="2500" b="0" i="1" smtClean="0">
+                              <a:latin typeface="Cambria Math" panose="02040503050406030204" pitchFamily="18" charset="0"/>
+                            </a:rPr>
+                            <m:t>𝑦</m:t>
+                          </m:r>
+                        </m:sub>
+                      </m:sSub>
+                      <m:r>
+                        <a:rPr lang="it-IT" sz="2500" b="0" i="1" smtClean="0">
+                          <a:latin typeface="Cambria Math" panose="02040503050406030204" pitchFamily="18" charset="0"/>
+                        </a:rPr>
+                        <m:t>=4.</m:t>
+                      </m:r>
+                      <m:r>
+                        <a:rPr lang="it-IT" sz="2500" b="0" i="1" smtClean="0">
+                          <a:latin typeface="Cambria Math" panose="02040503050406030204" pitchFamily="18" charset="0"/>
+                        </a:rPr>
+                        <m:t>13</m:t>
+                      </m:r>
+                      <m:r>
+                        <a:rPr lang="it-IT" sz="2500" b="0" i="1" smtClean="0">
+                          <a:latin typeface="Cambria Math" panose="02040503050406030204" pitchFamily="18" charset="0"/>
+                        </a:rPr>
+                        <m:t> </m:t>
+                      </m:r>
+                      <m:r>
+                        <a:rPr lang="it-IT" sz="2500" b="0" i="1" smtClean="0">
+                          <a:latin typeface="Cambria Math" panose="02040503050406030204" pitchFamily="18" charset="0"/>
+                        </a:rPr>
+                        <m:t>𝜇</m:t>
+                      </m:r>
+                      <m:r>
+                        <m:rPr>
+                          <m:sty m:val="p"/>
+                        </m:rPr>
+                        <a:rPr lang="it-IT" sz="2500" b="0" i="0" smtClean="0">
+                          <a:latin typeface="Cambria Math" panose="02040503050406030204" pitchFamily="18" charset="0"/>
+                        </a:rPr>
+                        <m:t>rad</m:t>
+                      </m:r>
+                      <m:r>
+                        <a:rPr lang="it-IT" sz="2500" b="0" i="0" smtClean="0">
+                          <a:latin typeface="Cambria Math" panose="02040503050406030204" pitchFamily="18" charset="0"/>
+                        </a:rPr>
+                        <m:t>/</m:t>
+                      </m:r>
+                      <m:r>
+                        <m:rPr>
+                          <m:sty m:val="p"/>
+                        </m:rPr>
+                        <a:rPr lang="it-IT" sz="2500" b="0" i="0" smtClean="0">
+                          <a:latin typeface="Cambria Math" panose="02040503050406030204" pitchFamily="18" charset="0"/>
+                        </a:rPr>
+                        <m:t>mm</m:t>
+                      </m:r>
+                    </m:oMath>
+                  </m:oMathPara>
+                </a14:m>
+                <a:endParaRPr lang="it-IT" sz="2500" dirty="0"/>
+              </a:p>
+              <a:p>
+                <a:pPr/>
+                <a14:m>
+                  <m:oMathPara xmlns:m="http://schemas.openxmlformats.org/officeDocument/2006/math">
+                    <m:oMathParaPr>
+                      <m:jc m:val="centerGroup"/>
+                    </m:oMathParaPr>
+                    <m:oMath xmlns:m="http://schemas.openxmlformats.org/officeDocument/2006/math">
+                      <m:sSub>
+                        <m:sSubPr>
+                          <m:ctrlPr>
+                            <a:rPr lang="it-IT" sz="2500" b="0" i="1" smtClean="0">
+                              <a:latin typeface="Cambria Math" panose="02040503050406030204" pitchFamily="18" charset="0"/>
+                            </a:rPr>
+                          </m:ctrlPr>
+                        </m:sSubPr>
+                        <m:e>
+                          <m:r>
+                            <a:rPr lang="it-IT" sz="2500" b="0" i="1" smtClean="0">
+                              <a:latin typeface="Cambria Math" panose="02040503050406030204" pitchFamily="18" charset="0"/>
+                            </a:rPr>
+                            <m:t>𝜖</m:t>
+                          </m:r>
+                        </m:e>
+                        <m:sub>
+                          <m:r>
+                            <a:rPr lang="it-IT" sz="2500" b="0" i="1" smtClean="0">
+                              <a:latin typeface="Cambria Math" panose="02040503050406030204" pitchFamily="18" charset="0"/>
+                            </a:rPr>
+                            <m:t>𝑐h</m:t>
+                          </m:r>
+                        </m:sub>
+                      </m:sSub>
+                      <m:r>
+                        <a:rPr lang="it-IT" sz="2500" b="0" i="1" smtClean="0">
+                          <a:latin typeface="Cambria Math" panose="02040503050406030204" pitchFamily="18" charset="0"/>
+                        </a:rPr>
+                        <m:t>=18.</m:t>
+                      </m:r>
+                      <m:r>
+                        <a:rPr lang="it-IT" sz="2500" b="0" i="1" smtClean="0">
+                          <a:latin typeface="Cambria Math" panose="02040503050406030204" pitchFamily="18" charset="0"/>
+                        </a:rPr>
+                        <m:t>7</m:t>
+                      </m:r>
+                      <m:r>
+                        <a:rPr lang="it-IT" sz="2500" b="0" i="1" smtClean="0">
+                          <a:latin typeface="Cambria Math" panose="02040503050406030204" pitchFamily="18" charset="0"/>
+                        </a:rPr>
+                        <m:t>%</m:t>
+                      </m:r>
+                    </m:oMath>
+                  </m:oMathPara>
+                </a14:m>
+                <a:endParaRPr lang="it-IT" sz="2500" dirty="0"/>
+              </a:p>
+            </p:txBody>
+          </p:sp>
+        </mc:Choice>
+        <mc:Fallback>
+          <p:sp>
+            <p:nvSpPr>
+              <p:cNvPr id="23" name="CasellaDiTesto 22">
+                <a:extLst>
+                  <a:ext uri="{FF2B5EF4-FFF2-40B4-BE49-F238E27FC236}">
+                    <a16:creationId xmlns:a16="http://schemas.microsoft.com/office/drawing/2014/main" id="{904F42E7-04C9-C4DB-086A-1AB99052C2E4}"/>
+                  </a:ext>
+                </a:extLst>
+              </p:cNvPr>
+              <p:cNvSpPr txBox="1">
+                <a:spLocks noRot="1" noChangeAspect="1" noMove="1" noResize="1" noEditPoints="1" noAdjustHandles="1" noChangeArrowheads="1" noChangeShapeType="1" noTextEdit="1"/>
+              </p:cNvSpPr>
+              <p:nvPr/>
+            </p:nvSpPr>
+            <p:spPr>
+              <a:xfrm>
+                <a:off x="4491365" y="4555324"/>
+                <a:ext cx="3184753" cy="987079"/>
+              </a:xfrm>
+              <a:prstGeom prst="roundRect">
+                <a:avLst/>
+              </a:prstGeom>
+              <a:blipFill>
+                <a:blip r:embed="rId7"/>
+                <a:stretch>
+                  <a:fillRect/>
+                </a:stretch>
+              </a:blipFill>
+              <a:ln>
+                <a:solidFill>
+                  <a:srgbClr val="FFC000"/>
+                </a:solidFill>
+              </a:ln>
+            </p:spPr>
+            <p:txBody>
+              <a:bodyPr/>
+              <a:lstStyle/>
+              <a:p>
+                <a:r>
+                  <a:rPr lang="it-IT">
+                    <a:noFill/>
+                  </a:rPr>
+                  <a:t> </a:t>
+                </a:r>
+              </a:p>
+            </p:txBody>
+          </p:sp>
+        </mc:Fallback>
+      </mc:AlternateContent>
+      <mc:AlternateContent xmlns:mc="http://schemas.openxmlformats.org/markup-compatibility/2006">
+        <mc:Choice xmlns:a14="http://schemas.microsoft.com/office/drawing/2010/main" Requires="a14">
+          <p:sp>
+            <p:nvSpPr>
+              <p:cNvPr id="25" name="CasellaDiTesto 24">
+                <a:extLst>
+                  <a:ext uri="{FF2B5EF4-FFF2-40B4-BE49-F238E27FC236}">
+                    <a16:creationId xmlns:a16="http://schemas.microsoft.com/office/drawing/2014/main" id="{BE86D837-FB9C-08B9-09A2-D655E9F77432}"/>
+                  </a:ext>
+                </a:extLst>
+              </p:cNvPr>
+              <p:cNvSpPr txBox="1"/>
+              <p:nvPr/>
+            </p:nvSpPr>
+            <p:spPr>
+              <a:xfrm>
+                <a:off x="8578697" y="4555323"/>
+                <a:ext cx="3184753" cy="987079"/>
+              </a:xfrm>
+              <a:prstGeom prst="roundRect">
+                <a:avLst/>
+              </a:prstGeom>
+              <a:ln>
+                <a:solidFill>
+                  <a:srgbClr val="FFC000"/>
+                </a:solidFill>
+              </a:ln>
+            </p:spPr>
+            <p:style>
+              <a:lnRef idx="2">
+                <a:schemeClr val="accent2"/>
+              </a:lnRef>
+              <a:fillRef idx="1">
+                <a:schemeClr val="lt1"/>
+              </a:fillRef>
+              <a:effectRef idx="0">
+                <a:schemeClr val="accent2"/>
+              </a:effectRef>
+              <a:fontRef idx="minor">
+                <a:schemeClr val="dk1"/>
+              </a:fontRef>
+            </p:style>
+            <p:txBody>
+              <a:bodyPr wrap="square" rtlCol="0">
+                <a:spAutoFit/>
+              </a:bodyPr>
+              <a:lstStyle/>
+              <a:p>
+                <a:pPr/>
+                <a14:m>
+                  <m:oMathPara xmlns:m="http://schemas.openxmlformats.org/officeDocument/2006/math">
+                    <m:oMathParaPr>
+                      <m:jc m:val="centerGroup"/>
+                    </m:oMathParaPr>
+                    <m:oMath xmlns:m="http://schemas.openxmlformats.org/officeDocument/2006/math">
+                      <m:sSub>
+                        <m:sSubPr>
+                          <m:ctrlPr>
+                            <a:rPr lang="it-IT" sz="2500" b="0" i="1" smtClean="0">
+                              <a:latin typeface="Cambria Math" panose="02040503050406030204" pitchFamily="18" charset="0"/>
+                            </a:rPr>
+                          </m:ctrlPr>
+                        </m:sSubPr>
+                        <m:e>
+                          <m:r>
+                            <a:rPr lang="it-IT" sz="2500" b="0" i="1" smtClean="0">
+                              <a:latin typeface="Cambria Math" panose="02040503050406030204" pitchFamily="18" charset="0"/>
+                            </a:rPr>
+                            <m:t>𝜏</m:t>
+                          </m:r>
+                        </m:e>
+                        <m:sub>
+                          <m:r>
+                            <a:rPr lang="it-IT" sz="2500" b="0" i="1" smtClean="0">
+                              <a:latin typeface="Cambria Math" panose="02040503050406030204" pitchFamily="18" charset="0"/>
+                            </a:rPr>
+                            <m:t>𝑦</m:t>
+                          </m:r>
+                        </m:sub>
+                      </m:sSub>
+                      <m:r>
+                        <a:rPr lang="it-IT" sz="2500" b="0" i="1" smtClean="0">
+                          <a:latin typeface="Cambria Math" panose="02040503050406030204" pitchFamily="18" charset="0"/>
+                        </a:rPr>
+                        <m:t>=4. </m:t>
+                      </m:r>
+                      <m:r>
+                        <a:rPr lang="it-IT" sz="2500" b="0" i="1" smtClean="0">
+                          <a:latin typeface="Cambria Math" panose="02040503050406030204" pitchFamily="18" charset="0"/>
+                        </a:rPr>
+                        <m:t>11 </m:t>
+                      </m:r>
+                      <m:r>
+                        <a:rPr lang="it-IT" sz="2500" b="0" i="1" smtClean="0">
+                          <a:latin typeface="Cambria Math" panose="02040503050406030204" pitchFamily="18" charset="0"/>
+                        </a:rPr>
+                        <m:t>𝜇</m:t>
+                      </m:r>
+                      <m:r>
+                        <m:rPr>
+                          <m:sty m:val="p"/>
+                        </m:rPr>
+                        <a:rPr lang="it-IT" sz="2500" b="0" i="0" smtClean="0">
+                          <a:latin typeface="Cambria Math" panose="02040503050406030204" pitchFamily="18" charset="0"/>
+                        </a:rPr>
+                        <m:t>rad</m:t>
+                      </m:r>
+                      <m:r>
+                        <a:rPr lang="it-IT" sz="2500" b="0" i="0" smtClean="0">
+                          <a:latin typeface="Cambria Math" panose="02040503050406030204" pitchFamily="18" charset="0"/>
+                        </a:rPr>
+                        <m:t>/</m:t>
+                      </m:r>
+                      <m:r>
+                        <m:rPr>
+                          <m:sty m:val="p"/>
+                        </m:rPr>
+                        <a:rPr lang="it-IT" sz="2500" b="0" i="0" smtClean="0">
+                          <a:latin typeface="Cambria Math" panose="02040503050406030204" pitchFamily="18" charset="0"/>
+                        </a:rPr>
+                        <m:t>mm</m:t>
+                      </m:r>
+                    </m:oMath>
+                  </m:oMathPara>
+                </a14:m>
+                <a:endParaRPr lang="it-IT" sz="2500" dirty="0"/>
+              </a:p>
+              <a:p>
+                <a:pPr/>
+                <a14:m>
+                  <m:oMathPara xmlns:m="http://schemas.openxmlformats.org/officeDocument/2006/math">
+                    <m:oMathParaPr>
+                      <m:jc m:val="centerGroup"/>
+                    </m:oMathParaPr>
+                    <m:oMath xmlns:m="http://schemas.openxmlformats.org/officeDocument/2006/math">
+                      <m:sSub>
+                        <m:sSubPr>
+                          <m:ctrlPr>
+                            <a:rPr lang="it-IT" sz="2500" b="0" i="1" smtClean="0">
+                              <a:latin typeface="Cambria Math" panose="02040503050406030204" pitchFamily="18" charset="0"/>
+                            </a:rPr>
+                          </m:ctrlPr>
+                        </m:sSubPr>
+                        <m:e>
+                          <m:r>
+                            <a:rPr lang="it-IT" sz="2500" b="0" i="1" smtClean="0">
+                              <a:latin typeface="Cambria Math" panose="02040503050406030204" pitchFamily="18" charset="0"/>
+                            </a:rPr>
+                            <m:t>𝜖</m:t>
+                          </m:r>
+                        </m:e>
+                        <m:sub>
+                          <m:r>
+                            <a:rPr lang="it-IT" sz="2500" b="0" i="1" smtClean="0">
+                              <a:latin typeface="Cambria Math" panose="02040503050406030204" pitchFamily="18" charset="0"/>
+                            </a:rPr>
+                            <m:t>𝑐h</m:t>
+                          </m:r>
+                        </m:sub>
+                      </m:sSub>
+                      <m:r>
+                        <a:rPr lang="it-IT" sz="2500" b="0" i="1" smtClean="0">
+                          <a:latin typeface="Cambria Math" panose="02040503050406030204" pitchFamily="18" charset="0"/>
+                        </a:rPr>
+                        <m:t>=18.</m:t>
+                      </m:r>
+                      <m:r>
+                        <a:rPr lang="it-IT" sz="2500" b="0" i="1" smtClean="0">
+                          <a:latin typeface="Cambria Math" panose="02040503050406030204" pitchFamily="18" charset="0"/>
+                        </a:rPr>
+                        <m:t>7</m:t>
+                      </m:r>
+                      <m:r>
+                        <a:rPr lang="it-IT" sz="2500" b="0" i="1" smtClean="0">
+                          <a:latin typeface="Cambria Math" panose="02040503050406030204" pitchFamily="18" charset="0"/>
+                        </a:rPr>
+                        <m:t>%</m:t>
+                      </m:r>
+                    </m:oMath>
+                  </m:oMathPara>
+                </a14:m>
+                <a:endParaRPr lang="it-IT" sz="2500" dirty="0"/>
+              </a:p>
+            </p:txBody>
+          </p:sp>
+        </mc:Choice>
+        <mc:Fallback>
+          <p:sp>
+            <p:nvSpPr>
+              <p:cNvPr id="25" name="CasellaDiTesto 24">
+                <a:extLst>
+                  <a:ext uri="{FF2B5EF4-FFF2-40B4-BE49-F238E27FC236}">
+                    <a16:creationId xmlns:a16="http://schemas.microsoft.com/office/drawing/2014/main" id="{BE86D837-FB9C-08B9-09A2-D655E9F77432}"/>
+                  </a:ext>
+                </a:extLst>
+              </p:cNvPr>
+              <p:cNvSpPr txBox="1">
+                <a:spLocks noRot="1" noChangeAspect="1" noMove="1" noResize="1" noEditPoints="1" noAdjustHandles="1" noChangeArrowheads="1" noChangeShapeType="1" noTextEdit="1"/>
+              </p:cNvSpPr>
+              <p:nvPr/>
+            </p:nvSpPr>
+            <p:spPr>
+              <a:xfrm>
+                <a:off x="8578697" y="4555323"/>
+                <a:ext cx="3184753" cy="987079"/>
+              </a:xfrm>
+              <a:prstGeom prst="roundRect">
+                <a:avLst/>
+              </a:prstGeom>
+              <a:blipFill>
+                <a:blip r:embed="rId8"/>
+                <a:stretch>
+                  <a:fillRect/>
+                </a:stretch>
+              </a:blipFill>
+              <a:ln>
+                <a:solidFill>
+                  <a:srgbClr val="FFC000"/>
+                </a:solidFill>
+              </a:ln>
+            </p:spPr>
+            <p:txBody>
+              <a:bodyPr/>
+              <a:lstStyle/>
+              <a:p>
+                <a:r>
+                  <a:rPr lang="it-IT">
+                    <a:noFill/>
+                  </a:rPr>
+                  <a:t> </a:t>
+                </a:r>
+              </a:p>
+            </p:txBody>
+          </p:sp>
+        </mc:Fallback>
+      </mc:AlternateContent>
     </p:spTree>
     <p:extLst>
       <p:ext uri="{BB962C8B-B14F-4D97-AF65-F5344CB8AC3E}">
@@ -7390,6 +8185,1232 @@
 </file>
 
 <file path=ppt/slides/slide7.xml><?xml version="1.0" encoding="utf-8"?>
+<p:sld xmlns:a="http://schemas.openxmlformats.org/drawingml/2006/main" xmlns:r="http://schemas.openxmlformats.org/officeDocument/2006/relationships" xmlns:p="http://schemas.openxmlformats.org/presentationml/2006/main">
+  <p:cSld>
+    <p:spTree>
+      <p:nvGrpSpPr>
+        <p:cNvPr id="1" name="">
+          <a:extLst>
+            <a:ext uri="{FF2B5EF4-FFF2-40B4-BE49-F238E27FC236}">
+              <a16:creationId xmlns:a16="http://schemas.microsoft.com/office/drawing/2014/main" id="{DF1E2D0A-4DBA-73CF-1FA1-DAE62884D262}"/>
+            </a:ext>
+          </a:extLst>
+        </p:cNvPr>
+        <p:cNvGrpSpPr/>
+        <p:nvPr/>
+      </p:nvGrpSpPr>
+      <p:grpSpPr>
+        <a:xfrm>
+          <a:off x="0" y="0"/>
+          <a:ext cx="0" cy="0"/>
+          <a:chOff x="0" y="0"/>
+          <a:chExt cx="0" cy="0"/>
+        </a:xfrm>
+      </p:grpSpPr>
+      <p:sp>
+        <p:nvSpPr>
+          <p:cNvPr id="2" name="Titolo 1">
+            <a:extLst>
+              <a:ext uri="{FF2B5EF4-FFF2-40B4-BE49-F238E27FC236}">
+                <a16:creationId xmlns:a16="http://schemas.microsoft.com/office/drawing/2014/main" id="{F14FB1E8-4357-33B5-9CFB-A500A9A017F0}"/>
+              </a:ext>
+            </a:extLst>
+          </p:cNvPr>
+          <p:cNvSpPr>
+            <a:spLocks noGrp="1"/>
+          </p:cNvSpPr>
+          <p:nvPr>
+            <p:ph type="title"/>
+          </p:nvPr>
+        </p:nvSpPr>
+        <p:spPr>
+          <a:xfrm>
+            <a:off x="38100" y="69651"/>
+            <a:ext cx="12114000" cy="1153094"/>
+          </a:xfrm>
+          <a:prstGeom prst="roundRect">
+            <a:avLst>
+              <a:gd name="adj" fmla="val 36459"/>
+            </a:avLst>
+          </a:prstGeom>
+          <a:solidFill>
+            <a:srgbClr val="002060"/>
+          </a:solidFill>
+        </p:spPr>
+        <p:txBody>
+          <a:bodyPr>
+            <a:normAutofit/>
+          </a:bodyPr>
+          <a:lstStyle/>
+          <a:p>
+            <a:pPr algn="ctr"/>
+            <a:r>
+              <a:rPr lang="it-IT" b="1" dirty="0">
+                <a:solidFill>
+                  <a:schemeClr val="bg1"/>
+                </a:solidFill>
+              </a:rPr>
+              <a:t>EFFICIENCY COMPUTATION</a:t>
+            </a:r>
+          </a:p>
+        </p:txBody>
+      </p:sp>
+      <p:sp>
+        <p:nvSpPr>
+          <p:cNvPr id="3" name="Segnaposto contenuto 2">
+            <a:extLst>
+              <a:ext uri="{FF2B5EF4-FFF2-40B4-BE49-F238E27FC236}">
+                <a16:creationId xmlns:a16="http://schemas.microsoft.com/office/drawing/2014/main" id="{A20966FF-4330-5311-0FC3-55C06A650F0B}"/>
+              </a:ext>
+            </a:extLst>
+          </p:cNvPr>
+          <p:cNvSpPr>
+            <a:spLocks noGrp="1"/>
+          </p:cNvSpPr>
+          <p:nvPr>
+            <p:ph idx="1"/>
+          </p:nvPr>
+        </p:nvSpPr>
+        <p:spPr>
+          <a:xfrm>
+            <a:off x="838200" y="1401288"/>
+            <a:ext cx="10756900" cy="4955061"/>
+          </a:xfrm>
+        </p:spPr>
+        <p:txBody>
+          <a:bodyPr>
+            <a:normAutofit/>
+          </a:bodyPr>
+          <a:lstStyle/>
+          <a:p>
+            <a:r>
+              <a:rPr lang="it-IT" dirty="0" err="1"/>
+              <a:t>If</a:t>
+            </a:r>
+            <a:r>
+              <a:rPr lang="it-IT" dirty="0"/>
+              <a:t> I do not (</a:t>
+            </a:r>
+            <a:r>
+              <a:rPr lang="it-IT" dirty="0" err="1"/>
+              <a:t>still</a:t>
+            </a:r>
+            <a:r>
+              <a:rPr lang="it-IT" dirty="0"/>
+              <a:t> </a:t>
+            </a:r>
+            <a:r>
+              <a:rPr lang="it-IT" dirty="0" err="1"/>
+              <a:t>doing</a:t>
+            </a:r>
+            <a:r>
+              <a:rPr lang="it-IT" dirty="0"/>
+              <a:t> a 3d </a:t>
+            </a:r>
+            <a:r>
+              <a:rPr lang="it-IT" dirty="0" err="1"/>
+              <a:t>fit</a:t>
+            </a:r>
+            <a:r>
+              <a:rPr lang="it-IT" dirty="0"/>
+              <a:t>):</a:t>
+            </a:r>
+          </a:p>
+          <a:p>
+            <a:endParaRPr lang="it-IT" dirty="0"/>
+          </a:p>
+          <a:p>
+            <a:endParaRPr lang="it-IT" dirty="0"/>
+          </a:p>
+          <a:p>
+            <a:endParaRPr lang="it-IT" dirty="0"/>
+          </a:p>
+          <a:p>
+            <a:endParaRPr lang="it-IT" dirty="0"/>
+          </a:p>
+          <a:p>
+            <a:endParaRPr lang="it-IT" dirty="0"/>
+          </a:p>
+          <a:p>
+            <a:endParaRPr lang="it-IT" dirty="0"/>
+          </a:p>
+          <a:p>
+            <a:pPr marL="0" indent="0">
+              <a:buNone/>
+            </a:pPr>
+            <a:endParaRPr lang="it-IT" dirty="0"/>
+          </a:p>
+        </p:txBody>
+      </p:sp>
+      <p:sp>
+        <p:nvSpPr>
+          <p:cNvPr id="4" name="Segnaposto data 3">
+            <a:extLst>
+              <a:ext uri="{FF2B5EF4-FFF2-40B4-BE49-F238E27FC236}">
+                <a16:creationId xmlns:a16="http://schemas.microsoft.com/office/drawing/2014/main" id="{C1E90FDF-EBD8-BE12-4727-FFB1540E2C15}"/>
+              </a:ext>
+            </a:extLst>
+          </p:cNvPr>
+          <p:cNvSpPr>
+            <a:spLocks noGrp="1"/>
+          </p:cNvSpPr>
+          <p:nvPr>
+            <p:ph type="dt" sz="half" idx="10"/>
+          </p:nvPr>
+        </p:nvSpPr>
+        <p:spPr>
+          <a:xfrm>
+            <a:off x="838200" y="6356349"/>
+            <a:ext cx="2743200" cy="432000"/>
+          </a:xfrm>
+        </p:spPr>
+        <p:txBody>
+          <a:bodyPr/>
+          <a:lstStyle/>
+          <a:p>
+            <a:r>
+              <a:rPr lang="it-IT" sz="1500" b="1" dirty="0">
+                <a:solidFill>
+                  <a:srgbClr val="002060"/>
+                </a:solidFill>
+              </a:rPr>
+              <a:t>July 2026</a:t>
+            </a:r>
+          </a:p>
+        </p:txBody>
+      </p:sp>
+      <p:sp>
+        <p:nvSpPr>
+          <p:cNvPr id="5" name="Segnaposto piè di pagina 4">
+            <a:extLst>
+              <a:ext uri="{FF2B5EF4-FFF2-40B4-BE49-F238E27FC236}">
+                <a16:creationId xmlns:a16="http://schemas.microsoft.com/office/drawing/2014/main" id="{136EB338-15F0-AE12-96CB-D40A63B4A3A4}"/>
+              </a:ext>
+            </a:extLst>
+          </p:cNvPr>
+          <p:cNvSpPr>
+            <a:spLocks noGrp="1"/>
+          </p:cNvSpPr>
+          <p:nvPr>
+            <p:ph type="ftr" sz="quarter" idx="11"/>
+          </p:nvPr>
+        </p:nvSpPr>
+        <p:spPr>
+          <a:xfrm>
+            <a:off x="0" y="6356349"/>
+            <a:ext cx="12192000" cy="432000"/>
+          </a:xfrm>
+        </p:spPr>
+        <p:txBody>
+          <a:bodyPr/>
+          <a:lstStyle/>
+          <a:p>
+            <a:r>
+              <a:rPr lang="it-IT" sz="1500" b="1" dirty="0">
+                <a:solidFill>
+                  <a:srgbClr val="002060"/>
+                </a:solidFill>
+              </a:rPr>
+              <a:t>Anna Sofia Moro</a:t>
+            </a:r>
+          </a:p>
+        </p:txBody>
+      </p:sp>
+      <p:sp>
+        <p:nvSpPr>
+          <p:cNvPr id="6" name="Segnaposto numero diapositiva 5">
+            <a:extLst>
+              <a:ext uri="{FF2B5EF4-FFF2-40B4-BE49-F238E27FC236}">
+                <a16:creationId xmlns:a16="http://schemas.microsoft.com/office/drawing/2014/main" id="{4D9D16BF-B598-E7BB-224E-13BBA135C7D4}"/>
+              </a:ext>
+            </a:extLst>
+          </p:cNvPr>
+          <p:cNvSpPr>
+            <a:spLocks noGrp="1"/>
+          </p:cNvSpPr>
+          <p:nvPr>
+            <p:ph type="sldNum" sz="quarter" idx="12"/>
+          </p:nvPr>
+        </p:nvSpPr>
+        <p:spPr>
+          <a:xfrm>
+            <a:off x="8610600" y="6356349"/>
+            <a:ext cx="2743200" cy="432000"/>
+          </a:xfrm>
+        </p:spPr>
+        <p:txBody>
+          <a:bodyPr/>
+          <a:lstStyle/>
+          <a:p>
+            <a:fld id="{0A318BD9-CA14-4A83-ACF0-03D5918EB402}" type="slidenum">
+              <a:rPr lang="it-IT" sz="1500" b="1" smtClean="0">
+                <a:solidFill>
+                  <a:srgbClr val="002060"/>
+                </a:solidFill>
+              </a:rPr>
+              <a:t>7</a:t>
+            </a:fld>
+            <a:endParaRPr lang="it-IT" sz="1500" b="1" dirty="0">
+              <a:solidFill>
+                <a:srgbClr val="002060"/>
+              </a:solidFill>
+            </a:endParaRPr>
+          </a:p>
+        </p:txBody>
+      </p:sp>
+      <p:pic>
+        <p:nvPicPr>
+          <p:cNvPr id="8" name="Immagine 7">
+            <a:extLst>
+              <a:ext uri="{FF2B5EF4-FFF2-40B4-BE49-F238E27FC236}">
+                <a16:creationId xmlns:a16="http://schemas.microsoft.com/office/drawing/2014/main" id="{8C10532F-FA5B-0CFB-1803-C586EAB54467}"/>
+              </a:ext>
+            </a:extLst>
+          </p:cNvPr>
+          <p:cNvPicPr>
+            <a:picLocks noChangeAspect="1"/>
+          </p:cNvPicPr>
+          <p:nvPr/>
+        </p:nvPicPr>
+        <p:blipFill>
+          <a:blip r:embed="rId3">
+            <a:extLst>
+              <a:ext uri="{28A0092B-C50C-407E-A947-70E740481C1C}">
+                <a14:useLocalDpi xmlns:a14="http://schemas.microsoft.com/office/drawing/2010/main" val="0"/>
+              </a:ext>
+            </a:extLst>
+          </a:blip>
+          <a:srcRect/>
+          <a:stretch/>
+        </p:blipFill>
+        <p:spPr>
+          <a:xfrm>
+            <a:off x="285553" y="1979385"/>
+            <a:ext cx="3594200" cy="2575940"/>
+          </a:xfrm>
+          <a:prstGeom prst="rect">
+            <a:avLst/>
+          </a:prstGeom>
+        </p:spPr>
+      </p:pic>
+      <p:pic>
+        <p:nvPicPr>
+          <p:cNvPr id="10" name="Immagine 9">
+            <a:extLst>
+              <a:ext uri="{FF2B5EF4-FFF2-40B4-BE49-F238E27FC236}">
+                <a16:creationId xmlns:a16="http://schemas.microsoft.com/office/drawing/2014/main" id="{D27C1EEF-892C-95EB-8D88-93978C150B21}"/>
+              </a:ext>
+            </a:extLst>
+          </p:cNvPr>
+          <p:cNvPicPr>
+            <a:picLocks noChangeAspect="1"/>
+          </p:cNvPicPr>
+          <p:nvPr/>
+        </p:nvPicPr>
+        <p:blipFill>
+          <a:blip r:embed="rId4">
+            <a:extLst>
+              <a:ext uri="{28A0092B-C50C-407E-A947-70E740481C1C}">
+                <a14:useLocalDpi xmlns:a14="http://schemas.microsoft.com/office/drawing/2010/main" val="0"/>
+              </a:ext>
+            </a:extLst>
+          </a:blip>
+          <a:srcRect/>
+          <a:stretch/>
+        </p:blipFill>
+        <p:spPr>
+          <a:xfrm>
+            <a:off x="4359653" y="1979785"/>
+            <a:ext cx="3600000" cy="2575140"/>
+          </a:xfrm>
+          <a:prstGeom prst="rect">
+            <a:avLst/>
+          </a:prstGeom>
+        </p:spPr>
+      </p:pic>
+      <p:pic>
+        <p:nvPicPr>
+          <p:cNvPr id="12" name="Immagine 11">
+            <a:extLst>
+              <a:ext uri="{FF2B5EF4-FFF2-40B4-BE49-F238E27FC236}">
+                <a16:creationId xmlns:a16="http://schemas.microsoft.com/office/drawing/2014/main" id="{0D8AA8EC-057D-2B93-430C-A42D979763E0}"/>
+              </a:ext>
+            </a:extLst>
+          </p:cNvPr>
+          <p:cNvPicPr>
+            <a:picLocks noChangeAspect="1"/>
+          </p:cNvPicPr>
+          <p:nvPr/>
+        </p:nvPicPr>
+        <p:blipFill>
+          <a:blip r:embed="rId5">
+            <a:extLst>
+              <a:ext uri="{28A0092B-C50C-407E-A947-70E740481C1C}">
+                <a14:useLocalDpi xmlns:a14="http://schemas.microsoft.com/office/drawing/2010/main" val="0"/>
+              </a:ext>
+            </a:extLst>
+          </a:blip>
+          <a:srcRect/>
+          <a:stretch/>
+        </p:blipFill>
+        <p:spPr>
+          <a:xfrm>
+            <a:off x="8439553" y="1979385"/>
+            <a:ext cx="3594200" cy="2575940"/>
+          </a:xfrm>
+          <a:prstGeom prst="rect">
+            <a:avLst/>
+          </a:prstGeom>
+        </p:spPr>
+      </p:pic>
+      <p:sp>
+        <p:nvSpPr>
+          <p:cNvPr id="14" name="CasellaDiTesto 13">
+            <a:extLst>
+              <a:ext uri="{FF2B5EF4-FFF2-40B4-BE49-F238E27FC236}">
+                <a16:creationId xmlns:a16="http://schemas.microsoft.com/office/drawing/2014/main" id="{7E92AEF6-987C-22D3-2AF6-BA1DD5CA7D13}"/>
+              </a:ext>
+            </a:extLst>
+          </p:cNvPr>
+          <p:cNvSpPr txBox="1">
+            <a:spLocks noChangeAspect="1"/>
+          </p:cNvSpPr>
+          <p:nvPr/>
+        </p:nvSpPr>
+        <p:spPr>
+          <a:xfrm>
+            <a:off x="2928532" y="2733706"/>
+            <a:ext cx="540000" cy="540000"/>
+          </a:xfrm>
+          <a:prstGeom prst="ellipse">
+            <a:avLst/>
+          </a:prstGeom>
+          <a:solidFill>
+            <a:srgbClr val="FFC000"/>
+          </a:solidFill>
+        </p:spPr>
+        <p:txBody>
+          <a:bodyPr wrap="square" rtlCol="0">
+            <a:spAutoFit/>
+          </a:bodyPr>
+          <a:lstStyle/>
+          <a:p>
+            <a:pPr algn="ctr"/>
+            <a:r>
+              <a:rPr lang="it-IT" b="1" dirty="0">
+                <a:solidFill>
+                  <a:schemeClr val="bg1"/>
+                </a:solidFill>
+              </a:rPr>
+              <a:t>1</a:t>
+            </a:r>
+          </a:p>
+        </p:txBody>
+      </p:sp>
+      <p:sp>
+        <p:nvSpPr>
+          <p:cNvPr id="16" name="CasellaDiTesto 15">
+            <a:extLst>
+              <a:ext uri="{FF2B5EF4-FFF2-40B4-BE49-F238E27FC236}">
+                <a16:creationId xmlns:a16="http://schemas.microsoft.com/office/drawing/2014/main" id="{A8340BEA-104A-4BD8-07C0-85331CC62F3D}"/>
+              </a:ext>
+            </a:extLst>
+          </p:cNvPr>
+          <p:cNvSpPr txBox="1">
+            <a:spLocks noChangeAspect="1"/>
+          </p:cNvSpPr>
+          <p:nvPr/>
+        </p:nvSpPr>
+        <p:spPr>
+          <a:xfrm>
+            <a:off x="7005532" y="2733706"/>
+            <a:ext cx="540000" cy="540000"/>
+          </a:xfrm>
+          <a:prstGeom prst="ellipse">
+            <a:avLst/>
+          </a:prstGeom>
+          <a:solidFill>
+            <a:srgbClr val="FFC000"/>
+          </a:solidFill>
+        </p:spPr>
+        <p:txBody>
+          <a:bodyPr wrap="square" rtlCol="0">
+            <a:spAutoFit/>
+          </a:bodyPr>
+          <a:lstStyle/>
+          <a:p>
+            <a:pPr algn="ctr"/>
+            <a:r>
+              <a:rPr lang="it-IT" b="1" dirty="0">
+                <a:solidFill>
+                  <a:schemeClr val="bg1"/>
+                </a:solidFill>
+              </a:rPr>
+              <a:t>2</a:t>
+            </a:r>
+          </a:p>
+        </p:txBody>
+      </p:sp>
+      <p:sp>
+        <p:nvSpPr>
+          <p:cNvPr id="18" name="CasellaDiTesto 17">
+            <a:extLst>
+              <a:ext uri="{FF2B5EF4-FFF2-40B4-BE49-F238E27FC236}">
+                <a16:creationId xmlns:a16="http://schemas.microsoft.com/office/drawing/2014/main" id="{0EEE0B01-D711-6418-B98B-B2DC9C3800D8}"/>
+              </a:ext>
+            </a:extLst>
+          </p:cNvPr>
+          <p:cNvSpPr txBox="1">
+            <a:spLocks noChangeAspect="1"/>
+          </p:cNvSpPr>
+          <p:nvPr/>
+        </p:nvSpPr>
+        <p:spPr>
+          <a:xfrm>
+            <a:off x="11083800" y="2733706"/>
+            <a:ext cx="540000" cy="540000"/>
+          </a:xfrm>
+          <a:prstGeom prst="ellipse">
+            <a:avLst/>
+          </a:prstGeom>
+          <a:solidFill>
+            <a:srgbClr val="FFC000"/>
+          </a:solidFill>
+        </p:spPr>
+        <p:txBody>
+          <a:bodyPr wrap="square" rtlCol="0">
+            <a:spAutoFit/>
+          </a:bodyPr>
+          <a:lstStyle/>
+          <a:p>
+            <a:pPr algn="ctr"/>
+            <a:r>
+              <a:rPr lang="it-IT" b="1" dirty="0">
+                <a:solidFill>
+                  <a:schemeClr val="bg1"/>
+                </a:solidFill>
+              </a:rPr>
+              <a:t>3</a:t>
+            </a:r>
+          </a:p>
+        </p:txBody>
+      </p:sp>
+      <mc:AlternateContent xmlns:mc="http://schemas.openxmlformats.org/markup-compatibility/2006">
+        <mc:Choice xmlns:a14="http://schemas.microsoft.com/office/drawing/2010/main" Requires="a14">
+          <p:sp>
+            <p:nvSpPr>
+              <p:cNvPr id="21" name="CasellaDiTesto 20">
+                <a:extLst>
+                  <a:ext uri="{FF2B5EF4-FFF2-40B4-BE49-F238E27FC236}">
+                    <a16:creationId xmlns:a16="http://schemas.microsoft.com/office/drawing/2014/main" id="{88C66464-97B4-1526-9E81-40BD05D19AD4}"/>
+                  </a:ext>
+                </a:extLst>
+              </p:cNvPr>
+              <p:cNvSpPr txBox="1"/>
+              <p:nvPr/>
+            </p:nvSpPr>
+            <p:spPr>
+              <a:xfrm>
+                <a:off x="396647" y="4555325"/>
+                <a:ext cx="3184753" cy="987079"/>
+              </a:xfrm>
+              <a:prstGeom prst="roundRect">
+                <a:avLst/>
+              </a:prstGeom>
+              <a:ln>
+                <a:solidFill>
+                  <a:srgbClr val="FFC000"/>
+                </a:solidFill>
+              </a:ln>
+            </p:spPr>
+            <p:style>
+              <a:lnRef idx="2">
+                <a:schemeClr val="accent2"/>
+              </a:lnRef>
+              <a:fillRef idx="1">
+                <a:schemeClr val="lt1"/>
+              </a:fillRef>
+              <a:effectRef idx="0">
+                <a:schemeClr val="accent2"/>
+              </a:effectRef>
+              <a:fontRef idx="minor">
+                <a:schemeClr val="dk1"/>
+              </a:fontRef>
+            </p:style>
+            <p:txBody>
+              <a:bodyPr wrap="square" rtlCol="0">
+                <a:spAutoFit/>
+              </a:bodyPr>
+              <a:lstStyle/>
+              <a:p>
+                <a:pPr/>
+                <a14:m>
+                  <m:oMathPara xmlns:m="http://schemas.openxmlformats.org/officeDocument/2006/math">
+                    <m:oMathParaPr>
+                      <m:jc m:val="centerGroup"/>
+                    </m:oMathParaPr>
+                    <m:oMath xmlns:m="http://schemas.openxmlformats.org/officeDocument/2006/math">
+                      <m:sSub>
+                        <m:sSubPr>
+                          <m:ctrlPr>
+                            <a:rPr lang="it-IT" sz="2500" b="0" i="1" smtClean="0">
+                              <a:latin typeface="Cambria Math" panose="02040503050406030204" pitchFamily="18" charset="0"/>
+                            </a:rPr>
+                          </m:ctrlPr>
+                        </m:sSubPr>
+                        <m:e>
+                          <m:r>
+                            <a:rPr lang="it-IT" sz="2500" b="0" i="1" smtClean="0">
+                              <a:latin typeface="Cambria Math" panose="02040503050406030204" pitchFamily="18" charset="0"/>
+                            </a:rPr>
+                            <m:t>𝜏</m:t>
+                          </m:r>
+                        </m:e>
+                        <m:sub>
+                          <m:r>
+                            <a:rPr lang="it-IT" sz="2500" b="0" i="1" smtClean="0">
+                              <a:latin typeface="Cambria Math" panose="02040503050406030204" pitchFamily="18" charset="0"/>
+                            </a:rPr>
+                            <m:t>𝑦</m:t>
+                          </m:r>
+                        </m:sub>
+                      </m:sSub>
+                      <m:r>
+                        <a:rPr lang="it-IT" sz="2500" b="0" i="1" smtClean="0">
+                          <a:latin typeface="Cambria Math" panose="02040503050406030204" pitchFamily="18" charset="0"/>
+                        </a:rPr>
+                        <m:t>=4. 11 </m:t>
+                      </m:r>
+                      <m:r>
+                        <a:rPr lang="it-IT" sz="2500" b="0" i="1" smtClean="0">
+                          <a:latin typeface="Cambria Math" panose="02040503050406030204" pitchFamily="18" charset="0"/>
+                        </a:rPr>
+                        <m:t>𝜇</m:t>
+                      </m:r>
+                      <m:r>
+                        <m:rPr>
+                          <m:sty m:val="p"/>
+                        </m:rPr>
+                        <a:rPr lang="it-IT" sz="2500" b="0" i="0" smtClean="0">
+                          <a:latin typeface="Cambria Math" panose="02040503050406030204" pitchFamily="18" charset="0"/>
+                        </a:rPr>
+                        <m:t>rad</m:t>
+                      </m:r>
+                      <m:r>
+                        <a:rPr lang="it-IT" sz="2500" b="0" i="0" smtClean="0">
+                          <a:latin typeface="Cambria Math" panose="02040503050406030204" pitchFamily="18" charset="0"/>
+                        </a:rPr>
+                        <m:t>/</m:t>
+                      </m:r>
+                      <m:r>
+                        <m:rPr>
+                          <m:sty m:val="p"/>
+                        </m:rPr>
+                        <a:rPr lang="it-IT" sz="2500" b="0" i="0" smtClean="0">
+                          <a:latin typeface="Cambria Math" panose="02040503050406030204" pitchFamily="18" charset="0"/>
+                        </a:rPr>
+                        <m:t>mm</m:t>
+                      </m:r>
+                    </m:oMath>
+                  </m:oMathPara>
+                </a14:m>
+                <a:endParaRPr lang="it-IT" sz="2500" dirty="0"/>
+              </a:p>
+              <a:p>
+                <a:pPr/>
+                <a14:m>
+                  <m:oMathPara xmlns:m="http://schemas.openxmlformats.org/officeDocument/2006/math">
+                    <m:oMathParaPr>
+                      <m:jc m:val="centerGroup"/>
+                    </m:oMathParaPr>
+                    <m:oMath xmlns:m="http://schemas.openxmlformats.org/officeDocument/2006/math">
+                      <m:sSub>
+                        <m:sSubPr>
+                          <m:ctrlPr>
+                            <a:rPr lang="it-IT" sz="2500" b="0" i="1" smtClean="0">
+                              <a:latin typeface="Cambria Math" panose="02040503050406030204" pitchFamily="18" charset="0"/>
+                            </a:rPr>
+                          </m:ctrlPr>
+                        </m:sSubPr>
+                        <m:e>
+                          <m:r>
+                            <a:rPr lang="it-IT" sz="2500" b="0" i="1" smtClean="0">
+                              <a:latin typeface="Cambria Math" panose="02040503050406030204" pitchFamily="18" charset="0"/>
+                            </a:rPr>
+                            <m:t>𝜖</m:t>
+                          </m:r>
+                        </m:e>
+                        <m:sub>
+                          <m:r>
+                            <a:rPr lang="it-IT" sz="2500" b="0" i="1" smtClean="0">
+                              <a:latin typeface="Cambria Math" panose="02040503050406030204" pitchFamily="18" charset="0"/>
+                            </a:rPr>
+                            <m:t>𝑐h</m:t>
+                          </m:r>
+                        </m:sub>
+                      </m:sSub>
+                      <m:r>
+                        <a:rPr lang="it-IT" sz="2500" b="0" i="1" smtClean="0">
+                          <a:latin typeface="Cambria Math" panose="02040503050406030204" pitchFamily="18" charset="0"/>
+                        </a:rPr>
+                        <m:t>=1</m:t>
+                      </m:r>
+                      <m:r>
+                        <a:rPr lang="it-IT" sz="2500" b="0" i="1" smtClean="0">
+                          <a:latin typeface="Cambria Math" panose="02040503050406030204" pitchFamily="18" charset="0"/>
+                        </a:rPr>
+                        <m:t>5</m:t>
+                      </m:r>
+                      <m:r>
+                        <a:rPr lang="it-IT" sz="2500" b="0" i="1" smtClean="0">
+                          <a:latin typeface="Cambria Math" panose="02040503050406030204" pitchFamily="18" charset="0"/>
+                        </a:rPr>
+                        <m:t>.</m:t>
+                      </m:r>
+                      <m:r>
+                        <a:rPr lang="it-IT" sz="2500" b="0" i="1" smtClean="0">
+                          <a:latin typeface="Cambria Math" panose="02040503050406030204" pitchFamily="18" charset="0"/>
+                        </a:rPr>
+                        <m:t>8</m:t>
+                      </m:r>
+                      <m:r>
+                        <a:rPr lang="it-IT" sz="2500" b="0" i="1" smtClean="0">
+                          <a:latin typeface="Cambria Math" panose="02040503050406030204" pitchFamily="18" charset="0"/>
+                        </a:rPr>
+                        <m:t>%</m:t>
+                      </m:r>
+                    </m:oMath>
+                  </m:oMathPara>
+                </a14:m>
+                <a:endParaRPr lang="it-IT" sz="2500" dirty="0"/>
+              </a:p>
+            </p:txBody>
+          </p:sp>
+        </mc:Choice>
+        <mc:Fallback>
+          <p:sp>
+            <p:nvSpPr>
+              <p:cNvPr id="21" name="CasellaDiTesto 20">
+                <a:extLst>
+                  <a:ext uri="{FF2B5EF4-FFF2-40B4-BE49-F238E27FC236}">
+                    <a16:creationId xmlns:a16="http://schemas.microsoft.com/office/drawing/2014/main" id="{88C66464-97B4-1526-9E81-40BD05D19AD4}"/>
+                  </a:ext>
+                </a:extLst>
+              </p:cNvPr>
+              <p:cNvSpPr txBox="1">
+                <a:spLocks noRot="1" noChangeAspect="1" noMove="1" noResize="1" noEditPoints="1" noAdjustHandles="1" noChangeArrowheads="1" noChangeShapeType="1" noTextEdit="1"/>
+              </p:cNvSpPr>
+              <p:nvPr/>
+            </p:nvSpPr>
+            <p:spPr>
+              <a:xfrm>
+                <a:off x="396647" y="4555325"/>
+                <a:ext cx="3184753" cy="987079"/>
+              </a:xfrm>
+              <a:prstGeom prst="roundRect">
+                <a:avLst/>
+              </a:prstGeom>
+              <a:blipFill>
+                <a:blip r:embed="rId6"/>
+                <a:stretch>
+                  <a:fillRect/>
+                </a:stretch>
+              </a:blipFill>
+              <a:ln>
+                <a:solidFill>
+                  <a:srgbClr val="FFC000"/>
+                </a:solidFill>
+              </a:ln>
+            </p:spPr>
+            <p:txBody>
+              <a:bodyPr/>
+              <a:lstStyle/>
+              <a:p>
+                <a:r>
+                  <a:rPr lang="it-IT">
+                    <a:noFill/>
+                  </a:rPr>
+                  <a:t> </a:t>
+                </a:r>
+              </a:p>
+            </p:txBody>
+          </p:sp>
+        </mc:Fallback>
+      </mc:AlternateContent>
+      <mc:AlternateContent xmlns:mc="http://schemas.openxmlformats.org/markup-compatibility/2006">
+        <mc:Choice xmlns:a14="http://schemas.microsoft.com/office/drawing/2010/main" Requires="a14">
+          <p:sp>
+            <p:nvSpPr>
+              <p:cNvPr id="23" name="CasellaDiTesto 22">
+                <a:extLst>
+                  <a:ext uri="{FF2B5EF4-FFF2-40B4-BE49-F238E27FC236}">
+                    <a16:creationId xmlns:a16="http://schemas.microsoft.com/office/drawing/2014/main" id="{14993B24-0593-32D8-8A3F-C748A8AB7B2A}"/>
+                  </a:ext>
+                </a:extLst>
+              </p:cNvPr>
+              <p:cNvSpPr txBox="1"/>
+              <p:nvPr/>
+            </p:nvSpPr>
+            <p:spPr>
+              <a:xfrm>
+                <a:off x="4491365" y="4555324"/>
+                <a:ext cx="3184753" cy="987079"/>
+              </a:xfrm>
+              <a:prstGeom prst="roundRect">
+                <a:avLst/>
+              </a:prstGeom>
+              <a:ln>
+                <a:solidFill>
+                  <a:srgbClr val="FFC000"/>
+                </a:solidFill>
+              </a:ln>
+            </p:spPr>
+            <p:style>
+              <a:lnRef idx="2">
+                <a:schemeClr val="accent2"/>
+              </a:lnRef>
+              <a:fillRef idx="1">
+                <a:schemeClr val="lt1"/>
+              </a:fillRef>
+              <a:effectRef idx="0">
+                <a:schemeClr val="accent2"/>
+              </a:effectRef>
+              <a:fontRef idx="minor">
+                <a:schemeClr val="dk1"/>
+              </a:fontRef>
+            </p:style>
+            <p:txBody>
+              <a:bodyPr wrap="square" rtlCol="0">
+                <a:spAutoFit/>
+              </a:bodyPr>
+              <a:lstStyle/>
+              <a:p>
+                <a:pPr/>
+                <a14:m>
+                  <m:oMathPara xmlns:m="http://schemas.openxmlformats.org/officeDocument/2006/math">
+                    <m:oMathParaPr>
+                      <m:jc m:val="centerGroup"/>
+                    </m:oMathParaPr>
+                    <m:oMath xmlns:m="http://schemas.openxmlformats.org/officeDocument/2006/math">
+                      <m:sSub>
+                        <m:sSubPr>
+                          <m:ctrlPr>
+                            <a:rPr lang="it-IT" sz="2500" b="0" i="1" smtClean="0">
+                              <a:latin typeface="Cambria Math" panose="02040503050406030204" pitchFamily="18" charset="0"/>
+                            </a:rPr>
+                          </m:ctrlPr>
+                        </m:sSubPr>
+                        <m:e>
+                          <m:r>
+                            <a:rPr lang="it-IT" sz="2500" b="0" i="1" smtClean="0">
+                              <a:latin typeface="Cambria Math" panose="02040503050406030204" pitchFamily="18" charset="0"/>
+                            </a:rPr>
+                            <m:t>𝜏</m:t>
+                          </m:r>
+                        </m:e>
+                        <m:sub>
+                          <m:r>
+                            <a:rPr lang="it-IT" sz="2500" b="0" i="1" smtClean="0">
+                              <a:latin typeface="Cambria Math" panose="02040503050406030204" pitchFamily="18" charset="0"/>
+                            </a:rPr>
+                            <m:t>𝑦</m:t>
+                          </m:r>
+                        </m:sub>
+                      </m:sSub>
+                      <m:r>
+                        <a:rPr lang="it-IT" sz="2500" b="0" i="1" smtClean="0">
+                          <a:latin typeface="Cambria Math" panose="02040503050406030204" pitchFamily="18" charset="0"/>
+                        </a:rPr>
+                        <m:t>=4.13 </m:t>
+                      </m:r>
+                      <m:r>
+                        <a:rPr lang="it-IT" sz="2500" b="0" i="1" smtClean="0">
+                          <a:latin typeface="Cambria Math" panose="02040503050406030204" pitchFamily="18" charset="0"/>
+                        </a:rPr>
+                        <m:t>𝜇</m:t>
+                      </m:r>
+                      <m:r>
+                        <m:rPr>
+                          <m:sty m:val="p"/>
+                        </m:rPr>
+                        <a:rPr lang="it-IT" sz="2500" b="0" i="0" smtClean="0">
+                          <a:latin typeface="Cambria Math" panose="02040503050406030204" pitchFamily="18" charset="0"/>
+                        </a:rPr>
+                        <m:t>rad</m:t>
+                      </m:r>
+                      <m:r>
+                        <a:rPr lang="it-IT" sz="2500" b="0" i="0" smtClean="0">
+                          <a:latin typeface="Cambria Math" panose="02040503050406030204" pitchFamily="18" charset="0"/>
+                        </a:rPr>
+                        <m:t>/</m:t>
+                      </m:r>
+                      <m:r>
+                        <m:rPr>
+                          <m:sty m:val="p"/>
+                        </m:rPr>
+                        <a:rPr lang="it-IT" sz="2500" b="0" i="0" smtClean="0">
+                          <a:latin typeface="Cambria Math" panose="02040503050406030204" pitchFamily="18" charset="0"/>
+                        </a:rPr>
+                        <m:t>mm</m:t>
+                      </m:r>
+                    </m:oMath>
+                  </m:oMathPara>
+                </a14:m>
+                <a:endParaRPr lang="it-IT" sz="2500" dirty="0"/>
+              </a:p>
+              <a:p>
+                <a:pPr/>
+                <a14:m>
+                  <m:oMathPara xmlns:m="http://schemas.openxmlformats.org/officeDocument/2006/math">
+                    <m:oMathParaPr>
+                      <m:jc m:val="centerGroup"/>
+                    </m:oMathParaPr>
+                    <m:oMath xmlns:m="http://schemas.openxmlformats.org/officeDocument/2006/math">
+                      <m:sSub>
+                        <m:sSubPr>
+                          <m:ctrlPr>
+                            <a:rPr lang="it-IT" sz="2500" b="0" i="1" smtClean="0">
+                              <a:latin typeface="Cambria Math" panose="02040503050406030204" pitchFamily="18" charset="0"/>
+                            </a:rPr>
+                          </m:ctrlPr>
+                        </m:sSubPr>
+                        <m:e>
+                          <m:r>
+                            <a:rPr lang="it-IT" sz="2500" b="0" i="1" smtClean="0">
+                              <a:latin typeface="Cambria Math" panose="02040503050406030204" pitchFamily="18" charset="0"/>
+                            </a:rPr>
+                            <m:t>𝜖</m:t>
+                          </m:r>
+                        </m:e>
+                        <m:sub>
+                          <m:r>
+                            <a:rPr lang="it-IT" sz="2500" b="0" i="1" smtClean="0">
+                              <a:latin typeface="Cambria Math" panose="02040503050406030204" pitchFamily="18" charset="0"/>
+                            </a:rPr>
+                            <m:t>𝑐h</m:t>
+                          </m:r>
+                        </m:sub>
+                      </m:sSub>
+                      <m:r>
+                        <a:rPr lang="it-IT" sz="2500" b="0" i="1" smtClean="0">
+                          <a:latin typeface="Cambria Math" panose="02040503050406030204" pitchFamily="18" charset="0"/>
+                        </a:rPr>
+                        <m:t>=1</m:t>
+                      </m:r>
+                      <m:r>
+                        <a:rPr lang="it-IT" sz="2500" b="0" i="1" smtClean="0">
+                          <a:latin typeface="Cambria Math" panose="02040503050406030204" pitchFamily="18" charset="0"/>
+                        </a:rPr>
+                        <m:t>5</m:t>
+                      </m:r>
+                      <m:r>
+                        <a:rPr lang="it-IT" sz="2500" b="0" i="1" smtClean="0">
+                          <a:latin typeface="Cambria Math" panose="02040503050406030204" pitchFamily="18" charset="0"/>
+                        </a:rPr>
+                        <m:t>.7%</m:t>
+                      </m:r>
+                    </m:oMath>
+                  </m:oMathPara>
+                </a14:m>
+                <a:endParaRPr lang="it-IT" sz="2500" dirty="0"/>
+              </a:p>
+            </p:txBody>
+          </p:sp>
+        </mc:Choice>
+        <mc:Fallback>
+          <p:sp>
+            <p:nvSpPr>
+              <p:cNvPr id="23" name="CasellaDiTesto 22">
+                <a:extLst>
+                  <a:ext uri="{FF2B5EF4-FFF2-40B4-BE49-F238E27FC236}">
+                    <a16:creationId xmlns:a16="http://schemas.microsoft.com/office/drawing/2014/main" id="{14993B24-0593-32D8-8A3F-C748A8AB7B2A}"/>
+                  </a:ext>
+                </a:extLst>
+              </p:cNvPr>
+              <p:cNvSpPr txBox="1">
+                <a:spLocks noRot="1" noChangeAspect="1" noMove="1" noResize="1" noEditPoints="1" noAdjustHandles="1" noChangeArrowheads="1" noChangeShapeType="1" noTextEdit="1"/>
+              </p:cNvSpPr>
+              <p:nvPr/>
+            </p:nvSpPr>
+            <p:spPr>
+              <a:xfrm>
+                <a:off x="4491365" y="4555324"/>
+                <a:ext cx="3184753" cy="987079"/>
+              </a:xfrm>
+              <a:prstGeom prst="roundRect">
+                <a:avLst/>
+              </a:prstGeom>
+              <a:blipFill>
+                <a:blip r:embed="rId7"/>
+                <a:stretch>
+                  <a:fillRect/>
+                </a:stretch>
+              </a:blipFill>
+              <a:ln>
+                <a:solidFill>
+                  <a:srgbClr val="FFC000"/>
+                </a:solidFill>
+              </a:ln>
+            </p:spPr>
+            <p:txBody>
+              <a:bodyPr/>
+              <a:lstStyle/>
+              <a:p>
+                <a:r>
+                  <a:rPr lang="it-IT">
+                    <a:noFill/>
+                  </a:rPr>
+                  <a:t> </a:t>
+                </a:r>
+              </a:p>
+            </p:txBody>
+          </p:sp>
+        </mc:Fallback>
+      </mc:AlternateContent>
+      <mc:AlternateContent xmlns:mc="http://schemas.openxmlformats.org/markup-compatibility/2006">
+        <mc:Choice xmlns:a14="http://schemas.microsoft.com/office/drawing/2010/main" Requires="a14">
+          <p:sp>
+            <p:nvSpPr>
+              <p:cNvPr id="25" name="CasellaDiTesto 24">
+                <a:extLst>
+                  <a:ext uri="{FF2B5EF4-FFF2-40B4-BE49-F238E27FC236}">
+                    <a16:creationId xmlns:a16="http://schemas.microsoft.com/office/drawing/2014/main" id="{08DB138D-1E46-ECF0-2112-1A771448BFB3}"/>
+                  </a:ext>
+                </a:extLst>
+              </p:cNvPr>
+              <p:cNvSpPr txBox="1"/>
+              <p:nvPr/>
+            </p:nvSpPr>
+            <p:spPr>
+              <a:xfrm>
+                <a:off x="8578697" y="4555323"/>
+                <a:ext cx="3184753" cy="987079"/>
+              </a:xfrm>
+              <a:prstGeom prst="roundRect">
+                <a:avLst/>
+              </a:prstGeom>
+              <a:ln>
+                <a:solidFill>
+                  <a:srgbClr val="FFC000"/>
+                </a:solidFill>
+              </a:ln>
+            </p:spPr>
+            <p:style>
+              <a:lnRef idx="2">
+                <a:schemeClr val="accent2"/>
+              </a:lnRef>
+              <a:fillRef idx="1">
+                <a:schemeClr val="lt1"/>
+              </a:fillRef>
+              <a:effectRef idx="0">
+                <a:schemeClr val="accent2"/>
+              </a:effectRef>
+              <a:fontRef idx="minor">
+                <a:schemeClr val="dk1"/>
+              </a:fontRef>
+            </p:style>
+            <p:txBody>
+              <a:bodyPr wrap="square" rtlCol="0">
+                <a:spAutoFit/>
+              </a:bodyPr>
+              <a:lstStyle/>
+              <a:p>
+                <a:pPr/>
+                <a14:m>
+                  <m:oMathPara xmlns:m="http://schemas.openxmlformats.org/officeDocument/2006/math">
+                    <m:oMathParaPr>
+                      <m:jc m:val="centerGroup"/>
+                    </m:oMathParaPr>
+                    <m:oMath xmlns:m="http://schemas.openxmlformats.org/officeDocument/2006/math">
+                      <m:sSub>
+                        <m:sSubPr>
+                          <m:ctrlPr>
+                            <a:rPr lang="it-IT" sz="2500" b="0" i="1" smtClean="0">
+                              <a:latin typeface="Cambria Math" panose="02040503050406030204" pitchFamily="18" charset="0"/>
+                            </a:rPr>
+                          </m:ctrlPr>
+                        </m:sSubPr>
+                        <m:e>
+                          <m:r>
+                            <a:rPr lang="it-IT" sz="2500" b="0" i="1" smtClean="0">
+                              <a:latin typeface="Cambria Math" panose="02040503050406030204" pitchFamily="18" charset="0"/>
+                            </a:rPr>
+                            <m:t>𝜏</m:t>
+                          </m:r>
+                        </m:e>
+                        <m:sub>
+                          <m:r>
+                            <a:rPr lang="it-IT" sz="2500" b="0" i="1" smtClean="0">
+                              <a:latin typeface="Cambria Math" panose="02040503050406030204" pitchFamily="18" charset="0"/>
+                            </a:rPr>
+                            <m:t>𝑦</m:t>
+                          </m:r>
+                        </m:sub>
+                      </m:sSub>
+                      <m:r>
+                        <a:rPr lang="it-IT" sz="2500" b="0" i="1" smtClean="0">
+                          <a:latin typeface="Cambria Math" panose="02040503050406030204" pitchFamily="18" charset="0"/>
+                        </a:rPr>
+                        <m:t>=4. 11 </m:t>
+                      </m:r>
+                      <m:r>
+                        <a:rPr lang="it-IT" sz="2500" b="0" i="1" smtClean="0">
+                          <a:latin typeface="Cambria Math" panose="02040503050406030204" pitchFamily="18" charset="0"/>
+                        </a:rPr>
+                        <m:t>𝜇</m:t>
+                      </m:r>
+                      <m:r>
+                        <m:rPr>
+                          <m:sty m:val="p"/>
+                        </m:rPr>
+                        <a:rPr lang="it-IT" sz="2500" b="0" i="0" smtClean="0">
+                          <a:latin typeface="Cambria Math" panose="02040503050406030204" pitchFamily="18" charset="0"/>
+                        </a:rPr>
+                        <m:t>rad</m:t>
+                      </m:r>
+                      <m:r>
+                        <a:rPr lang="it-IT" sz="2500" b="0" i="0" smtClean="0">
+                          <a:latin typeface="Cambria Math" panose="02040503050406030204" pitchFamily="18" charset="0"/>
+                        </a:rPr>
+                        <m:t>/</m:t>
+                      </m:r>
+                      <m:r>
+                        <m:rPr>
+                          <m:sty m:val="p"/>
+                        </m:rPr>
+                        <a:rPr lang="it-IT" sz="2500" b="0" i="0" smtClean="0">
+                          <a:latin typeface="Cambria Math" panose="02040503050406030204" pitchFamily="18" charset="0"/>
+                        </a:rPr>
+                        <m:t>mm</m:t>
+                      </m:r>
+                    </m:oMath>
+                  </m:oMathPara>
+                </a14:m>
+                <a:endParaRPr lang="it-IT" sz="2500" dirty="0"/>
+              </a:p>
+              <a:p>
+                <a:pPr/>
+                <a14:m>
+                  <m:oMathPara xmlns:m="http://schemas.openxmlformats.org/officeDocument/2006/math">
+                    <m:oMathParaPr>
+                      <m:jc m:val="centerGroup"/>
+                    </m:oMathParaPr>
+                    <m:oMath xmlns:m="http://schemas.openxmlformats.org/officeDocument/2006/math">
+                      <m:sSub>
+                        <m:sSubPr>
+                          <m:ctrlPr>
+                            <a:rPr lang="it-IT" sz="2500" b="0" i="1" smtClean="0">
+                              <a:latin typeface="Cambria Math" panose="02040503050406030204" pitchFamily="18" charset="0"/>
+                            </a:rPr>
+                          </m:ctrlPr>
+                        </m:sSubPr>
+                        <m:e>
+                          <m:r>
+                            <a:rPr lang="it-IT" sz="2500" b="0" i="1" smtClean="0">
+                              <a:latin typeface="Cambria Math" panose="02040503050406030204" pitchFamily="18" charset="0"/>
+                            </a:rPr>
+                            <m:t>𝜖</m:t>
+                          </m:r>
+                        </m:e>
+                        <m:sub>
+                          <m:r>
+                            <a:rPr lang="it-IT" sz="2500" b="0" i="1" smtClean="0">
+                              <a:latin typeface="Cambria Math" panose="02040503050406030204" pitchFamily="18" charset="0"/>
+                            </a:rPr>
+                            <m:t>𝑐h</m:t>
+                          </m:r>
+                        </m:sub>
+                      </m:sSub>
+                      <m:r>
+                        <a:rPr lang="it-IT" sz="2500" b="0" i="1" smtClean="0">
+                          <a:latin typeface="Cambria Math" panose="02040503050406030204" pitchFamily="18" charset="0"/>
+                        </a:rPr>
+                        <m:t>=1</m:t>
+                      </m:r>
+                      <m:r>
+                        <a:rPr lang="it-IT" sz="2500" b="0" i="1" smtClean="0">
+                          <a:latin typeface="Cambria Math" panose="02040503050406030204" pitchFamily="18" charset="0"/>
+                        </a:rPr>
+                        <m:t>5</m:t>
+                      </m:r>
+                      <m:r>
+                        <a:rPr lang="it-IT" sz="2500" b="0" i="1" smtClean="0">
+                          <a:latin typeface="Cambria Math" panose="02040503050406030204" pitchFamily="18" charset="0"/>
+                        </a:rPr>
+                        <m:t>.7%</m:t>
+                      </m:r>
+                    </m:oMath>
+                  </m:oMathPara>
+                </a14:m>
+                <a:endParaRPr lang="it-IT" sz="2500" dirty="0"/>
+              </a:p>
+            </p:txBody>
+          </p:sp>
+        </mc:Choice>
+        <mc:Fallback>
+          <p:sp>
+            <p:nvSpPr>
+              <p:cNvPr id="25" name="CasellaDiTesto 24">
+                <a:extLst>
+                  <a:ext uri="{FF2B5EF4-FFF2-40B4-BE49-F238E27FC236}">
+                    <a16:creationId xmlns:a16="http://schemas.microsoft.com/office/drawing/2014/main" id="{08DB138D-1E46-ECF0-2112-1A771448BFB3}"/>
+                  </a:ext>
+                </a:extLst>
+              </p:cNvPr>
+              <p:cNvSpPr txBox="1">
+                <a:spLocks noRot="1" noChangeAspect="1" noMove="1" noResize="1" noEditPoints="1" noAdjustHandles="1" noChangeArrowheads="1" noChangeShapeType="1" noTextEdit="1"/>
+              </p:cNvSpPr>
+              <p:nvPr/>
+            </p:nvSpPr>
+            <p:spPr>
+              <a:xfrm>
+                <a:off x="8578697" y="4555323"/>
+                <a:ext cx="3184753" cy="987079"/>
+              </a:xfrm>
+              <a:prstGeom prst="roundRect">
+                <a:avLst/>
+              </a:prstGeom>
+              <a:blipFill>
+                <a:blip r:embed="rId8"/>
+                <a:stretch>
+                  <a:fillRect/>
+                </a:stretch>
+              </a:blipFill>
+              <a:ln>
+                <a:solidFill>
+                  <a:srgbClr val="FFC000"/>
+                </a:solidFill>
+              </a:ln>
+            </p:spPr>
+            <p:txBody>
+              <a:bodyPr/>
+              <a:lstStyle/>
+              <a:p>
+                <a:r>
+                  <a:rPr lang="it-IT">
+                    <a:noFill/>
+                  </a:rPr>
+                  <a:t> </a:t>
+                </a:r>
+              </a:p>
+            </p:txBody>
+          </p:sp>
+        </mc:Fallback>
+      </mc:AlternateContent>
+    </p:spTree>
+    <p:extLst>
+      <p:ext uri="{BB962C8B-B14F-4D97-AF65-F5344CB8AC3E}">
+        <p14:creationId xmlns:p14="http://schemas.microsoft.com/office/powerpoint/2010/main" val="1574750563"/>
+      </p:ext>
+    </p:extLst>
+  </p:cSld>
+  <p:clrMapOvr>
+    <a:masterClrMapping/>
+  </p:clrMapOvr>
+</p:sld>
+</file>
+
+<file path=ppt/slides/slide8.xml><?xml version="1.0" encoding="utf-8"?>
 <p:sld xmlns:a="http://schemas.openxmlformats.org/drawingml/2006/main" xmlns:r="http://schemas.openxmlformats.org/officeDocument/2006/relationships" xmlns:p="http://schemas.openxmlformats.org/presentationml/2006/main">
   <p:cSld>
     <p:spTree>
@@ -7602,7 +9623,7 @@
                   <a:srgbClr val="002060"/>
                 </a:solidFill>
               </a:rPr>
-              <a:t>7</a:t>
+              <a:t>8</a:t>
             </a:fld>
             <a:endParaRPr lang="it-IT" sz="1500" b="1" dirty="0">
               <a:solidFill>

--- a/slides/week3.pptx
+++ b/slides/week3.pptx
@@ -5,7 +5,7 @@
     <p:sldMasterId id="2147483648" r:id="rId1"/>
   </p:sldMasterIdLst>
   <p:notesMasterIdLst>
-    <p:notesMasterId r:id="rId10"/>
+    <p:notesMasterId r:id="rId11"/>
   </p:notesMasterIdLst>
   <p:sldIdLst>
     <p:sldId id="256" r:id="rId2"/>
@@ -16,6 +16,7 @@
     <p:sldId id="276" r:id="rId7"/>
     <p:sldId id="284" r:id="rId8"/>
     <p:sldId id="280" r:id="rId9"/>
+    <p:sldId id="285" r:id="rId10"/>
   </p:sldIdLst>
   <p:sldSz cx="12192000" cy="6858000"/>
   <p:notesSz cx="6858000" cy="9144000"/>
@@ -204,7 +205,7 @@
           <a:p>
             <a:fld id="{D7A422DF-4847-4D6E-BB97-9B75D56F5D74}" type="datetimeFigureOut">
               <a:rPr lang="it-IT" smtClean="0"/>
-              <a:t>16/07/2026</a:t>
+              <a:t>17/07/2026</a:t>
             </a:fld>
             <a:endParaRPr lang="it-IT"/>
           </a:p>
@@ -795,6 +796,114 @@
 </p:notes>
 </file>
 
+<file path=ppt/notesSlides/notesSlide4.xml><?xml version="1.0" encoding="utf-8"?>
+<p:notes xmlns:a="http://schemas.openxmlformats.org/drawingml/2006/main" xmlns:r="http://schemas.openxmlformats.org/officeDocument/2006/relationships" xmlns:p="http://schemas.openxmlformats.org/presentationml/2006/main">
+  <p:cSld>
+    <p:spTree>
+      <p:nvGrpSpPr>
+        <p:cNvPr id="1" name="">
+          <a:extLst>
+            <a:ext uri="{FF2B5EF4-FFF2-40B4-BE49-F238E27FC236}">
+              <a16:creationId xmlns:a16="http://schemas.microsoft.com/office/drawing/2014/main" id="{89789A20-A2F7-AC27-B0AD-3107CF49178D}"/>
+            </a:ext>
+          </a:extLst>
+        </p:cNvPr>
+        <p:cNvGrpSpPr/>
+        <p:nvPr/>
+      </p:nvGrpSpPr>
+      <p:grpSpPr>
+        <a:xfrm>
+          <a:off x="0" y="0"/>
+          <a:ext cx="0" cy="0"/>
+          <a:chOff x="0" y="0"/>
+          <a:chExt cx="0" cy="0"/>
+        </a:xfrm>
+      </p:grpSpPr>
+      <p:sp>
+        <p:nvSpPr>
+          <p:cNvPr id="2" name="Segnaposto immagine diapositiva 1">
+            <a:extLst>
+              <a:ext uri="{FF2B5EF4-FFF2-40B4-BE49-F238E27FC236}">
+                <a16:creationId xmlns:a16="http://schemas.microsoft.com/office/drawing/2014/main" id="{5F5D3DE7-4030-6B2C-ED7C-3A792E4EF966}"/>
+              </a:ext>
+            </a:extLst>
+          </p:cNvPr>
+          <p:cNvSpPr>
+            <a:spLocks noGrp="1" noRot="1" noChangeAspect="1"/>
+          </p:cNvSpPr>
+          <p:nvPr>
+            <p:ph type="sldImg"/>
+          </p:nvPr>
+        </p:nvSpPr>
+        <p:spPr/>
+      </p:sp>
+      <p:sp>
+        <p:nvSpPr>
+          <p:cNvPr id="3" name="Segnaposto note 2">
+            <a:extLst>
+              <a:ext uri="{FF2B5EF4-FFF2-40B4-BE49-F238E27FC236}">
+                <a16:creationId xmlns:a16="http://schemas.microsoft.com/office/drawing/2014/main" id="{9A775644-8DF2-CB36-F83B-7F5C556F7261}"/>
+              </a:ext>
+            </a:extLst>
+          </p:cNvPr>
+          <p:cNvSpPr>
+            <a:spLocks noGrp="1"/>
+          </p:cNvSpPr>
+          <p:nvPr>
+            <p:ph type="body" idx="1"/>
+          </p:nvPr>
+        </p:nvSpPr>
+        <p:spPr/>
+        <p:txBody>
+          <a:bodyPr/>
+          <a:lstStyle/>
+          <a:p>
+            <a:endParaRPr lang="it-IT" dirty="0"/>
+          </a:p>
+        </p:txBody>
+      </p:sp>
+      <p:sp>
+        <p:nvSpPr>
+          <p:cNvPr id="4" name="Segnaposto numero diapositiva 3">
+            <a:extLst>
+              <a:ext uri="{FF2B5EF4-FFF2-40B4-BE49-F238E27FC236}">
+                <a16:creationId xmlns:a16="http://schemas.microsoft.com/office/drawing/2014/main" id="{5E520744-A9BE-214F-0FA1-93926D99E4A7}"/>
+              </a:ext>
+            </a:extLst>
+          </p:cNvPr>
+          <p:cNvSpPr>
+            <a:spLocks noGrp="1"/>
+          </p:cNvSpPr>
+          <p:nvPr>
+            <p:ph type="sldNum" sz="quarter" idx="5"/>
+          </p:nvPr>
+        </p:nvSpPr>
+        <p:spPr/>
+        <p:txBody>
+          <a:bodyPr/>
+          <a:lstStyle/>
+          <a:p>
+            <a:fld id="{C205392F-55BF-4B8E-AF01-45F81C88C286}" type="slidenum">
+              <a:rPr lang="it-IT" smtClean="0"/>
+              <a:t>9</a:t>
+            </a:fld>
+            <a:endParaRPr lang="it-IT"/>
+          </a:p>
+        </p:txBody>
+      </p:sp>
+    </p:spTree>
+    <p:extLst>
+      <p:ext uri="{BB962C8B-B14F-4D97-AF65-F5344CB8AC3E}">
+        <p14:creationId xmlns:p14="http://schemas.microsoft.com/office/powerpoint/2010/main" val="3982712398"/>
+      </p:ext>
+    </p:extLst>
+  </p:cSld>
+  <p:clrMapOvr>
+    <a:masterClrMapping/>
+  </p:clrMapOvr>
+</p:notes>
+</file>
+
 <file path=ppt/slideLayouts/slideLayout1.xml><?xml version="1.0" encoding="utf-8"?>
 <p:sldLayout xmlns:a="http://schemas.openxmlformats.org/drawingml/2006/main" xmlns:r="http://schemas.openxmlformats.org/officeDocument/2006/relationships" xmlns:p="http://schemas.openxmlformats.org/presentationml/2006/main" type="title" preserve="1">
   <p:cSld name="Diapositiva titolo">
@@ -942,7 +1051,7 @@
           <a:p>
             <a:fld id="{4B734174-4AE7-4BE8-A29D-97641C0FB41A}" type="datetimeFigureOut">
               <a:rPr lang="it-IT" smtClean="0"/>
-              <a:t>16/07/2026</a:t>
+              <a:t>17/07/2026</a:t>
             </a:fld>
             <a:endParaRPr lang="it-IT"/>
           </a:p>
@@ -1140,7 +1249,7 @@
           <a:p>
             <a:fld id="{4B734174-4AE7-4BE8-A29D-97641C0FB41A}" type="datetimeFigureOut">
               <a:rPr lang="it-IT" smtClean="0"/>
-              <a:t>16/07/2026</a:t>
+              <a:t>17/07/2026</a:t>
             </a:fld>
             <a:endParaRPr lang="it-IT"/>
           </a:p>
@@ -1348,7 +1457,7 @@
           <a:p>
             <a:fld id="{4B734174-4AE7-4BE8-A29D-97641C0FB41A}" type="datetimeFigureOut">
               <a:rPr lang="it-IT" smtClean="0"/>
-              <a:t>16/07/2026</a:t>
+              <a:t>17/07/2026</a:t>
             </a:fld>
             <a:endParaRPr lang="it-IT"/>
           </a:p>
@@ -1546,7 +1655,7 @@
           <a:p>
             <a:fld id="{4B734174-4AE7-4BE8-A29D-97641C0FB41A}" type="datetimeFigureOut">
               <a:rPr lang="it-IT" smtClean="0"/>
-              <a:t>16/07/2026</a:t>
+              <a:t>17/07/2026</a:t>
             </a:fld>
             <a:endParaRPr lang="it-IT"/>
           </a:p>
@@ -1821,7 +1930,7 @@
           <a:p>
             <a:fld id="{4B734174-4AE7-4BE8-A29D-97641C0FB41A}" type="datetimeFigureOut">
               <a:rPr lang="it-IT" smtClean="0"/>
-              <a:t>16/07/2026</a:t>
+              <a:t>17/07/2026</a:t>
             </a:fld>
             <a:endParaRPr lang="it-IT"/>
           </a:p>
@@ -2086,7 +2195,7 @@
           <a:p>
             <a:fld id="{4B734174-4AE7-4BE8-A29D-97641C0FB41A}" type="datetimeFigureOut">
               <a:rPr lang="it-IT" smtClean="0"/>
-              <a:t>16/07/2026</a:t>
+              <a:t>17/07/2026</a:t>
             </a:fld>
             <a:endParaRPr lang="it-IT"/>
           </a:p>
@@ -2498,7 +2607,7 @@
           <a:p>
             <a:fld id="{4B734174-4AE7-4BE8-A29D-97641C0FB41A}" type="datetimeFigureOut">
               <a:rPr lang="it-IT" smtClean="0"/>
-              <a:t>16/07/2026</a:t>
+              <a:t>17/07/2026</a:t>
             </a:fld>
             <a:endParaRPr lang="it-IT"/>
           </a:p>
@@ -2639,7 +2748,7 @@
           <a:p>
             <a:fld id="{4B734174-4AE7-4BE8-A29D-97641C0FB41A}" type="datetimeFigureOut">
               <a:rPr lang="it-IT" smtClean="0"/>
-              <a:t>16/07/2026</a:t>
+              <a:t>17/07/2026</a:t>
             </a:fld>
             <a:endParaRPr lang="it-IT"/>
           </a:p>
@@ -2752,7 +2861,7 @@
           <a:p>
             <a:fld id="{4B734174-4AE7-4BE8-A29D-97641C0FB41A}" type="datetimeFigureOut">
               <a:rPr lang="it-IT" smtClean="0"/>
-              <a:t>16/07/2026</a:t>
+              <a:t>17/07/2026</a:t>
             </a:fld>
             <a:endParaRPr lang="it-IT"/>
           </a:p>
@@ -3063,7 +3172,7 @@
           <a:p>
             <a:fld id="{4B734174-4AE7-4BE8-A29D-97641C0FB41A}" type="datetimeFigureOut">
               <a:rPr lang="it-IT" smtClean="0"/>
-              <a:t>16/07/2026</a:t>
+              <a:t>17/07/2026</a:t>
             </a:fld>
             <a:endParaRPr lang="it-IT"/>
           </a:p>
@@ -3351,7 +3460,7 @@
           <a:p>
             <a:fld id="{4B734174-4AE7-4BE8-A29D-97641C0FB41A}" type="datetimeFigureOut">
               <a:rPr lang="it-IT" smtClean="0"/>
-              <a:t>16/07/2026</a:t>
+              <a:t>17/07/2026</a:t>
             </a:fld>
             <a:endParaRPr lang="it-IT"/>
           </a:p>
@@ -3592,7 +3701,7 @@
           <a:p>
             <a:fld id="{4B734174-4AE7-4BE8-A29D-97641C0FB41A}" type="datetimeFigureOut">
               <a:rPr lang="it-IT" smtClean="0"/>
-              <a:t>16/07/2026</a:t>
+              <a:t>17/07/2026</a:t>
             </a:fld>
             <a:endParaRPr lang="it-IT"/>
           </a:p>
@@ -4104,7 +4213,23 @@
                   <a:schemeClr val="bg1"/>
                 </a:solidFill>
               </a:rPr>
-              <a:t>for TCCP and TCCPA</a:t>
+              <a:t>long </a:t>
+            </a:r>
+            <a:r>
+              <a:rPr lang="it-IT" b="1" i="1" dirty="0" err="1">
+                <a:solidFill>
+                  <a:schemeClr val="bg1"/>
+                </a:solidFill>
+              </a:rPr>
+              <a:t>crystals</a:t>
+            </a:r>
+            <a:r>
+              <a:rPr lang="it-IT" b="1" i="1" dirty="0">
+                <a:solidFill>
+                  <a:schemeClr val="bg1"/>
+                </a:solidFill>
+              </a:rPr>
+              <a:t> 1 &amp; 2</a:t>
             </a:r>
           </a:p>
         </p:txBody>
@@ -4887,8 +5012,8 @@
           </a:p>
         </p:txBody>
       </p:sp>
-      <mc:AlternateContent xmlns:mc="http://schemas.openxmlformats.org/markup-compatibility/2006">
-        <mc:Choice xmlns:a14="http://schemas.microsoft.com/office/drawing/2010/main" Requires="a14">
+      <mc:AlternateContent xmlns:mc="http://schemas.openxmlformats.org/markup-compatibility/2006" xmlns:a14="http://schemas.microsoft.com/office/drawing/2010/main">
+        <mc:Choice Requires="a14">
           <p:sp>
             <p:nvSpPr>
               <p:cNvPr id="3" name="Segnaposto contenuto 2">
@@ -5708,7 +5833,7 @@
             </p:txBody>
           </p:sp>
         </mc:Choice>
-        <mc:Fallback>
+        <mc:Fallback xmlns="">
           <p:sp>
             <p:nvSpPr>
               <p:cNvPr id="3" name="Segnaposto contenuto 2">
@@ -6192,8 +6317,8 @@
           </a:p>
         </p:txBody>
       </p:sp>
-      <mc:AlternateContent xmlns:mc="http://schemas.openxmlformats.org/markup-compatibility/2006">
-        <mc:Choice xmlns:a14="http://schemas.microsoft.com/office/drawing/2010/main" Requires="a14">
+      <mc:AlternateContent xmlns:mc="http://schemas.openxmlformats.org/markup-compatibility/2006" xmlns:a14="http://schemas.microsoft.com/office/drawing/2010/main">
+        <mc:Choice Requires="a14">
           <p:sp>
             <p:nvSpPr>
               <p:cNvPr id="3" name="Segnaposto contenuto 2">
@@ -6790,7 +6915,7 @@
             </p:txBody>
           </p:sp>
         </mc:Choice>
-        <mc:Fallback>
+        <mc:Fallback xmlns="">
           <p:sp>
             <p:nvSpPr>
               <p:cNvPr id="3" name="Segnaposto contenuto 2">
@@ -7477,8 +7602,8 @@
           </a:p>
         </p:txBody>
       </p:sp>
-      <mc:AlternateContent xmlns:mc="http://schemas.openxmlformats.org/markup-compatibility/2006">
-        <mc:Choice xmlns:a14="http://schemas.microsoft.com/office/drawing/2010/main" Requires="a14">
+      <mc:AlternateContent xmlns:mc="http://schemas.openxmlformats.org/markup-compatibility/2006" xmlns:a14="http://schemas.microsoft.com/office/drawing/2010/main">
+        <mc:Choice Requires="a14">
           <p:sp>
             <p:nvSpPr>
               <p:cNvPr id="21" name="CasellaDiTesto 20">
@@ -7525,6 +7650,7 @@
               </a:bodyPr>
               <a:lstStyle/>
               <a:p>
+                <a:pPr/>
                 <a14:m>
                   <m:oMathPara xmlns:m="http://schemas.openxmlformats.org/officeDocument/2006/math">
                     <m:oMathParaPr>
@@ -7598,6 +7724,7 @@
                 <a:endParaRPr lang="it-IT" sz="2500" dirty="0"/>
               </a:p>
               <a:p>
+                <a:pPr/>
                 <a14:m>
                   <m:oMathPara xmlns:m="http://schemas.openxmlformats.org/officeDocument/2006/math">
                     <m:oMathParaPr>
@@ -7643,7 +7770,7 @@
             </p:txBody>
           </p:sp>
         </mc:Choice>
-        <mc:Fallback>
+        <mc:Fallback xmlns="">
           <p:sp>
             <p:nvSpPr>
               <p:cNvPr id="21" name="CasellaDiTesto 20">
@@ -7693,8 +7820,8 @@
           </p:sp>
         </mc:Fallback>
       </mc:AlternateContent>
-      <mc:AlternateContent xmlns:mc="http://schemas.openxmlformats.org/markup-compatibility/2006">
-        <mc:Choice xmlns:a14="http://schemas.microsoft.com/office/drawing/2010/main" Requires="a14">
+      <mc:AlternateContent xmlns:mc="http://schemas.openxmlformats.org/markup-compatibility/2006" xmlns:a14="http://schemas.microsoft.com/office/drawing/2010/main">
+        <mc:Choice Requires="a14">
           <p:sp>
             <p:nvSpPr>
               <p:cNvPr id="23" name="CasellaDiTesto 22">
@@ -7777,19 +7904,7 @@
                         <a:rPr lang="it-IT" sz="2500" b="0" i="1" smtClean="0">
                           <a:latin typeface="Cambria Math" panose="02040503050406030204" pitchFamily="18" charset="0"/>
                         </a:rPr>
-                        <m:t>=4.</m:t>
-                      </m:r>
-                      <m:r>
-                        <a:rPr lang="it-IT" sz="2500" b="0" i="1" smtClean="0">
-                          <a:latin typeface="Cambria Math" panose="02040503050406030204" pitchFamily="18" charset="0"/>
-                        </a:rPr>
-                        <m:t>13</m:t>
-                      </m:r>
-                      <m:r>
-                        <a:rPr lang="it-IT" sz="2500" b="0" i="1" smtClean="0">
-                          <a:latin typeface="Cambria Math" panose="02040503050406030204" pitchFamily="18" charset="0"/>
-                        </a:rPr>
-                        <m:t> </m:t>
+                        <m:t>=4.13 </m:t>
                       </m:r>
                       <m:r>
                         <a:rPr lang="it-IT" sz="2500" b="0" i="1" smtClean="0">
@@ -7863,19 +7978,7 @@
                         <a:rPr lang="it-IT" sz="2500" b="0" i="1" smtClean="0">
                           <a:latin typeface="Cambria Math" panose="02040503050406030204" pitchFamily="18" charset="0"/>
                         </a:rPr>
-                        <m:t>=18.</m:t>
-                      </m:r>
-                      <m:r>
-                        <a:rPr lang="it-IT" sz="2500" b="0" i="1" smtClean="0">
-                          <a:latin typeface="Cambria Math" panose="02040503050406030204" pitchFamily="18" charset="0"/>
-                        </a:rPr>
-                        <m:t>7</m:t>
-                      </m:r>
-                      <m:r>
-                        <a:rPr lang="it-IT" sz="2500" b="0" i="1" smtClean="0">
-                          <a:latin typeface="Cambria Math" panose="02040503050406030204" pitchFamily="18" charset="0"/>
-                        </a:rPr>
-                        <m:t>%</m:t>
+                        <m:t>=18.7%</m:t>
                       </m:r>
                     </m:oMath>
                   </m:oMathPara>
@@ -7885,7 +7988,7 @@
             </p:txBody>
           </p:sp>
         </mc:Choice>
-        <mc:Fallback>
+        <mc:Fallback xmlns="">
           <p:sp>
             <p:nvSpPr>
               <p:cNvPr id="23" name="CasellaDiTesto 22">
@@ -7935,8 +8038,8 @@
           </p:sp>
         </mc:Fallback>
       </mc:AlternateContent>
-      <mc:AlternateContent xmlns:mc="http://schemas.openxmlformats.org/markup-compatibility/2006">
-        <mc:Choice xmlns:a14="http://schemas.microsoft.com/office/drawing/2010/main" Requires="a14">
+      <mc:AlternateContent xmlns:mc="http://schemas.openxmlformats.org/markup-compatibility/2006" xmlns:a14="http://schemas.microsoft.com/office/drawing/2010/main">
+        <mc:Choice Requires="a14">
           <p:sp>
             <p:nvSpPr>
               <p:cNvPr id="25" name="CasellaDiTesto 24">
@@ -8019,13 +8122,7 @@
                         <a:rPr lang="it-IT" sz="2500" b="0" i="1" smtClean="0">
                           <a:latin typeface="Cambria Math" panose="02040503050406030204" pitchFamily="18" charset="0"/>
                         </a:rPr>
-                        <m:t>=4. </m:t>
-                      </m:r>
-                      <m:r>
-                        <a:rPr lang="it-IT" sz="2500" b="0" i="1" smtClean="0">
-                          <a:latin typeface="Cambria Math" panose="02040503050406030204" pitchFamily="18" charset="0"/>
-                        </a:rPr>
-                        <m:t>11 </m:t>
+                        <m:t>=4. 11 </m:t>
                       </m:r>
                       <m:r>
                         <a:rPr lang="it-IT" sz="2500" b="0" i="1" smtClean="0">
@@ -8099,19 +8196,7 @@
                         <a:rPr lang="it-IT" sz="2500" b="0" i="1" smtClean="0">
                           <a:latin typeface="Cambria Math" panose="02040503050406030204" pitchFamily="18" charset="0"/>
                         </a:rPr>
-                        <m:t>=18.</m:t>
-                      </m:r>
-                      <m:r>
-                        <a:rPr lang="it-IT" sz="2500" b="0" i="1" smtClean="0">
-                          <a:latin typeface="Cambria Math" panose="02040503050406030204" pitchFamily="18" charset="0"/>
-                        </a:rPr>
-                        <m:t>7</m:t>
-                      </m:r>
-                      <m:r>
-                        <a:rPr lang="it-IT" sz="2500" b="0" i="1" smtClean="0">
-                          <a:latin typeface="Cambria Math" panose="02040503050406030204" pitchFamily="18" charset="0"/>
-                        </a:rPr>
-                        <m:t>%</m:t>
+                        <m:t>=18.7%</m:t>
                       </m:r>
                     </m:oMath>
                   </m:oMathPara>
@@ -8121,7 +8206,7 @@
             </p:txBody>
           </p:sp>
         </mc:Choice>
-        <mc:Fallback>
+        <mc:Fallback xmlns="">
           <p:sp>
             <p:nvSpPr>
               <p:cNvPr id="25" name="CasellaDiTesto 24">
@@ -8695,8 +8780,8 @@
           </a:p>
         </p:txBody>
       </p:sp>
-      <mc:AlternateContent xmlns:mc="http://schemas.openxmlformats.org/markup-compatibility/2006">
-        <mc:Choice xmlns:a14="http://schemas.microsoft.com/office/drawing/2010/main" Requires="a14">
+      <mc:AlternateContent xmlns:mc="http://schemas.openxmlformats.org/markup-compatibility/2006" xmlns:a14="http://schemas.microsoft.com/office/drawing/2010/main">
+        <mc:Choice Requires="a14">
           <p:sp>
             <p:nvSpPr>
               <p:cNvPr id="21" name="CasellaDiTesto 20">
@@ -8853,31 +8938,7 @@
                         <a:rPr lang="it-IT" sz="2500" b="0" i="1" smtClean="0">
                           <a:latin typeface="Cambria Math" panose="02040503050406030204" pitchFamily="18" charset="0"/>
                         </a:rPr>
-                        <m:t>=1</m:t>
-                      </m:r>
-                      <m:r>
-                        <a:rPr lang="it-IT" sz="2500" b="0" i="1" smtClean="0">
-                          <a:latin typeface="Cambria Math" panose="02040503050406030204" pitchFamily="18" charset="0"/>
-                        </a:rPr>
-                        <m:t>5</m:t>
-                      </m:r>
-                      <m:r>
-                        <a:rPr lang="it-IT" sz="2500" b="0" i="1" smtClean="0">
-                          <a:latin typeface="Cambria Math" panose="02040503050406030204" pitchFamily="18" charset="0"/>
-                        </a:rPr>
-                        <m:t>.</m:t>
-                      </m:r>
-                      <m:r>
-                        <a:rPr lang="it-IT" sz="2500" b="0" i="1" smtClean="0">
-                          <a:latin typeface="Cambria Math" panose="02040503050406030204" pitchFamily="18" charset="0"/>
-                        </a:rPr>
-                        <m:t>8</m:t>
-                      </m:r>
-                      <m:r>
-                        <a:rPr lang="it-IT" sz="2500" b="0" i="1" smtClean="0">
-                          <a:latin typeface="Cambria Math" panose="02040503050406030204" pitchFamily="18" charset="0"/>
-                        </a:rPr>
-                        <m:t>%</m:t>
+                        <m:t>=15.8%</m:t>
                       </m:r>
                     </m:oMath>
                   </m:oMathPara>
@@ -8887,7 +8948,7 @@
             </p:txBody>
           </p:sp>
         </mc:Choice>
-        <mc:Fallback>
+        <mc:Fallback xmlns="">
           <p:sp>
             <p:nvSpPr>
               <p:cNvPr id="21" name="CasellaDiTesto 20">
@@ -8937,8 +8998,8 @@
           </p:sp>
         </mc:Fallback>
       </mc:AlternateContent>
-      <mc:AlternateContent xmlns:mc="http://schemas.openxmlformats.org/markup-compatibility/2006">
-        <mc:Choice xmlns:a14="http://schemas.microsoft.com/office/drawing/2010/main" Requires="a14">
+      <mc:AlternateContent xmlns:mc="http://schemas.openxmlformats.org/markup-compatibility/2006" xmlns:a14="http://schemas.microsoft.com/office/drawing/2010/main">
+        <mc:Choice Requires="a14">
           <p:sp>
             <p:nvSpPr>
               <p:cNvPr id="23" name="CasellaDiTesto 22">
@@ -9095,19 +9156,7 @@
                         <a:rPr lang="it-IT" sz="2500" b="0" i="1" smtClean="0">
                           <a:latin typeface="Cambria Math" panose="02040503050406030204" pitchFamily="18" charset="0"/>
                         </a:rPr>
-                        <m:t>=1</m:t>
-                      </m:r>
-                      <m:r>
-                        <a:rPr lang="it-IT" sz="2500" b="0" i="1" smtClean="0">
-                          <a:latin typeface="Cambria Math" panose="02040503050406030204" pitchFamily="18" charset="0"/>
-                        </a:rPr>
-                        <m:t>5</m:t>
-                      </m:r>
-                      <m:r>
-                        <a:rPr lang="it-IT" sz="2500" b="0" i="1" smtClean="0">
-                          <a:latin typeface="Cambria Math" panose="02040503050406030204" pitchFamily="18" charset="0"/>
-                        </a:rPr>
-                        <m:t>.7%</m:t>
+                        <m:t>=15.7%</m:t>
                       </m:r>
                     </m:oMath>
                   </m:oMathPara>
@@ -9117,7 +9166,7 @@
             </p:txBody>
           </p:sp>
         </mc:Choice>
-        <mc:Fallback>
+        <mc:Fallback xmlns="">
           <p:sp>
             <p:nvSpPr>
               <p:cNvPr id="23" name="CasellaDiTesto 22">
@@ -9167,8 +9216,8 @@
           </p:sp>
         </mc:Fallback>
       </mc:AlternateContent>
-      <mc:AlternateContent xmlns:mc="http://schemas.openxmlformats.org/markup-compatibility/2006">
-        <mc:Choice xmlns:a14="http://schemas.microsoft.com/office/drawing/2010/main" Requires="a14">
+      <mc:AlternateContent xmlns:mc="http://schemas.openxmlformats.org/markup-compatibility/2006" xmlns:a14="http://schemas.microsoft.com/office/drawing/2010/main">
+        <mc:Choice Requires="a14">
           <p:sp>
             <p:nvSpPr>
               <p:cNvPr id="25" name="CasellaDiTesto 24">
@@ -9325,19 +9374,7 @@
                         <a:rPr lang="it-IT" sz="2500" b="0" i="1" smtClean="0">
                           <a:latin typeface="Cambria Math" panose="02040503050406030204" pitchFamily="18" charset="0"/>
                         </a:rPr>
-                        <m:t>=1</m:t>
-                      </m:r>
-                      <m:r>
-                        <a:rPr lang="it-IT" sz="2500" b="0" i="1" smtClean="0">
-                          <a:latin typeface="Cambria Math" panose="02040503050406030204" pitchFamily="18" charset="0"/>
-                        </a:rPr>
-                        <m:t>5</m:t>
-                      </m:r>
-                      <m:r>
-                        <a:rPr lang="it-IT" sz="2500" b="0" i="1" smtClean="0">
-                          <a:latin typeface="Cambria Math" panose="02040503050406030204" pitchFamily="18" charset="0"/>
-                        </a:rPr>
-                        <m:t>.7%</m:t>
+                        <m:t>=15.7%</m:t>
                       </m:r>
                     </m:oMath>
                   </m:oMathPara>
@@ -9347,7 +9384,7 @@
             </p:txBody>
           </p:sp>
         </mc:Choice>
-        <mc:Fallback>
+        <mc:Fallback xmlns="">
           <p:sp>
             <p:nvSpPr>
               <p:cNvPr id="25" name="CasellaDiTesto 24">
@@ -9476,47 +9513,326 @@
                   <a:schemeClr val="bg1"/>
                 </a:solidFill>
               </a:rPr>
-              <a:t>TO DO</a:t>
-            </a:r>
-          </a:p>
-        </p:txBody>
-      </p:sp>
-      <p:sp>
-        <p:nvSpPr>
-          <p:cNvPr id="3" name="Segnaposto contenuto 2">
-            <a:extLst>
-              <a:ext uri="{FF2B5EF4-FFF2-40B4-BE49-F238E27FC236}">
-                <a16:creationId xmlns:a16="http://schemas.microsoft.com/office/drawing/2014/main" id="{42B3989D-9B78-F069-E1AA-3BD85CEE114C}"/>
-              </a:ext>
-            </a:extLst>
-          </p:cNvPr>
-          <p:cNvSpPr>
-            <a:spLocks noGrp="1"/>
-          </p:cNvSpPr>
-          <p:nvPr>
-            <p:ph idx="1"/>
-          </p:nvPr>
-        </p:nvSpPr>
-        <p:spPr>
-          <a:xfrm>
-            <a:off x="838200" y="1401288"/>
-            <a:ext cx="10756900" cy="4955061"/>
-          </a:xfrm>
-        </p:spPr>
-        <p:txBody>
-          <a:bodyPr>
-            <a:normAutofit/>
-          </a:bodyPr>
-          <a:lstStyle/>
-          <a:p>
-            <a:pPr>
-              <a:buFont typeface="Wingdings" panose="05000000000000000000" pitchFamily="2" charset="2"/>
-              <a:buChar char="ü"/>
-            </a:pPr>
-            <a:endParaRPr lang="it-IT" sz="2500" dirty="0"/>
-          </a:p>
-        </p:txBody>
-      </p:sp>
+              <a:t>LOOKING AT THE REST OF THE DATA</a:t>
+            </a:r>
+          </a:p>
+        </p:txBody>
+      </p:sp>
+      <mc:AlternateContent xmlns:mc="http://schemas.openxmlformats.org/markup-compatibility/2006">
+        <mc:Choice xmlns:a14="http://schemas.microsoft.com/office/drawing/2010/main" Requires="a14">
+          <p:sp>
+            <p:nvSpPr>
+              <p:cNvPr id="3" name="Segnaposto contenuto 2">
+                <a:extLst>
+                  <a:ext uri="{FF2B5EF4-FFF2-40B4-BE49-F238E27FC236}">
+                    <a16:creationId xmlns:a16="http://schemas.microsoft.com/office/drawing/2014/main" id="{42B3989D-9B78-F069-E1AA-3BD85CEE114C}"/>
+                  </a:ext>
+                </a:extLst>
+              </p:cNvPr>
+              <p:cNvSpPr>
+                <a:spLocks noGrp="1"/>
+              </p:cNvSpPr>
+              <p:nvPr>
+                <p:ph idx="1"/>
+              </p:nvPr>
+            </p:nvSpPr>
+            <p:spPr>
+              <a:xfrm>
+                <a:off x="838200" y="1401288"/>
+                <a:ext cx="10756900" cy="4955061"/>
+              </a:xfrm>
+            </p:spPr>
+            <p:txBody>
+              <a:bodyPr>
+                <a:normAutofit/>
+              </a:bodyPr>
+              <a:lstStyle/>
+              <a:p>
+                <a:endParaRPr lang="it-IT" sz="2500" dirty="0"/>
+              </a:p>
+              <a:p>
+                <a:r>
+                  <a:rPr lang="it-IT" sz="2500" dirty="0"/>
+                  <a:t>TCCP and TCCPA from the </a:t>
+                </a:r>
+                <a:r>
+                  <a:rPr lang="it-IT" sz="2500" dirty="0" err="1"/>
+                  <a:t>article</a:t>
+                </a:r>
+                <a:r>
+                  <a:rPr lang="it-IT" sz="2500" dirty="0"/>
+                  <a:t> </a:t>
+                </a:r>
+                <a:r>
+                  <a:rPr lang="it-IT" sz="2500" dirty="0" err="1"/>
+                  <a:t>had</a:t>
+                </a:r>
+                <a:r>
+                  <a:rPr lang="it-IT" sz="2500" dirty="0"/>
+                  <a:t> a </a:t>
+                </a:r>
+                <a:r>
+                  <a:rPr lang="it-IT" sz="2500" dirty="0" err="1"/>
+                  <a:t>channeling</a:t>
+                </a:r>
+                <a:r>
+                  <a:rPr lang="it-IT" sz="2500" dirty="0"/>
+                  <a:t> </a:t>
+                </a:r>
+                <a:r>
+                  <a:rPr lang="it-IT" sz="2500" dirty="0" err="1"/>
+                  <a:t>peak</a:t>
+                </a:r>
+                <a:r>
+                  <a:rPr lang="it-IT" sz="2500" dirty="0"/>
+                  <a:t> of </a:t>
+                </a:r>
+                <a14:m>
+                  <m:oMath xmlns:m="http://schemas.openxmlformats.org/officeDocument/2006/math">
+                    <m:r>
+                      <a:rPr lang="it-IT" sz="2500" b="0" i="1" smtClean="0">
+                        <a:latin typeface="Cambria Math" panose="02040503050406030204" pitchFamily="18" charset="0"/>
+                      </a:rPr>
+                      <m:t>∼7000 </m:t>
+                    </m:r>
+                    <m:r>
+                      <a:rPr lang="it-IT" sz="2500" b="0" i="1" smtClean="0">
+                        <a:latin typeface="Cambria Math" panose="02040503050406030204" pitchFamily="18" charset="0"/>
+                      </a:rPr>
+                      <m:t>𝜇</m:t>
+                    </m:r>
+                  </m:oMath>
+                </a14:m>
+                <a:r>
+                  <a:rPr lang="it-IT" sz="2500" dirty="0"/>
+                  <a:t>rad and </a:t>
+                </a:r>
+                <a14:m>
+                  <m:oMath xmlns:m="http://schemas.openxmlformats.org/officeDocument/2006/math">
+                    <m:r>
+                      <a:rPr lang="it-IT" sz="2500" b="0" i="1" smtClean="0">
+                        <a:latin typeface="Cambria Math" panose="02040503050406030204" pitchFamily="18" charset="0"/>
+                      </a:rPr>
+                      <m:t>∼13000 </m:t>
+                    </m:r>
+                    <m:r>
+                      <a:rPr lang="it-IT" sz="2500" b="0" i="1" smtClean="0">
+                        <a:latin typeface="Cambria Math" panose="02040503050406030204" pitchFamily="18" charset="0"/>
+                      </a:rPr>
+                      <m:t>𝜇</m:t>
+                    </m:r>
+                  </m:oMath>
+                </a14:m>
+                <a:r>
+                  <a:rPr lang="it-IT" sz="2500" dirty="0"/>
+                  <a:t>rad</a:t>
+                </a:r>
+              </a:p>
+              <a:p>
+                <a:pPr>
+                  <a:buFont typeface="Aptos" panose="020B0004020202020204" pitchFamily="34" charset="0"/>
+                  <a:buChar char="→"/>
+                </a:pPr>
+                <a:r>
+                  <a:rPr lang="it-IT" sz="2500" dirty="0"/>
+                  <a:t>Here </a:t>
+                </a:r>
+                <a:r>
+                  <a:rPr lang="it-IT" sz="2500" dirty="0" err="1"/>
+                  <a:t>both</a:t>
+                </a:r>
+                <a:r>
+                  <a:rPr lang="it-IT" sz="2500" dirty="0"/>
+                  <a:t> long </a:t>
+                </a:r>
+                <a:r>
+                  <a:rPr lang="it-IT" sz="2500" dirty="0" err="1"/>
+                  <a:t>crystals</a:t>
+                </a:r>
+                <a:r>
+                  <a:rPr lang="it-IT" sz="2500" dirty="0"/>
+                  <a:t> </a:t>
+                </a:r>
+                <a:r>
+                  <a:rPr lang="it-IT" sz="2500" dirty="0" err="1"/>
+                  <a:t>have</a:t>
+                </a:r>
+                <a:r>
+                  <a:rPr lang="it-IT" sz="2500" dirty="0"/>
+                  <a:t> </a:t>
+                </a:r>
+                <a:r>
+                  <a:rPr lang="it-IT" sz="2500" dirty="0" err="1"/>
+                  <a:t>peaks</a:t>
+                </a:r>
+                <a:r>
+                  <a:rPr lang="it-IT" sz="2500" dirty="0"/>
+                  <a:t> @ </a:t>
+                </a:r>
+                <a14:m>
+                  <m:oMath xmlns:m="http://schemas.openxmlformats.org/officeDocument/2006/math">
+                    <m:r>
+                      <a:rPr lang="it-IT" sz="2500" b="0" i="1" smtClean="0">
+                        <a:latin typeface="Cambria Math" panose="02040503050406030204" pitchFamily="18" charset="0"/>
+                      </a:rPr>
+                      <m:t>∼6000 </m:t>
+                    </m:r>
+                    <m:r>
+                      <a:rPr lang="it-IT" sz="2500" b="0" i="1" smtClean="0">
+                        <a:latin typeface="Cambria Math" panose="02040503050406030204" pitchFamily="18" charset="0"/>
+                      </a:rPr>
+                      <m:t>𝜇</m:t>
+                    </m:r>
+                  </m:oMath>
+                </a14:m>
+                <a:r>
+                  <a:rPr lang="it-IT" sz="2500" dirty="0"/>
+                  <a:t>rad</a:t>
+                </a:r>
+              </a:p>
+              <a:p>
+                <a:pPr marL="0" indent="0">
+                  <a:buNone/>
+                </a:pPr>
+                <a:endParaRPr lang="it-IT" sz="2500" dirty="0"/>
+              </a:p>
+              <a:p>
+                <a:r>
+                  <a:rPr lang="it-IT" sz="2500" dirty="0"/>
+                  <a:t>TCCP and TCCPA </a:t>
+                </a:r>
+                <a:r>
+                  <a:rPr lang="it-IT" sz="2500" dirty="0" err="1"/>
+                  <a:t>had</a:t>
+                </a:r>
+                <a:r>
+                  <a:rPr lang="it-IT" sz="2500" dirty="0"/>
+                  <a:t> </a:t>
+                </a:r>
+                <a:r>
+                  <a:rPr lang="it-IT" sz="2500" dirty="0" err="1"/>
+                  <a:t>same</a:t>
+                </a:r>
+                <a:r>
+                  <a:rPr lang="it-IT" sz="2500" dirty="0"/>
+                  <a:t> width </a:t>
+                </a:r>
+                <a:r>
+                  <a:rPr lang="it-IT" sz="2500" dirty="0" err="1"/>
+                  <a:t>but</a:t>
+                </a:r>
+                <a:r>
+                  <a:rPr lang="it-IT" sz="2500" dirty="0"/>
+                  <a:t> </a:t>
+                </a:r>
+                <a:r>
+                  <a:rPr lang="it-IT" sz="2500" dirty="0" err="1"/>
+                  <a:t>different</a:t>
+                </a:r>
+                <a:r>
+                  <a:rPr lang="it-IT" sz="2500" dirty="0"/>
+                  <a:t> </a:t>
+                </a:r>
+                <a:r>
+                  <a:rPr lang="it-IT" sz="2500" dirty="0" err="1"/>
+                  <a:t>heights</a:t>
+                </a:r>
+                <a:endParaRPr lang="it-IT" sz="2500" dirty="0"/>
+              </a:p>
+              <a:p>
+                <a:pPr>
+                  <a:buFont typeface="Aptos" panose="020B0004020202020204" pitchFamily="34" charset="0"/>
+                  <a:buChar char="→"/>
+                </a:pPr>
+                <a:r>
+                  <a:rPr lang="it-IT" sz="2500" dirty="0"/>
+                  <a:t>Here </a:t>
+                </a:r>
+                <a:r>
+                  <a:rPr lang="it-IT" sz="2500" dirty="0" err="1"/>
+                  <a:t>both</a:t>
+                </a:r>
+                <a:r>
+                  <a:rPr lang="it-IT" sz="2500" dirty="0"/>
+                  <a:t> </a:t>
+                </a:r>
+                <a:r>
+                  <a:rPr lang="it-IT" sz="2500" dirty="0" err="1"/>
+                  <a:t>seems</a:t>
+                </a:r>
+                <a:r>
+                  <a:rPr lang="it-IT" sz="2500" dirty="0"/>
+                  <a:t> to </a:t>
+                </a:r>
+                <a:r>
+                  <a:rPr lang="it-IT" sz="2500" dirty="0" err="1"/>
+                  <a:t>have</a:t>
+                </a:r>
+                <a:r>
+                  <a:rPr lang="it-IT" sz="2500" dirty="0"/>
+                  <a:t> the </a:t>
+                </a:r>
+                <a:r>
+                  <a:rPr lang="it-IT" sz="2500" dirty="0" err="1"/>
+                  <a:t>same</a:t>
+                </a:r>
+                <a:r>
+                  <a:rPr lang="it-IT" sz="2500" dirty="0"/>
+                  <a:t> TCCP </a:t>
+                </a:r>
+                <a:r>
+                  <a:rPr lang="it-IT" sz="2500" dirty="0" err="1"/>
+                  <a:t>dimensions</a:t>
+                </a:r>
+                <a:endParaRPr lang="it-IT" sz="2500" dirty="0"/>
+              </a:p>
+            </p:txBody>
+          </p:sp>
+        </mc:Choice>
+        <mc:Fallback>
+          <p:sp>
+            <p:nvSpPr>
+              <p:cNvPr id="3" name="Segnaposto contenuto 2">
+                <a:extLst>
+                  <a:ext uri="{FF2B5EF4-FFF2-40B4-BE49-F238E27FC236}">
+                    <a16:creationId xmlns:a16="http://schemas.microsoft.com/office/drawing/2014/main" id="{42B3989D-9B78-F069-E1AA-3BD85CEE114C}"/>
+                  </a:ext>
+                </a:extLst>
+              </p:cNvPr>
+              <p:cNvSpPr>
+                <a:spLocks noGrp="1" noRot="1" noChangeAspect="1" noMove="1" noResize="1" noEditPoints="1" noAdjustHandles="1" noChangeArrowheads="1" noChangeShapeType="1" noTextEdit="1"/>
+              </p:cNvSpPr>
+              <p:nvPr>
+                <p:ph idx="1"/>
+              </p:nvPr>
+            </p:nvSpPr>
+            <p:spPr>
+              <a:xfrm>
+                <a:off x="838200" y="1401288"/>
+                <a:ext cx="10756900" cy="4955061"/>
+              </a:xfrm>
+              <a:blipFill>
+                <a:blip r:embed="rId3"/>
+                <a:stretch>
+                  <a:fillRect l="-1020" r="-1474"/>
+                </a:stretch>
+              </a:blipFill>
+            </p:spPr>
+            <p:txBody>
+              <a:bodyPr/>
+              <a:lstStyle/>
+              <a:p>
+                <a:r>
+                  <a:rPr lang="it-IT">
+                    <a:noFill/>
+                  </a:rPr>
+                  <a:t> </a:t>
+                </a:r>
+              </a:p>
+            </p:txBody>
+          </p:sp>
+        </mc:Fallback>
+      </mc:AlternateContent>
       <p:sp>
         <p:nvSpPr>
           <p:cNvPr id="4" name="Segnaposto data 3">
@@ -9637,6 +9953,242 @@
     <p:extLst>
       <p:ext uri="{BB962C8B-B14F-4D97-AF65-F5344CB8AC3E}">
         <p14:creationId xmlns:p14="http://schemas.microsoft.com/office/powerpoint/2010/main" val="2617952924"/>
+      </p:ext>
+    </p:extLst>
+  </p:cSld>
+  <p:clrMapOvr>
+    <a:masterClrMapping/>
+  </p:clrMapOvr>
+</p:sld>
+</file>
+
+<file path=ppt/slides/slide9.xml><?xml version="1.0" encoding="utf-8"?>
+<p:sld xmlns:a="http://schemas.openxmlformats.org/drawingml/2006/main" xmlns:r="http://schemas.openxmlformats.org/officeDocument/2006/relationships" xmlns:p="http://schemas.openxmlformats.org/presentationml/2006/main">
+  <p:cSld>
+    <p:spTree>
+      <p:nvGrpSpPr>
+        <p:cNvPr id="1" name="">
+          <a:extLst>
+            <a:ext uri="{FF2B5EF4-FFF2-40B4-BE49-F238E27FC236}">
+              <a16:creationId xmlns:a16="http://schemas.microsoft.com/office/drawing/2014/main" id="{1628154E-7F22-4DBC-E7DA-281DDC5DFA96}"/>
+            </a:ext>
+          </a:extLst>
+        </p:cNvPr>
+        <p:cNvGrpSpPr/>
+        <p:nvPr/>
+      </p:nvGrpSpPr>
+      <p:grpSpPr>
+        <a:xfrm>
+          <a:off x="0" y="0"/>
+          <a:ext cx="0" cy="0"/>
+          <a:chOff x="0" y="0"/>
+          <a:chExt cx="0" cy="0"/>
+        </a:xfrm>
+      </p:grpSpPr>
+      <p:sp>
+        <p:nvSpPr>
+          <p:cNvPr id="2" name="Titolo 1">
+            <a:extLst>
+              <a:ext uri="{FF2B5EF4-FFF2-40B4-BE49-F238E27FC236}">
+                <a16:creationId xmlns:a16="http://schemas.microsoft.com/office/drawing/2014/main" id="{1A20D539-0F6D-CCCA-51DB-2AC77193A4E2}"/>
+              </a:ext>
+            </a:extLst>
+          </p:cNvPr>
+          <p:cNvSpPr>
+            <a:spLocks noGrp="1"/>
+          </p:cNvSpPr>
+          <p:nvPr>
+            <p:ph type="title"/>
+          </p:nvPr>
+        </p:nvSpPr>
+        <p:spPr>
+          <a:xfrm>
+            <a:off x="38100" y="69651"/>
+            <a:ext cx="12114000" cy="1153094"/>
+          </a:xfrm>
+          <a:prstGeom prst="roundRect">
+            <a:avLst>
+              <a:gd name="adj" fmla="val 36459"/>
+            </a:avLst>
+          </a:prstGeom>
+          <a:solidFill>
+            <a:srgbClr val="002060"/>
+          </a:solidFill>
+        </p:spPr>
+        <p:txBody>
+          <a:bodyPr>
+            <a:normAutofit/>
+          </a:bodyPr>
+          <a:lstStyle/>
+          <a:p>
+            <a:pPr algn="ctr"/>
+            <a:r>
+              <a:rPr lang="it-IT" b="1" dirty="0">
+                <a:solidFill>
+                  <a:schemeClr val="bg1"/>
+                </a:solidFill>
+              </a:rPr>
+              <a:t>LOOKING AT THE REST OF THE DATA</a:t>
+            </a:r>
+          </a:p>
+        </p:txBody>
+      </p:sp>
+      <p:sp>
+        <p:nvSpPr>
+          <p:cNvPr id="3" name="Segnaposto contenuto 2">
+            <a:extLst>
+              <a:ext uri="{FF2B5EF4-FFF2-40B4-BE49-F238E27FC236}">
+                <a16:creationId xmlns:a16="http://schemas.microsoft.com/office/drawing/2014/main" id="{15AA59D4-1902-8E97-BB0E-30CEED7BA6DE}"/>
+              </a:ext>
+            </a:extLst>
+          </p:cNvPr>
+          <p:cNvSpPr>
+            <a:spLocks noGrp="1"/>
+          </p:cNvSpPr>
+          <p:nvPr>
+            <p:ph idx="1"/>
+          </p:nvPr>
+        </p:nvSpPr>
+        <p:spPr>
+          <a:xfrm>
+            <a:off x="838200" y="1401288"/>
+            <a:ext cx="10756900" cy="4955061"/>
+          </a:xfrm>
+        </p:spPr>
+        <p:txBody>
+          <a:bodyPr>
+            <a:normAutofit/>
+          </a:bodyPr>
+          <a:lstStyle/>
+          <a:p>
+            <a:pPr>
+              <a:buFont typeface="Wingdings" panose="05000000000000000000" pitchFamily="2" charset="2"/>
+              <a:buChar char="ü"/>
+            </a:pPr>
+            <a:endParaRPr lang="it-IT" sz="2500" dirty="0"/>
+          </a:p>
+        </p:txBody>
+      </p:sp>
+      <p:sp>
+        <p:nvSpPr>
+          <p:cNvPr id="4" name="Segnaposto data 3">
+            <a:extLst>
+              <a:ext uri="{FF2B5EF4-FFF2-40B4-BE49-F238E27FC236}">
+                <a16:creationId xmlns:a16="http://schemas.microsoft.com/office/drawing/2014/main" id="{307BDFA9-8AFA-667E-2DD9-96E182334C36}"/>
+              </a:ext>
+            </a:extLst>
+          </p:cNvPr>
+          <p:cNvSpPr>
+            <a:spLocks noGrp="1"/>
+          </p:cNvSpPr>
+          <p:nvPr>
+            <p:ph type="dt" sz="half" idx="10"/>
+          </p:nvPr>
+        </p:nvSpPr>
+        <p:spPr>
+          <a:xfrm>
+            <a:off x="838200" y="6356349"/>
+            <a:ext cx="2743200" cy="432000"/>
+          </a:xfrm>
+        </p:spPr>
+        <p:txBody>
+          <a:bodyPr/>
+          <a:lstStyle/>
+          <a:p>
+            <a:r>
+              <a:rPr lang="it-IT" sz="1500" b="1" dirty="0">
+                <a:solidFill>
+                  <a:srgbClr val="002060"/>
+                </a:solidFill>
+              </a:rPr>
+              <a:t>July 2026</a:t>
+            </a:r>
+          </a:p>
+        </p:txBody>
+      </p:sp>
+      <p:sp>
+        <p:nvSpPr>
+          <p:cNvPr id="5" name="Segnaposto piè di pagina 4">
+            <a:extLst>
+              <a:ext uri="{FF2B5EF4-FFF2-40B4-BE49-F238E27FC236}">
+                <a16:creationId xmlns:a16="http://schemas.microsoft.com/office/drawing/2014/main" id="{45BA8E51-8FEC-0FBC-2BA8-C1249E527AD1}"/>
+              </a:ext>
+            </a:extLst>
+          </p:cNvPr>
+          <p:cNvSpPr>
+            <a:spLocks noGrp="1"/>
+          </p:cNvSpPr>
+          <p:nvPr>
+            <p:ph type="ftr" sz="quarter" idx="11"/>
+          </p:nvPr>
+        </p:nvSpPr>
+        <p:spPr>
+          <a:xfrm>
+            <a:off x="0" y="6356349"/>
+            <a:ext cx="12192000" cy="432000"/>
+          </a:xfrm>
+        </p:spPr>
+        <p:txBody>
+          <a:bodyPr/>
+          <a:lstStyle/>
+          <a:p>
+            <a:r>
+              <a:rPr lang="it-IT" sz="1500" b="1" dirty="0">
+                <a:solidFill>
+                  <a:srgbClr val="002060"/>
+                </a:solidFill>
+              </a:rPr>
+              <a:t>Anna Sofia Moro</a:t>
+            </a:r>
+          </a:p>
+        </p:txBody>
+      </p:sp>
+      <p:sp>
+        <p:nvSpPr>
+          <p:cNvPr id="6" name="Segnaposto numero diapositiva 5">
+            <a:extLst>
+              <a:ext uri="{FF2B5EF4-FFF2-40B4-BE49-F238E27FC236}">
+                <a16:creationId xmlns:a16="http://schemas.microsoft.com/office/drawing/2014/main" id="{B38B9141-9E60-0A4C-178E-4687CA82540E}"/>
+              </a:ext>
+            </a:extLst>
+          </p:cNvPr>
+          <p:cNvSpPr>
+            <a:spLocks noGrp="1"/>
+          </p:cNvSpPr>
+          <p:nvPr>
+            <p:ph type="sldNum" sz="quarter" idx="12"/>
+          </p:nvPr>
+        </p:nvSpPr>
+        <p:spPr>
+          <a:xfrm>
+            <a:off x="8610600" y="6356349"/>
+            <a:ext cx="2743200" cy="432000"/>
+          </a:xfrm>
+        </p:spPr>
+        <p:txBody>
+          <a:bodyPr/>
+          <a:lstStyle/>
+          <a:p>
+            <a:fld id="{0A318BD9-CA14-4A83-ACF0-03D5918EB402}" type="slidenum">
+              <a:rPr lang="it-IT" sz="1500" b="1" smtClean="0">
+                <a:solidFill>
+                  <a:srgbClr val="002060"/>
+                </a:solidFill>
+              </a:rPr>
+              <a:t>9</a:t>
+            </a:fld>
+            <a:endParaRPr lang="it-IT" sz="1500" b="1" dirty="0">
+              <a:solidFill>
+                <a:srgbClr val="002060"/>
+              </a:solidFill>
+            </a:endParaRPr>
+          </a:p>
+        </p:txBody>
+      </p:sp>
+    </p:spTree>
+    <p:extLst>
+      <p:ext uri="{BB962C8B-B14F-4D97-AF65-F5344CB8AC3E}">
+        <p14:creationId xmlns:p14="http://schemas.microsoft.com/office/powerpoint/2010/main" val="379635324"/>
       </p:ext>
     </p:extLst>
   </p:cSld>
